--- a/presentation.pptx
+++ b/presentation.pptx
@@ -29,9 +29,13 @@
     <p:sldId id="277" r:id="rId23"/>
     <p:sldId id="278" r:id="rId24"/>
     <p:sldId id="279" r:id="rId25"/>
+    <p:sldId id="280" r:id="rId26"/>
+    <p:sldId id="281" r:id="rId27"/>
+    <p:sldId id="282" r:id="rId28"/>
+    <p:sldId id="283" r:id="rId29"/>
   </p:sldIdLst>
   <p:notesMasterIdLst>
-    <p:notesMasterId r:id="rId26"/>
+    <p:notesMasterId r:id="rId30"/>
   </p:notesMasterIdLst>
   <p:sldSz cx="9144000" cy="5143500"/>
   <p:notesSz cx="5143500" cy="9144000"/>
@@ -1957,6 +1961,358 @@
             <a:fld id="{F7021451-1387-4CA6-816F-3879F97B5CBC}" type="slidenum">
               <a:rPr lang="en-US"/>
               <a:t>24</a:t>
+            </a:fld>
+            <a:endParaRPr lang="en-US"/>
+          </a:p>
+        </p:txBody>
+      </p:sp>
+    </p:spTree>
+    <p:extLst>
+      <p:ext uri="{BB962C8B-B14F-4D97-AF65-F5344CB8AC3E}">
+        <p14:creationId xmlns:p14="http://schemas.microsoft.com/office/powerpoint/2010/main" val="1024086991"/>
+      </p:ext>
+    </p:extLst>
+  </p:cSld>
+  <p:clrMapOvr>
+    <a:masterClrMapping/>
+  </p:clrMapOvr>
+</p:notes>
+</file>
+
+<file path=ppt/notesSlides/notesSlide25.xml><?xml version="1.0" encoding="utf-8"?>
+<p:notes xmlns:a="http://schemas.openxmlformats.org/drawingml/2006/main" xmlns:r="http://schemas.openxmlformats.org/officeDocument/2006/relationships" xmlns:p="http://schemas.openxmlformats.org/presentationml/2006/main">
+  <p:cSld>
+    <p:spTree>
+      <p:nvGrpSpPr>
+        <p:cNvPr id="1" name=""/>
+        <p:cNvGrpSpPr/>
+        <p:nvPr/>
+      </p:nvGrpSpPr>
+      <p:grpSpPr>
+        <a:xfrm>
+          <a:off x="0" y="0"/>
+          <a:ext cx="0" cy="0"/>
+          <a:chOff x="0" y="0"/>
+          <a:chExt cx="0" cy="0"/>
+        </a:xfrm>
+      </p:grpSpPr>
+      <p:sp>
+        <p:nvSpPr>
+          <p:cNvPr id="2" name="Slide Image Placeholder 1"/>
+          <p:cNvSpPr>
+            <a:spLocks noGrp="1" noRot="1" noChangeAspect="1"/>
+          </p:cNvSpPr>
+          <p:nvPr>
+            <p:ph type="sldImg"/>
+          </p:nvPr>
+        </p:nvSpPr>
+        <p:spPr/>
+      </p:sp>
+      <p:sp>
+        <p:nvSpPr>
+          <p:cNvPr id="3" name="Notes Placeholder 2"/>
+          <p:cNvSpPr>
+            <a:spLocks noGrp="1"/>
+          </p:cNvSpPr>
+          <p:nvPr>
+            <p:ph type="body" idx="1"/>
+          </p:nvPr>
+        </p:nvSpPr>
+        <p:spPr/>
+        <p:txBody>
+          <a:bodyPr/>
+          <a:lstStyle/>
+          <a:p>
+            <a:r>
+              <a:rPr lang="en-US" dirty="0"/>
+              <a:t/>
+            </a:r>
+            <a:endParaRPr lang="en-US" dirty="0"/>
+          </a:p>
+        </p:txBody>
+      </p:sp>
+      <p:sp>
+        <p:nvSpPr>
+          <p:cNvPr id="4" name="Slide Number Placeholder 3"/>
+          <p:cNvSpPr>
+            <a:spLocks noGrp="1"/>
+          </p:cNvSpPr>
+          <p:nvPr>
+            <p:ph type="sldNum" sz="quarter" idx="10"/>
+          </p:nvPr>
+        </p:nvSpPr>
+        <p:spPr/>
+        <p:txBody>
+          <a:bodyPr/>
+          <a:lstStyle/>
+          <a:p>
+            <a:fld id="{F7021451-1387-4CA6-816F-3879F97B5CBC}" type="slidenum">
+              <a:rPr lang="en-US"/>
+              <a:t>25</a:t>
+            </a:fld>
+            <a:endParaRPr lang="en-US"/>
+          </a:p>
+        </p:txBody>
+      </p:sp>
+    </p:spTree>
+    <p:extLst>
+      <p:ext uri="{BB962C8B-B14F-4D97-AF65-F5344CB8AC3E}">
+        <p14:creationId xmlns:p14="http://schemas.microsoft.com/office/powerpoint/2010/main" val="1024086991"/>
+      </p:ext>
+    </p:extLst>
+  </p:cSld>
+  <p:clrMapOvr>
+    <a:masterClrMapping/>
+  </p:clrMapOvr>
+</p:notes>
+</file>
+
+<file path=ppt/notesSlides/notesSlide26.xml><?xml version="1.0" encoding="utf-8"?>
+<p:notes xmlns:a="http://schemas.openxmlformats.org/drawingml/2006/main" xmlns:r="http://schemas.openxmlformats.org/officeDocument/2006/relationships" xmlns:p="http://schemas.openxmlformats.org/presentationml/2006/main">
+  <p:cSld>
+    <p:spTree>
+      <p:nvGrpSpPr>
+        <p:cNvPr id="1" name=""/>
+        <p:cNvGrpSpPr/>
+        <p:nvPr/>
+      </p:nvGrpSpPr>
+      <p:grpSpPr>
+        <a:xfrm>
+          <a:off x="0" y="0"/>
+          <a:ext cx="0" cy="0"/>
+          <a:chOff x="0" y="0"/>
+          <a:chExt cx="0" cy="0"/>
+        </a:xfrm>
+      </p:grpSpPr>
+      <p:sp>
+        <p:nvSpPr>
+          <p:cNvPr id="2" name="Slide Image Placeholder 1"/>
+          <p:cNvSpPr>
+            <a:spLocks noGrp="1" noRot="1" noChangeAspect="1"/>
+          </p:cNvSpPr>
+          <p:nvPr>
+            <p:ph type="sldImg"/>
+          </p:nvPr>
+        </p:nvSpPr>
+        <p:spPr/>
+      </p:sp>
+      <p:sp>
+        <p:nvSpPr>
+          <p:cNvPr id="3" name="Notes Placeholder 2"/>
+          <p:cNvSpPr>
+            <a:spLocks noGrp="1"/>
+          </p:cNvSpPr>
+          <p:nvPr>
+            <p:ph type="body" idx="1"/>
+          </p:nvPr>
+        </p:nvSpPr>
+        <p:spPr/>
+        <p:txBody>
+          <a:bodyPr/>
+          <a:lstStyle/>
+          <a:p>
+            <a:r>
+              <a:rPr lang="en-US" dirty="0"/>
+              <a:t/>
+            </a:r>
+            <a:endParaRPr lang="en-US" dirty="0"/>
+          </a:p>
+        </p:txBody>
+      </p:sp>
+      <p:sp>
+        <p:nvSpPr>
+          <p:cNvPr id="4" name="Slide Number Placeholder 3"/>
+          <p:cNvSpPr>
+            <a:spLocks noGrp="1"/>
+          </p:cNvSpPr>
+          <p:nvPr>
+            <p:ph type="sldNum" sz="quarter" idx="10"/>
+          </p:nvPr>
+        </p:nvSpPr>
+        <p:spPr/>
+        <p:txBody>
+          <a:bodyPr/>
+          <a:lstStyle/>
+          <a:p>
+            <a:fld id="{F7021451-1387-4CA6-816F-3879F97B5CBC}" type="slidenum">
+              <a:rPr lang="en-US"/>
+              <a:t>26</a:t>
+            </a:fld>
+            <a:endParaRPr lang="en-US"/>
+          </a:p>
+        </p:txBody>
+      </p:sp>
+    </p:spTree>
+    <p:extLst>
+      <p:ext uri="{BB962C8B-B14F-4D97-AF65-F5344CB8AC3E}">
+        <p14:creationId xmlns:p14="http://schemas.microsoft.com/office/powerpoint/2010/main" val="1024086991"/>
+      </p:ext>
+    </p:extLst>
+  </p:cSld>
+  <p:clrMapOvr>
+    <a:masterClrMapping/>
+  </p:clrMapOvr>
+</p:notes>
+</file>
+
+<file path=ppt/notesSlides/notesSlide27.xml><?xml version="1.0" encoding="utf-8"?>
+<p:notes xmlns:a="http://schemas.openxmlformats.org/drawingml/2006/main" xmlns:r="http://schemas.openxmlformats.org/officeDocument/2006/relationships" xmlns:p="http://schemas.openxmlformats.org/presentationml/2006/main">
+  <p:cSld>
+    <p:spTree>
+      <p:nvGrpSpPr>
+        <p:cNvPr id="1" name=""/>
+        <p:cNvGrpSpPr/>
+        <p:nvPr/>
+      </p:nvGrpSpPr>
+      <p:grpSpPr>
+        <a:xfrm>
+          <a:off x="0" y="0"/>
+          <a:ext cx="0" cy="0"/>
+          <a:chOff x="0" y="0"/>
+          <a:chExt cx="0" cy="0"/>
+        </a:xfrm>
+      </p:grpSpPr>
+      <p:sp>
+        <p:nvSpPr>
+          <p:cNvPr id="2" name="Slide Image Placeholder 1"/>
+          <p:cNvSpPr>
+            <a:spLocks noGrp="1" noRot="1" noChangeAspect="1"/>
+          </p:cNvSpPr>
+          <p:nvPr>
+            <p:ph type="sldImg"/>
+          </p:nvPr>
+        </p:nvSpPr>
+        <p:spPr/>
+      </p:sp>
+      <p:sp>
+        <p:nvSpPr>
+          <p:cNvPr id="3" name="Notes Placeholder 2"/>
+          <p:cNvSpPr>
+            <a:spLocks noGrp="1"/>
+          </p:cNvSpPr>
+          <p:nvPr>
+            <p:ph type="body" idx="1"/>
+          </p:nvPr>
+        </p:nvSpPr>
+        <p:spPr/>
+        <p:txBody>
+          <a:bodyPr/>
+          <a:lstStyle/>
+          <a:p>
+            <a:r>
+              <a:rPr lang="en-US" dirty="0"/>
+              <a:t/>
+            </a:r>
+            <a:endParaRPr lang="en-US" dirty="0"/>
+          </a:p>
+        </p:txBody>
+      </p:sp>
+      <p:sp>
+        <p:nvSpPr>
+          <p:cNvPr id="4" name="Slide Number Placeholder 3"/>
+          <p:cNvSpPr>
+            <a:spLocks noGrp="1"/>
+          </p:cNvSpPr>
+          <p:nvPr>
+            <p:ph type="sldNum" sz="quarter" idx="10"/>
+          </p:nvPr>
+        </p:nvSpPr>
+        <p:spPr/>
+        <p:txBody>
+          <a:bodyPr/>
+          <a:lstStyle/>
+          <a:p>
+            <a:fld id="{F7021451-1387-4CA6-816F-3879F97B5CBC}" type="slidenum">
+              <a:rPr lang="en-US"/>
+              <a:t>27</a:t>
+            </a:fld>
+            <a:endParaRPr lang="en-US"/>
+          </a:p>
+        </p:txBody>
+      </p:sp>
+    </p:spTree>
+    <p:extLst>
+      <p:ext uri="{BB962C8B-B14F-4D97-AF65-F5344CB8AC3E}">
+        <p14:creationId xmlns:p14="http://schemas.microsoft.com/office/powerpoint/2010/main" val="1024086991"/>
+      </p:ext>
+    </p:extLst>
+  </p:cSld>
+  <p:clrMapOvr>
+    <a:masterClrMapping/>
+  </p:clrMapOvr>
+</p:notes>
+</file>
+
+<file path=ppt/notesSlides/notesSlide28.xml><?xml version="1.0" encoding="utf-8"?>
+<p:notes xmlns:a="http://schemas.openxmlformats.org/drawingml/2006/main" xmlns:r="http://schemas.openxmlformats.org/officeDocument/2006/relationships" xmlns:p="http://schemas.openxmlformats.org/presentationml/2006/main">
+  <p:cSld>
+    <p:spTree>
+      <p:nvGrpSpPr>
+        <p:cNvPr id="1" name=""/>
+        <p:cNvGrpSpPr/>
+        <p:nvPr/>
+      </p:nvGrpSpPr>
+      <p:grpSpPr>
+        <a:xfrm>
+          <a:off x="0" y="0"/>
+          <a:ext cx="0" cy="0"/>
+          <a:chOff x="0" y="0"/>
+          <a:chExt cx="0" cy="0"/>
+        </a:xfrm>
+      </p:grpSpPr>
+      <p:sp>
+        <p:nvSpPr>
+          <p:cNvPr id="2" name="Slide Image Placeholder 1"/>
+          <p:cNvSpPr>
+            <a:spLocks noGrp="1" noRot="1" noChangeAspect="1"/>
+          </p:cNvSpPr>
+          <p:nvPr>
+            <p:ph type="sldImg"/>
+          </p:nvPr>
+        </p:nvSpPr>
+        <p:spPr/>
+      </p:sp>
+      <p:sp>
+        <p:nvSpPr>
+          <p:cNvPr id="3" name="Notes Placeholder 2"/>
+          <p:cNvSpPr>
+            <a:spLocks noGrp="1"/>
+          </p:cNvSpPr>
+          <p:nvPr>
+            <p:ph type="body" idx="1"/>
+          </p:nvPr>
+        </p:nvSpPr>
+        <p:spPr/>
+        <p:txBody>
+          <a:bodyPr/>
+          <a:lstStyle/>
+          <a:p>
+            <a:r>
+              <a:rPr lang="en-US" dirty="0"/>
+              <a:t/>
+            </a:r>
+            <a:endParaRPr lang="en-US" dirty="0"/>
+          </a:p>
+        </p:txBody>
+      </p:sp>
+      <p:sp>
+        <p:nvSpPr>
+          <p:cNvPr id="4" name="Slide Number Placeholder 3"/>
+          <p:cNvSpPr>
+            <a:spLocks noGrp="1"/>
+          </p:cNvSpPr>
+          <p:nvPr>
+            <p:ph type="sldNum" sz="quarter" idx="10"/>
+          </p:nvPr>
+        </p:nvSpPr>
+        <p:spPr/>
+        <p:txBody>
+          <a:bodyPr/>
+          <a:lstStyle/>
+          <a:p>
+            <a:fld id="{F7021451-1387-4CA6-816F-3879F97B5CBC}" type="slidenum">
+              <a:rPr lang="en-US"/>
+              <a:t>28</a:t>
             </a:fld>
             <a:endParaRPr lang="en-US"/>
           </a:p>
@@ -3542,8 +3898,8 @@
         </p:nvSpPr>
         <p:spPr>
           <a:xfrm>
-            <a:off x="507950" y="355550"/>
-            <a:ext cx="8290661" cy="352425"/>
+            <a:off x="507950" y="406301"/>
+            <a:ext cx="8290661" cy="371475"/>
           </a:xfrm>
           <a:prstGeom prst="rect">
             <a:avLst/>
@@ -3557,15 +3913,15 @@
           <a:p>
             <a:pPr algn="l" indent="0" marL="0">
               <a:spcBef>
-                <a:spcPts val="2800"/>
+                <a:spcPts val="3200"/>
               </a:spcBef>
               <a:spcAft>
-                <a:spcPts val="1400"/>
+                <a:spcPts val="1600"/>
               </a:spcAft>
               <a:buNone/>
             </a:pPr>
             <a:r>
-              <a:rPr lang="en-US" sz="2400" b="1" dirty="0">
+              <a:rPr lang="en-US" sz="2600" b="1" dirty="0">
                 <a:solidFill>
                   <a:srgbClr val="1C2833"/>
                 </a:solidFill>
@@ -3573,9 +3929,9 @@
                 <a:ea typeface="Arial" pitchFamily="34" charset="-122"/>
                 <a:cs typeface="Arial" pitchFamily="34" charset="-120"/>
               </a:rPr>
-              <a:t>The Full Pipeline</a:t>
-            </a:r>
-            <a:endParaRPr lang="en-US" sz="2400" dirty="0"/>
+              <a:t>Crafting Agents &amp; Skills</a:t>
+            </a:r>
+            <a:endParaRPr lang="en-US" sz="2600" dirty="0"/>
           </a:p>
         </p:txBody>
       </p:sp>
@@ -3587,16 +3943,16 @@
         </p:nvSpPr>
         <p:spPr>
           <a:xfrm>
-            <a:off x="507950" y="885676"/>
-            <a:ext cx="822871" cy="269677"/>
+            <a:off x="507950" y="980926"/>
+            <a:ext cx="3937099" cy="4162574"/>
           </a:xfrm>
           <a:prstGeom prst="roundRect">
             <a:avLst>
-              <a:gd name="adj" fmla="val 18837"/>
+              <a:gd name="adj" fmla="val 1935"/>
             </a:avLst>
           </a:prstGeom>
           <a:solidFill>
-            <a:srgbClr val="1C2833"/>
+            <a:srgbClr val="FFFFFF"/>
           </a:solidFill>
           <a:ln/>
         </p:spPr>
@@ -3613,14 +3969,37 @@
       </p:sp>
       <p:sp>
         <p:nvSpPr>
-          <p:cNvPr id="4" name="Text 2"/>
-          <p:cNvSpPr/>
-          <p:nvPr/>
-        </p:nvSpPr>
-        <p:spPr>
-          <a:xfrm>
-            <a:off x="634901" y="949077"/>
-            <a:ext cx="580349" cy="142875"/>
+          <p:cNvPr id="4" name="Shape 2"/>
+          <p:cNvSpPr/>
+          <p:nvPr/>
+        </p:nvSpPr>
+        <p:spPr>
+          <a:xfrm>
+            <a:off x="507950" y="1004739"/>
+            <a:ext cx="3937099" cy="0"/>
+          </a:xfrm>
+          <a:prstGeom prst="line">
+            <a:avLst/>
+          </a:prstGeom>
+          <a:noFill/>
+          <a:ln w="47625">
+            <a:solidFill>
+              <a:srgbClr val="277884"/>
+            </a:solidFill>
+            <a:prstDash val="solid"/>
+          </a:ln>
+        </p:spPr>
+      </p:sp>
+      <p:sp>
+        <p:nvSpPr>
+          <p:cNvPr id="5" name="Text 3"/>
+          <p:cNvSpPr/>
+          <p:nvPr/>
+        </p:nvSpPr>
+        <p:spPr>
+          <a:xfrm>
+            <a:off x="711101" y="1206252"/>
+            <a:ext cx="3601414" cy="238125"/>
           </a:xfrm>
           <a:prstGeom prst="rect">
             <a:avLst/>
@@ -3633,49 +4012,13 @@
           <a:lstStyle/>
           <a:p>
             <a:pPr algn="l" indent="0" marL="0">
-              <a:buNone/>
-            </a:pPr>
-            <a:r>
-              <a:rPr lang="en-US" sz="1000" b="1" dirty="0">
-                <a:solidFill>
-                  <a:srgbClr val="FFFFFF"/>
-                </a:solidFill>
-                <a:latin typeface="Arial" pitchFamily="34" charset="0"/>
-                <a:ea typeface="Arial" pitchFamily="34" charset="-122"/>
-                <a:cs typeface="Arial" pitchFamily="34" charset="-120"/>
-              </a:rPr>
-              <a:t>BA Agent</a:t>
-            </a:r>
-            <a:endParaRPr lang="en-US" sz="1000" dirty="0"/>
-          </a:p>
-        </p:txBody>
-      </p:sp>
-      <p:sp>
-        <p:nvSpPr>
-          <p:cNvPr id="5" name="Text 3"/>
-          <p:cNvSpPr/>
-          <p:nvPr/>
-        </p:nvSpPr>
-        <p:spPr>
-          <a:xfrm>
-            <a:off x="1407021" y="934789"/>
-            <a:ext cx="155448" cy="171450"/>
-          </a:xfrm>
-          <a:prstGeom prst="rect">
-            <a:avLst/>
-          </a:prstGeom>
-          <a:noFill/>
-          <a:ln/>
-        </p:spPr>
-        <p:txBody>
-          <a:bodyPr wrap="square" lIns="0" tIns="0" rIns="0" bIns="0" rtlCol="0" anchor="t"/>
-          <a:lstStyle/>
-          <a:p>
-            <a:pPr algn="l" indent="0" marL="0">
-              <a:buNone/>
-            </a:pPr>
-            <a:r>
-              <a:rPr lang="en-US" sz="1200" b="1" dirty="0">
+              <a:spcAft>
+                <a:spcPts val="1000"/>
+              </a:spcAft>
+              <a:buNone/>
+            </a:pPr>
+            <a:r>
+              <a:rPr lang="en-US" sz="1600" b="1" dirty="0">
                 <a:solidFill>
                   <a:srgbClr val="277884"/>
                 </a:solidFill>
@@ -3683,9 +4026,9 @@
                 <a:ea typeface="Arial" pitchFamily="34" charset="-122"/>
                 <a:cs typeface="Arial" pitchFamily="34" charset="-120"/>
               </a:rPr>
-              <a:t>→</a:t>
-            </a:r>
-            <a:endParaRPr lang="en-US" sz="1200" dirty="0"/>
+              <a:t>Agents</a:t>
+            </a:r>
+            <a:endParaRPr lang="en-US" sz="1600" dirty="0"/>
           </a:p>
         </p:txBody>
       </p:sp>
@@ -3697,16 +4040,122 @@
         </p:nvSpPr>
         <p:spPr>
           <a:xfrm>
-            <a:off x="1635621" y="885676"/>
-            <a:ext cx="959495" cy="269677"/>
+            <a:off x="711101" y="1571327"/>
+            <a:ext cx="3530798" cy="2079427"/>
+          </a:xfrm>
+          <a:prstGeom prst="rect">
+            <a:avLst/>
+          </a:prstGeom>
+          <a:noFill/>
+          <a:ln/>
+        </p:spPr>
+        <p:txBody>
+          <a:bodyPr wrap="square" lIns="127000" tIns="0" rIns="0" bIns="0" rtlCol="0" anchor="t"/>
+          <a:lstStyle/>
+          <a:p>
+            <a:pPr algn="l" marL="127000" indent="-127000">
+              <a:lnSpc>
+                <a:spcPts val="2340"/>
+              </a:lnSpc>
+              <a:buSzPct val="100000"/>
+              <a:buChar char="•"/>
+            </a:pPr>
+            <a:r>
+              <a:rPr lang="en-US" sz="1300" dirty="0">
+                <a:solidFill>
+                  <a:srgbClr val="2C3E50"/>
+                </a:solidFill>
+                <a:latin typeface="Arial" pitchFamily="34" charset="0"/>
+                <a:ea typeface="Arial" pitchFamily="34" charset="-122"/>
+                <a:cs typeface="Arial" pitchFamily="34" charset="-120"/>
+              </a:rPr>
+              <a:t>Keep agent definitions lightweight — role + rules, not domain knowledge</a:t>
+            </a:r>
+            <a:endParaRPr lang="en-US" sz="1300" dirty="0"/>
+          </a:p>
+          <a:p>
+            <a:pPr algn="l" marL="127000" indent="-127000">
+              <a:lnSpc>
+                <a:spcPts val="2340"/>
+              </a:lnSpc>
+              <a:buSzPct val="100000"/>
+              <a:buChar char="•"/>
+            </a:pPr>
+            <a:r>
+              <a:rPr lang="en-US" sz="1300" dirty="0">
+                <a:solidFill>
+                  <a:srgbClr val="2C3E50"/>
+                </a:solidFill>
+                <a:latin typeface="Arial" pitchFamily="34" charset="0"/>
+                <a:ea typeface="Arial" pitchFamily="34" charset="-122"/>
+                <a:cs typeface="Arial" pitchFamily="34" charset="-120"/>
+              </a:rPr>
+              <a:t>Frontmatter matters: name, description, tools</a:t>
+            </a:r>
+            <a:endParaRPr lang="en-US" sz="1300" dirty="0"/>
+          </a:p>
+          <a:p>
+            <a:pPr algn="l" marL="127000" indent="-127000">
+              <a:lnSpc>
+                <a:spcPts val="2340"/>
+              </a:lnSpc>
+              <a:buSzPct val="100000"/>
+              <a:buChar char="•"/>
+            </a:pPr>
+            <a:r>
+              <a:rPr lang="en-US" sz="1300" dirty="0">
+                <a:solidFill>
+                  <a:srgbClr val="2C3E50"/>
+                </a:solidFill>
+                <a:latin typeface="Arial" pitchFamily="34" charset="0"/>
+                <a:ea typeface="Arial" pitchFamily="34" charset="-122"/>
+                <a:cs typeface="Arial" pitchFamily="34" charset="-120"/>
+              </a:rPr>
+              <a:t>Description drives auto-loading — make it specific</a:t>
+            </a:r>
+            <a:endParaRPr lang="en-US" sz="1300" dirty="0"/>
+          </a:p>
+          <a:p>
+            <a:pPr algn="l" marL="127000" indent="-127000">
+              <a:lnSpc>
+                <a:spcPts val="2340"/>
+              </a:lnSpc>
+              <a:buSzPct val="100000"/>
+              <a:buChar char="•"/>
+            </a:pPr>
+            <a:r>
+              <a:rPr lang="en-US" sz="1300" dirty="0">
+                <a:solidFill>
+                  <a:srgbClr val="2C3E50"/>
+                </a:solidFill>
+                <a:latin typeface="Arial" pitchFamily="34" charset="0"/>
+                <a:ea typeface="Arial" pitchFamily="34" charset="-122"/>
+                <a:cs typeface="Arial" pitchFamily="34" charset="-120"/>
+              </a:rPr>
+              <a:t>One capable agent &gt; three narrow ones</a:t>
+            </a:r>
+            <a:endParaRPr lang="en-US" sz="1300" dirty="0"/>
+          </a:p>
+        </p:txBody>
+      </p:sp>
+      <p:sp>
+        <p:nvSpPr>
+          <p:cNvPr id="7" name="Text 5"/>
+          <p:cNvSpPr/>
+          <p:nvPr/>
+        </p:nvSpPr>
+        <p:spPr>
+          <a:xfrm>
+            <a:off x="4698950" y="980926"/>
+            <a:ext cx="3937099" cy="4162574"/>
           </a:xfrm>
           <a:prstGeom prst="roundRect">
             <a:avLst>
-              <a:gd name="adj" fmla="val 18837"/>
+              <a:gd name="adj" fmla="val 1935"/>
             </a:avLst>
           </a:prstGeom>
           <a:solidFill>
-            <a:srgbClr val="1C2833"/>
+            <a:srgbClr val="FFFFFF"/>
           </a:solidFill>
           <a:ln/>
         </p:spPr>
@@ -3723,14 +4172,37 @@
       </p:sp>
       <p:sp>
         <p:nvSpPr>
-          <p:cNvPr id="7" name="Text 5"/>
-          <p:cNvSpPr/>
-          <p:nvPr/>
-        </p:nvSpPr>
-        <p:spPr>
-          <a:xfrm>
-            <a:off x="1762571" y="949077"/>
-            <a:ext cx="719706" cy="142875"/>
+          <p:cNvPr id="8" name="Shape 6"/>
+          <p:cNvSpPr/>
+          <p:nvPr/>
+        </p:nvSpPr>
+        <p:spPr>
+          <a:xfrm>
+            <a:off x="4698950" y="1004739"/>
+            <a:ext cx="3937099" cy="0"/>
+          </a:xfrm>
+          <a:prstGeom prst="line">
+            <a:avLst/>
+          </a:prstGeom>
+          <a:noFill/>
+          <a:ln w="47625">
+            <a:solidFill>
+              <a:srgbClr val="277884"/>
+            </a:solidFill>
+            <a:prstDash val="solid"/>
+          </a:ln>
+        </p:spPr>
+      </p:sp>
+      <p:sp>
+        <p:nvSpPr>
+          <p:cNvPr id="9" name="Text 7"/>
+          <p:cNvSpPr/>
+          <p:nvPr/>
+        </p:nvSpPr>
+        <p:spPr>
+          <a:xfrm>
+            <a:off x="4902101" y="1206252"/>
+            <a:ext cx="3601414" cy="238125"/>
           </a:xfrm>
           <a:prstGeom prst="rect">
             <a:avLst/>
@@ -3743,49 +4215,13 @@
           <a:lstStyle/>
           <a:p>
             <a:pPr algn="l" indent="0" marL="0">
-              <a:buNone/>
-            </a:pPr>
-            <a:r>
-              <a:rPr lang="en-US" sz="1000" b="1" dirty="0">
-                <a:solidFill>
-                  <a:srgbClr val="FFFFFF"/>
-                </a:solidFill>
-                <a:latin typeface="Arial" pitchFamily="34" charset="0"/>
-                <a:ea typeface="Arial" pitchFamily="34" charset="-122"/>
-                <a:cs typeface="Arial" pitchFamily="34" charset="-120"/>
-              </a:rPr>
-              <a:t>Issue (DoR)</a:t>
-            </a:r>
-            <a:endParaRPr lang="en-US" sz="1000" dirty="0"/>
-          </a:p>
-        </p:txBody>
-      </p:sp>
-      <p:sp>
-        <p:nvSpPr>
-          <p:cNvPr id="8" name="Text 6"/>
-          <p:cNvSpPr/>
-          <p:nvPr/>
-        </p:nvSpPr>
-        <p:spPr>
-          <a:xfrm>
-            <a:off x="2671316" y="934789"/>
-            <a:ext cx="155448" cy="171450"/>
-          </a:xfrm>
-          <a:prstGeom prst="rect">
-            <a:avLst/>
-          </a:prstGeom>
-          <a:noFill/>
-          <a:ln/>
-        </p:spPr>
-        <p:txBody>
-          <a:bodyPr wrap="square" lIns="0" tIns="0" rIns="0" bIns="0" rtlCol="0" anchor="t"/>
-          <a:lstStyle/>
-          <a:p>
-            <a:pPr algn="l" indent="0" marL="0">
-              <a:buNone/>
-            </a:pPr>
-            <a:r>
-              <a:rPr lang="en-US" sz="1200" b="1" dirty="0">
+              <a:spcAft>
+                <a:spcPts val="1000"/>
+              </a:spcAft>
+              <a:buNone/>
+            </a:pPr>
+            <a:r>
+              <a:rPr lang="en-US" sz="1600" b="1" dirty="0">
                 <a:solidFill>
                   <a:srgbClr val="277884"/>
                 </a:solidFill>
@@ -3793,41 +4229,9 @@
                 <a:ea typeface="Arial" pitchFamily="34" charset="-122"/>
                 <a:cs typeface="Arial" pitchFamily="34" charset="-120"/>
               </a:rPr>
-              <a:t>→</a:t>
-            </a:r>
-            <a:endParaRPr lang="en-US" sz="1200" dirty="0"/>
-          </a:p>
-        </p:txBody>
-      </p:sp>
-      <p:sp>
-        <p:nvSpPr>
-          <p:cNvPr id="9" name="Text 7"/>
-          <p:cNvSpPr/>
-          <p:nvPr/>
-        </p:nvSpPr>
-        <p:spPr>
-          <a:xfrm>
-            <a:off x="2899916" y="885676"/>
-            <a:ext cx="1185416" cy="269677"/>
-          </a:xfrm>
-          <a:prstGeom prst="roundRect">
-            <a:avLst>
-              <a:gd name="adj" fmla="val 18837"/>
-            </a:avLst>
-          </a:prstGeom>
-          <a:solidFill>
-            <a:srgbClr val="5EA8A7"/>
-          </a:solidFill>
-          <a:ln/>
-        </p:spPr>
-        <p:txBody>
-          <a:bodyPr wrap="square" rtlCol="0" anchor="ctr"/>
-          <a:lstStyle/>
-          <a:p>
-            <a:pPr indent="0" marL="0">
-              <a:buNone/>
-            </a:pPr>
-            <a:endParaRPr lang="en-US" dirty="0"/>
+              <a:t>Skills</a:t>
+            </a:r>
+            <a:endParaRPr lang="en-US" sz="1600" dirty="0"/>
           </a:p>
         </p:txBody>
       </p:sp>
@@ -3839,1024 +4243,101 @@
         </p:nvSpPr>
         <p:spPr>
           <a:xfrm>
-            <a:off x="3026866" y="949077"/>
-            <a:ext cx="950146" cy="142875"/>
-          </a:xfrm>
-          <a:prstGeom prst="rect">
-            <a:avLst/>
-          </a:prstGeom>
-          <a:noFill/>
-          <a:ln/>
-        </p:spPr>
-        <p:txBody>
-          <a:bodyPr wrap="square" lIns="0" tIns="0" rIns="0" bIns="0" rtlCol="0" anchor="t"/>
-          <a:lstStyle/>
-          <a:p>
-            <a:pPr algn="l" indent="0" marL="0">
-              <a:buNone/>
-            </a:pPr>
-            <a:r>
-              <a:rPr lang="en-US" sz="1000" b="1" dirty="0">
-                <a:solidFill>
-                  <a:srgbClr val="FFFFFF"/>
-                </a:solidFill>
-                <a:latin typeface="Arial" pitchFamily="34" charset="0"/>
-                <a:ea typeface="Arial" pitchFamily="34" charset="-122"/>
-                <a:cs typeface="Arial" pitchFamily="34" charset="-120"/>
-              </a:rPr>
-              <a:t>Human reviews</a:t>
-            </a:r>
-            <a:endParaRPr lang="en-US" sz="1000" dirty="0"/>
-          </a:p>
-        </p:txBody>
-      </p:sp>
-      <p:sp>
-        <p:nvSpPr>
-          <p:cNvPr id="11" name="Text 9"/>
-          <p:cNvSpPr/>
-          <p:nvPr/>
-        </p:nvSpPr>
-        <p:spPr>
-          <a:xfrm>
-            <a:off x="683109" y="1206103"/>
-            <a:ext cx="8031682" cy="171450"/>
-          </a:xfrm>
-          <a:prstGeom prst="rect">
-            <a:avLst/>
-          </a:prstGeom>
-          <a:noFill/>
-          <a:ln/>
-        </p:spPr>
-        <p:txBody>
-          <a:bodyPr wrap="square" lIns="0" tIns="0" rIns="0" bIns="0" rtlCol="0" anchor="t"/>
-          <a:lstStyle/>
-          <a:p>
-            <a:pPr algn="ctr" indent="0" marL="0">
-              <a:buNone/>
-            </a:pPr>
-            <a:r>
-              <a:rPr lang="en-US" sz="1200" b="1" dirty="0">
-                <a:solidFill>
-                  <a:srgbClr val="277884"/>
-                </a:solidFill>
-                <a:latin typeface="Arial" pitchFamily="34" charset="0"/>
-                <a:ea typeface="Arial" pitchFamily="34" charset="-122"/>
-                <a:cs typeface="Arial" pitchFamily="34" charset="-120"/>
-              </a:rPr>
-              <a:t>↓</a:t>
-            </a:r>
-            <a:endParaRPr lang="en-US" sz="1200" dirty="0"/>
-          </a:p>
-        </p:txBody>
-      </p:sp>
-      <p:sp>
-        <p:nvSpPr>
-          <p:cNvPr id="12" name="Text 10"/>
-          <p:cNvSpPr/>
-          <p:nvPr/>
-        </p:nvSpPr>
-        <p:spPr>
-          <a:xfrm>
-            <a:off x="507950" y="1428304"/>
-            <a:ext cx="1468041" cy="269677"/>
-          </a:xfrm>
-          <a:prstGeom prst="roundRect">
-            <a:avLst>
-              <a:gd name="adj" fmla="val 18837"/>
-            </a:avLst>
-          </a:prstGeom>
-          <a:solidFill>
-            <a:srgbClr val="1C2833"/>
-          </a:solidFill>
-          <a:ln/>
-        </p:spPr>
-        <p:txBody>
-          <a:bodyPr wrap="square" rtlCol="0" anchor="ctr"/>
-          <a:lstStyle/>
-          <a:p>
-            <a:pPr indent="0" marL="0">
-              <a:buNone/>
-            </a:pPr>
-            <a:endParaRPr lang="en-US" dirty="0"/>
-          </a:p>
-        </p:txBody>
-      </p:sp>
-      <p:sp>
-        <p:nvSpPr>
-          <p:cNvPr id="13" name="Text 11"/>
-          <p:cNvSpPr/>
-          <p:nvPr/>
-        </p:nvSpPr>
-        <p:spPr>
-          <a:xfrm>
-            <a:off x="634901" y="1491704"/>
-            <a:ext cx="1238423" cy="142875"/>
-          </a:xfrm>
-          <a:prstGeom prst="rect">
-            <a:avLst/>
-          </a:prstGeom>
-          <a:noFill/>
-          <a:ln/>
-        </p:spPr>
-        <p:txBody>
-          <a:bodyPr wrap="square" lIns="0" tIns="0" rIns="0" bIns="0" rtlCol="0" anchor="t"/>
-          <a:lstStyle/>
-          <a:p>
-            <a:pPr algn="l" indent="0" marL="0">
-              <a:buNone/>
-            </a:pPr>
-            <a:r>
-              <a:rPr lang="en-US" sz="1000" b="1" dirty="0">
-                <a:solidFill>
-                  <a:srgbClr val="FFFFFF"/>
-                </a:solidFill>
-                <a:latin typeface="Arial" pitchFamily="34" charset="0"/>
-                <a:ea typeface="Arial" pitchFamily="34" charset="-122"/>
-                <a:cs typeface="Arial" pitchFamily="34" charset="-120"/>
-              </a:rPr>
-              <a:t>Developer assesses</a:t>
-            </a:r>
-            <a:endParaRPr lang="en-US" sz="1000" dirty="0"/>
-          </a:p>
-        </p:txBody>
-      </p:sp>
-      <p:sp>
-        <p:nvSpPr>
-          <p:cNvPr id="14" name="Text 12"/>
-          <p:cNvSpPr/>
-          <p:nvPr/>
-        </p:nvSpPr>
-        <p:spPr>
-          <a:xfrm>
-            <a:off x="2052191" y="1477417"/>
-            <a:ext cx="155448" cy="171450"/>
-          </a:xfrm>
-          <a:prstGeom prst="rect">
-            <a:avLst/>
-          </a:prstGeom>
-          <a:noFill/>
-          <a:ln/>
-        </p:spPr>
-        <p:txBody>
-          <a:bodyPr wrap="square" lIns="0" tIns="0" rIns="0" bIns="0" rtlCol="0" anchor="t"/>
-          <a:lstStyle/>
-          <a:p>
-            <a:pPr algn="l" indent="0" marL="0">
-              <a:buNone/>
-            </a:pPr>
-            <a:r>
-              <a:rPr lang="en-US" sz="1200" b="1" dirty="0">
-                <a:solidFill>
-                  <a:srgbClr val="277884"/>
-                </a:solidFill>
-                <a:latin typeface="Arial" pitchFamily="34" charset="0"/>
-                <a:ea typeface="Arial" pitchFamily="34" charset="-122"/>
-                <a:cs typeface="Arial" pitchFamily="34" charset="-120"/>
-              </a:rPr>
-              <a:t>→</a:t>
-            </a:r>
-            <a:endParaRPr lang="en-US" sz="1200" dirty="0"/>
-          </a:p>
-        </p:txBody>
-      </p:sp>
-      <p:sp>
-        <p:nvSpPr>
-          <p:cNvPr id="15" name="Text 13"/>
-          <p:cNvSpPr/>
-          <p:nvPr/>
-        </p:nvSpPr>
-        <p:spPr>
-          <a:xfrm>
-            <a:off x="2280791" y="1428304"/>
-            <a:ext cx="1495871" cy="269677"/>
-          </a:xfrm>
-          <a:prstGeom prst="roundRect">
-            <a:avLst>
-              <a:gd name="adj" fmla="val 18837"/>
-            </a:avLst>
-          </a:prstGeom>
-          <a:solidFill>
-            <a:srgbClr val="5EA8A7"/>
-          </a:solidFill>
-          <a:ln/>
-        </p:spPr>
-        <p:txBody>
-          <a:bodyPr wrap="square" rtlCol="0" anchor="ctr"/>
-          <a:lstStyle/>
-          <a:p>
-            <a:pPr indent="0" marL="0">
-              <a:buNone/>
-            </a:pPr>
-            <a:endParaRPr lang="en-US" dirty="0"/>
-          </a:p>
-        </p:txBody>
-      </p:sp>
-      <p:sp>
-        <p:nvSpPr>
-          <p:cNvPr id="16" name="Text 14"/>
-          <p:cNvSpPr/>
-          <p:nvPr/>
-        </p:nvSpPr>
-        <p:spPr>
-          <a:xfrm>
-            <a:off x="2407741" y="1491704"/>
-            <a:ext cx="1266810" cy="142875"/>
-          </a:xfrm>
-          <a:prstGeom prst="rect">
-            <a:avLst/>
-          </a:prstGeom>
-          <a:noFill/>
-          <a:ln/>
-        </p:spPr>
-        <p:txBody>
-          <a:bodyPr wrap="square" lIns="0" tIns="0" rIns="0" bIns="0" rtlCol="0" anchor="t"/>
-          <a:lstStyle/>
-          <a:p>
-            <a:pPr algn="l" indent="0" marL="0">
-              <a:buNone/>
-            </a:pPr>
-            <a:r>
-              <a:rPr lang="en-US" sz="1000" b="1" dirty="0">
-                <a:solidFill>
-                  <a:srgbClr val="FFFFFF"/>
-                </a:solidFill>
-                <a:latin typeface="Arial" pitchFamily="34" charset="0"/>
-                <a:ea typeface="Arial" pitchFamily="34" charset="-122"/>
-                <a:cs typeface="Arial" pitchFamily="34" charset="-120"/>
-              </a:rPr>
-              <a:t>Questions answered</a:t>
-            </a:r>
-            <a:endParaRPr lang="en-US" sz="1000" dirty="0"/>
-          </a:p>
-        </p:txBody>
-      </p:sp>
-      <p:sp>
-        <p:nvSpPr>
-          <p:cNvPr id="17" name="Text 15"/>
-          <p:cNvSpPr/>
-          <p:nvPr/>
-        </p:nvSpPr>
-        <p:spPr>
-          <a:xfrm>
-            <a:off x="683109" y="1748730"/>
-            <a:ext cx="8031682" cy="171450"/>
-          </a:xfrm>
-          <a:prstGeom prst="rect">
-            <a:avLst/>
-          </a:prstGeom>
-          <a:noFill/>
-          <a:ln/>
-        </p:spPr>
-        <p:txBody>
-          <a:bodyPr wrap="square" lIns="0" tIns="0" rIns="0" bIns="0" rtlCol="0" anchor="t"/>
-          <a:lstStyle/>
-          <a:p>
-            <a:pPr algn="ctr" indent="0" marL="0">
-              <a:buNone/>
-            </a:pPr>
-            <a:r>
-              <a:rPr lang="en-US" sz="1200" b="1" dirty="0">
-                <a:solidFill>
-                  <a:srgbClr val="277884"/>
-                </a:solidFill>
-                <a:latin typeface="Arial" pitchFamily="34" charset="0"/>
-                <a:ea typeface="Arial" pitchFamily="34" charset="-122"/>
-                <a:cs typeface="Arial" pitchFamily="34" charset="-120"/>
-              </a:rPr>
-              <a:t>↓</a:t>
-            </a:r>
-            <a:endParaRPr lang="en-US" sz="1200" dirty="0"/>
-          </a:p>
-        </p:txBody>
-      </p:sp>
-      <p:sp>
-        <p:nvSpPr>
-          <p:cNvPr id="18" name="Text 16"/>
-          <p:cNvSpPr/>
-          <p:nvPr/>
-        </p:nvSpPr>
-        <p:spPr>
-          <a:xfrm>
-            <a:off x="507950" y="1970931"/>
-            <a:ext cx="1164282" cy="269677"/>
-          </a:xfrm>
-          <a:prstGeom prst="roundRect">
-            <a:avLst>
-              <a:gd name="adj" fmla="val 18837"/>
-            </a:avLst>
-          </a:prstGeom>
-          <a:solidFill>
-            <a:srgbClr val="1C2833"/>
-          </a:solidFill>
-          <a:ln/>
-        </p:spPr>
-        <p:txBody>
-          <a:bodyPr wrap="square" rtlCol="0" anchor="ctr"/>
-          <a:lstStyle/>
-          <a:p>
-            <a:pPr indent="0" marL="0">
-              <a:buNone/>
-            </a:pPr>
-            <a:endParaRPr lang="en-US" dirty="0"/>
-          </a:p>
-        </p:txBody>
-      </p:sp>
-      <p:sp>
-        <p:nvSpPr>
-          <p:cNvPr id="19" name="Text 17"/>
-          <p:cNvSpPr/>
-          <p:nvPr/>
-        </p:nvSpPr>
-        <p:spPr>
-          <a:xfrm>
-            <a:off x="634901" y="2034332"/>
-            <a:ext cx="928589" cy="142875"/>
-          </a:xfrm>
-          <a:prstGeom prst="rect">
-            <a:avLst/>
-          </a:prstGeom>
-          <a:noFill/>
-          <a:ln/>
-        </p:spPr>
-        <p:txBody>
-          <a:bodyPr wrap="square" lIns="0" tIns="0" rIns="0" bIns="0" rtlCol="0" anchor="t"/>
-          <a:lstStyle/>
-          <a:p>
-            <a:pPr algn="l" indent="0" marL="0">
-              <a:buNone/>
-            </a:pPr>
-            <a:r>
-              <a:rPr lang="en-US" sz="1000" b="1" dirty="0">
-                <a:solidFill>
-                  <a:srgbClr val="FFFFFF"/>
-                </a:solidFill>
-                <a:latin typeface="Arial" pitchFamily="34" charset="0"/>
-                <a:ea typeface="Arial" pitchFamily="34" charset="-122"/>
-                <a:cs typeface="Arial" pitchFamily="34" charset="-120"/>
-              </a:rPr>
-              <a:t>Design created</a:t>
-            </a:r>
-            <a:endParaRPr lang="en-US" sz="1000" dirty="0"/>
-          </a:p>
-        </p:txBody>
-      </p:sp>
-      <p:sp>
-        <p:nvSpPr>
-          <p:cNvPr id="20" name="Text 18"/>
-          <p:cNvSpPr/>
-          <p:nvPr/>
-        </p:nvSpPr>
-        <p:spPr>
-          <a:xfrm>
-            <a:off x="1748433" y="2020044"/>
-            <a:ext cx="155448" cy="171450"/>
-          </a:xfrm>
-          <a:prstGeom prst="rect">
-            <a:avLst/>
-          </a:prstGeom>
-          <a:noFill/>
-          <a:ln/>
-        </p:spPr>
-        <p:txBody>
-          <a:bodyPr wrap="square" lIns="0" tIns="0" rIns="0" bIns="0" rtlCol="0" anchor="t"/>
-          <a:lstStyle/>
-          <a:p>
-            <a:pPr algn="l" indent="0" marL="0">
-              <a:buNone/>
-            </a:pPr>
-            <a:r>
-              <a:rPr lang="en-US" sz="1200" b="1" dirty="0">
-                <a:solidFill>
-                  <a:srgbClr val="277884"/>
-                </a:solidFill>
-                <a:latin typeface="Arial" pitchFamily="34" charset="0"/>
-                <a:ea typeface="Arial" pitchFamily="34" charset="-122"/>
-                <a:cs typeface="Arial" pitchFamily="34" charset="-120"/>
-              </a:rPr>
-              <a:t>→</a:t>
-            </a:r>
-            <a:endParaRPr lang="en-US" sz="1200" dirty="0"/>
-          </a:p>
-        </p:txBody>
-      </p:sp>
-      <p:sp>
-        <p:nvSpPr>
-          <p:cNvPr id="21" name="Text 19"/>
-          <p:cNvSpPr/>
-          <p:nvPr/>
-        </p:nvSpPr>
-        <p:spPr>
-          <a:xfrm>
-            <a:off x="1977033" y="1970931"/>
-            <a:ext cx="1679525" cy="269677"/>
-          </a:xfrm>
-          <a:prstGeom prst="roundRect">
-            <a:avLst>
-              <a:gd name="adj" fmla="val 18837"/>
-            </a:avLst>
-          </a:prstGeom>
-          <a:solidFill>
-            <a:srgbClr val="277884"/>
-          </a:solidFill>
-          <a:ln/>
-        </p:spPr>
-        <p:txBody>
-          <a:bodyPr wrap="square" rtlCol="0" anchor="ctr"/>
-          <a:lstStyle/>
-          <a:p>
-            <a:pPr indent="0" marL="0">
-              <a:buNone/>
-            </a:pPr>
-            <a:endParaRPr lang="en-US" dirty="0"/>
-          </a:p>
-        </p:txBody>
-      </p:sp>
-      <p:sp>
-        <p:nvSpPr>
-          <p:cNvPr id="22" name="Text 20"/>
-          <p:cNvSpPr/>
-          <p:nvPr/>
-        </p:nvSpPr>
-        <p:spPr>
-          <a:xfrm>
-            <a:off x="2103983" y="2034332"/>
-            <a:ext cx="1454137" cy="142875"/>
-          </a:xfrm>
-          <a:prstGeom prst="rect">
-            <a:avLst/>
-          </a:prstGeom>
-          <a:noFill/>
-          <a:ln/>
-        </p:spPr>
-        <p:txBody>
-          <a:bodyPr wrap="square" lIns="0" tIns="0" rIns="0" bIns="0" rtlCol="0" anchor="t"/>
-          <a:lstStyle/>
-          <a:p>
-            <a:pPr algn="l" indent="0" marL="0">
-              <a:buNone/>
-            </a:pPr>
-            <a:r>
-              <a:rPr lang="en-US" sz="1000" b="1" dirty="0">
-                <a:solidFill>
-                  <a:srgbClr val="FFFFFF"/>
-                </a:solidFill>
-                <a:latin typeface="Arial" pitchFamily="34" charset="0"/>
-                <a:ea typeface="Arial" pitchFamily="34" charset="-122"/>
-                <a:cs typeface="Arial" pitchFamily="34" charset="-120"/>
-              </a:rPr>
-              <a:t>Adversarial review loop</a:t>
-            </a:r>
-            <a:endParaRPr lang="en-US" sz="1000" dirty="0"/>
-          </a:p>
-        </p:txBody>
-      </p:sp>
-      <p:sp>
-        <p:nvSpPr>
-          <p:cNvPr id="23" name="Text 21"/>
-          <p:cNvSpPr/>
-          <p:nvPr/>
-        </p:nvSpPr>
-        <p:spPr>
-          <a:xfrm>
-            <a:off x="683109" y="2291358"/>
-            <a:ext cx="8031682" cy="171450"/>
-          </a:xfrm>
-          <a:prstGeom prst="rect">
-            <a:avLst/>
-          </a:prstGeom>
-          <a:noFill/>
-          <a:ln/>
-        </p:spPr>
-        <p:txBody>
-          <a:bodyPr wrap="square" lIns="0" tIns="0" rIns="0" bIns="0" rtlCol="0" anchor="t"/>
-          <a:lstStyle/>
-          <a:p>
-            <a:pPr algn="ctr" indent="0" marL="0">
-              <a:buNone/>
-            </a:pPr>
-            <a:r>
-              <a:rPr lang="en-US" sz="1200" b="1" dirty="0">
-                <a:solidFill>
-                  <a:srgbClr val="277884"/>
-                </a:solidFill>
-                <a:latin typeface="Arial" pitchFamily="34" charset="0"/>
-                <a:ea typeface="Arial" pitchFamily="34" charset="-122"/>
-                <a:cs typeface="Arial" pitchFamily="34" charset="-120"/>
-              </a:rPr>
-              <a:t>↓</a:t>
-            </a:r>
-            <a:endParaRPr lang="en-US" sz="1200" dirty="0"/>
-          </a:p>
-        </p:txBody>
-      </p:sp>
-      <p:sp>
-        <p:nvSpPr>
-          <p:cNvPr id="24" name="Text 22"/>
-          <p:cNvSpPr/>
-          <p:nvPr/>
-        </p:nvSpPr>
-        <p:spPr>
-          <a:xfrm>
-            <a:off x="507950" y="2513558"/>
-            <a:ext cx="1728490" cy="269677"/>
-          </a:xfrm>
-          <a:prstGeom prst="roundRect">
-            <a:avLst>
-              <a:gd name="adj" fmla="val 18837"/>
-            </a:avLst>
-          </a:prstGeom>
-          <a:solidFill>
-            <a:srgbClr val="5EA8A7"/>
-          </a:solidFill>
-          <a:ln/>
-        </p:spPr>
-        <p:txBody>
-          <a:bodyPr wrap="square" rtlCol="0" anchor="ctr"/>
-          <a:lstStyle/>
-          <a:p>
-            <a:pPr indent="0" marL="0">
-              <a:buNone/>
-            </a:pPr>
-            <a:endParaRPr lang="en-US" dirty="0"/>
-          </a:p>
-        </p:txBody>
-      </p:sp>
-      <p:sp>
-        <p:nvSpPr>
-          <p:cNvPr id="25" name="Text 23"/>
-          <p:cNvSpPr/>
-          <p:nvPr/>
-        </p:nvSpPr>
-        <p:spPr>
-          <a:xfrm>
-            <a:off x="634901" y="2576959"/>
-            <a:ext cx="1504081" cy="142875"/>
-          </a:xfrm>
-          <a:prstGeom prst="rect">
-            <a:avLst/>
-          </a:prstGeom>
-          <a:noFill/>
-          <a:ln/>
-        </p:spPr>
-        <p:txBody>
-          <a:bodyPr wrap="square" lIns="0" tIns="0" rIns="0" bIns="0" rtlCol="0" anchor="t"/>
-          <a:lstStyle/>
-          <a:p>
-            <a:pPr algn="l" indent="0" marL="0">
-              <a:buNone/>
-            </a:pPr>
-            <a:r>
-              <a:rPr lang="en-US" sz="1000" b="1" dirty="0">
-                <a:solidFill>
-                  <a:srgbClr val="FFFFFF"/>
-                </a:solidFill>
-                <a:latin typeface="Arial" pitchFamily="34" charset="0"/>
-                <a:ea typeface="Arial" pitchFamily="34" charset="-122"/>
-                <a:cs typeface="Arial" pitchFamily="34" charset="-120"/>
-              </a:rPr>
-              <a:t>Human approves design</a:t>
-            </a:r>
-            <a:endParaRPr lang="en-US" sz="1000" dirty="0"/>
-          </a:p>
-        </p:txBody>
-      </p:sp>
-      <p:sp>
-        <p:nvSpPr>
-          <p:cNvPr id="26" name="Text 24"/>
-          <p:cNvSpPr/>
-          <p:nvPr/>
-        </p:nvSpPr>
-        <p:spPr>
-          <a:xfrm>
-            <a:off x="683109" y="2833985"/>
-            <a:ext cx="8031682" cy="171450"/>
-          </a:xfrm>
-          <a:prstGeom prst="rect">
-            <a:avLst/>
-          </a:prstGeom>
-          <a:noFill/>
-          <a:ln/>
-        </p:spPr>
-        <p:txBody>
-          <a:bodyPr wrap="square" lIns="0" tIns="0" rIns="0" bIns="0" rtlCol="0" anchor="t"/>
-          <a:lstStyle/>
-          <a:p>
-            <a:pPr algn="ctr" indent="0" marL="0">
-              <a:buNone/>
-            </a:pPr>
-            <a:r>
-              <a:rPr lang="en-US" sz="1200" b="1" dirty="0">
-                <a:solidFill>
-                  <a:srgbClr val="277884"/>
-                </a:solidFill>
-                <a:latin typeface="Arial" pitchFamily="34" charset="0"/>
-                <a:ea typeface="Arial" pitchFamily="34" charset="-122"/>
-                <a:cs typeface="Arial" pitchFamily="34" charset="-120"/>
-              </a:rPr>
-              <a:t>↓</a:t>
-            </a:r>
-            <a:endParaRPr lang="en-US" sz="1200" dirty="0"/>
-          </a:p>
-        </p:txBody>
-      </p:sp>
-      <p:sp>
-        <p:nvSpPr>
-          <p:cNvPr id="27" name="Text 25"/>
-          <p:cNvSpPr/>
-          <p:nvPr/>
-        </p:nvSpPr>
-        <p:spPr>
-          <a:xfrm>
-            <a:off x="507950" y="3056186"/>
-            <a:ext cx="1488430" cy="269677"/>
-          </a:xfrm>
-          <a:prstGeom prst="roundRect">
-            <a:avLst>
-              <a:gd name="adj" fmla="val 18837"/>
-            </a:avLst>
-          </a:prstGeom>
-          <a:solidFill>
-            <a:srgbClr val="1C2833"/>
-          </a:solidFill>
-          <a:ln/>
-        </p:spPr>
-        <p:txBody>
-          <a:bodyPr wrap="square" rtlCol="0" anchor="ctr"/>
-          <a:lstStyle/>
-          <a:p>
-            <a:pPr indent="0" marL="0">
-              <a:buNone/>
-            </a:pPr>
-            <a:endParaRPr lang="en-US" dirty="0"/>
-          </a:p>
-        </p:txBody>
-      </p:sp>
-      <p:sp>
-        <p:nvSpPr>
-          <p:cNvPr id="28" name="Text 26"/>
-          <p:cNvSpPr/>
-          <p:nvPr/>
-        </p:nvSpPr>
-        <p:spPr>
-          <a:xfrm>
-            <a:off x="634901" y="3119586"/>
-            <a:ext cx="1259220" cy="142875"/>
-          </a:xfrm>
-          <a:prstGeom prst="rect">
-            <a:avLst/>
-          </a:prstGeom>
-          <a:noFill/>
-          <a:ln/>
-        </p:spPr>
-        <p:txBody>
-          <a:bodyPr wrap="square" lIns="0" tIns="0" rIns="0" bIns="0" rtlCol="0" anchor="t"/>
-          <a:lstStyle/>
-          <a:p>
-            <a:pPr algn="l" indent="0" marL="0">
-              <a:buNone/>
-            </a:pPr>
-            <a:r>
-              <a:rPr lang="en-US" sz="1000" b="1" dirty="0">
-                <a:solidFill>
-                  <a:srgbClr val="FFFFFF"/>
-                </a:solidFill>
-                <a:latin typeface="Arial" pitchFamily="34" charset="0"/>
-                <a:ea typeface="Arial" pitchFamily="34" charset="-122"/>
-                <a:cs typeface="Arial" pitchFamily="34" charset="-120"/>
-              </a:rPr>
-              <a:t>TDD implementation</a:t>
-            </a:r>
-            <a:endParaRPr lang="en-US" sz="1000" dirty="0"/>
-          </a:p>
-        </p:txBody>
-      </p:sp>
-      <p:sp>
-        <p:nvSpPr>
-          <p:cNvPr id="29" name="Text 27"/>
-          <p:cNvSpPr/>
-          <p:nvPr/>
-        </p:nvSpPr>
-        <p:spPr>
-          <a:xfrm>
-            <a:off x="2072580" y="3105299"/>
-            <a:ext cx="155448" cy="171450"/>
-          </a:xfrm>
-          <a:prstGeom prst="rect">
-            <a:avLst/>
-          </a:prstGeom>
-          <a:noFill/>
-          <a:ln/>
-        </p:spPr>
-        <p:txBody>
-          <a:bodyPr wrap="square" lIns="0" tIns="0" rIns="0" bIns="0" rtlCol="0" anchor="t"/>
-          <a:lstStyle/>
-          <a:p>
-            <a:pPr algn="l" indent="0" marL="0">
-              <a:buNone/>
-            </a:pPr>
-            <a:r>
-              <a:rPr lang="en-US" sz="1200" b="1" dirty="0">
-                <a:solidFill>
-                  <a:srgbClr val="277884"/>
-                </a:solidFill>
-                <a:latin typeface="Arial" pitchFamily="34" charset="0"/>
-                <a:ea typeface="Arial" pitchFamily="34" charset="-122"/>
-                <a:cs typeface="Arial" pitchFamily="34" charset="-120"/>
-              </a:rPr>
-              <a:t>→</a:t>
-            </a:r>
-            <a:endParaRPr lang="en-US" sz="1200" dirty="0"/>
-          </a:p>
-        </p:txBody>
-      </p:sp>
-      <p:sp>
-        <p:nvSpPr>
-          <p:cNvPr id="30" name="Text 28"/>
-          <p:cNvSpPr/>
-          <p:nvPr/>
-        </p:nvSpPr>
-        <p:spPr>
-          <a:xfrm>
-            <a:off x="2301180" y="3056186"/>
-            <a:ext cx="1679525" cy="269677"/>
-          </a:xfrm>
-          <a:prstGeom prst="roundRect">
-            <a:avLst>
-              <a:gd name="adj" fmla="val 18837"/>
-            </a:avLst>
-          </a:prstGeom>
-          <a:solidFill>
-            <a:srgbClr val="277884"/>
-          </a:solidFill>
-          <a:ln/>
-        </p:spPr>
-        <p:txBody>
-          <a:bodyPr wrap="square" rtlCol="0" anchor="ctr"/>
-          <a:lstStyle/>
-          <a:p>
-            <a:pPr indent="0" marL="0">
-              <a:buNone/>
-            </a:pPr>
-            <a:endParaRPr lang="en-US" dirty="0"/>
-          </a:p>
-        </p:txBody>
-      </p:sp>
-      <p:sp>
-        <p:nvSpPr>
-          <p:cNvPr id="31" name="Text 29"/>
-          <p:cNvSpPr/>
-          <p:nvPr/>
-        </p:nvSpPr>
-        <p:spPr>
-          <a:xfrm>
-            <a:off x="2428131" y="3119586"/>
-            <a:ext cx="1454137" cy="142875"/>
-          </a:xfrm>
-          <a:prstGeom prst="rect">
-            <a:avLst/>
-          </a:prstGeom>
-          <a:noFill/>
-          <a:ln/>
-        </p:spPr>
-        <p:txBody>
-          <a:bodyPr wrap="square" lIns="0" tIns="0" rIns="0" bIns="0" rtlCol="0" anchor="t"/>
-          <a:lstStyle/>
-          <a:p>
-            <a:pPr algn="l" indent="0" marL="0">
-              <a:buNone/>
-            </a:pPr>
-            <a:r>
-              <a:rPr lang="en-US" sz="1000" b="1" dirty="0">
-                <a:solidFill>
-                  <a:srgbClr val="FFFFFF"/>
-                </a:solidFill>
-                <a:latin typeface="Arial" pitchFamily="34" charset="0"/>
-                <a:ea typeface="Arial" pitchFamily="34" charset="-122"/>
-                <a:cs typeface="Arial" pitchFamily="34" charset="-120"/>
-              </a:rPr>
-              <a:t>Adversarial review loop</a:t>
-            </a:r>
-            <a:endParaRPr lang="en-US" sz="1000" dirty="0"/>
-          </a:p>
-        </p:txBody>
-      </p:sp>
-      <p:sp>
-        <p:nvSpPr>
-          <p:cNvPr id="32" name="Text 30"/>
-          <p:cNvSpPr/>
-          <p:nvPr/>
-        </p:nvSpPr>
-        <p:spPr>
-          <a:xfrm>
-            <a:off x="683109" y="3376613"/>
-            <a:ext cx="8031682" cy="171450"/>
-          </a:xfrm>
-          <a:prstGeom prst="rect">
-            <a:avLst/>
-          </a:prstGeom>
-          <a:noFill/>
-          <a:ln/>
-        </p:spPr>
-        <p:txBody>
-          <a:bodyPr wrap="square" lIns="0" tIns="0" rIns="0" bIns="0" rtlCol="0" anchor="t"/>
-          <a:lstStyle/>
-          <a:p>
-            <a:pPr algn="ctr" indent="0" marL="0">
-              <a:buNone/>
-            </a:pPr>
-            <a:r>
-              <a:rPr lang="en-US" sz="1200" b="1" dirty="0">
-                <a:solidFill>
-                  <a:srgbClr val="277884"/>
-                </a:solidFill>
-                <a:latin typeface="Arial" pitchFamily="34" charset="0"/>
-                <a:ea typeface="Arial" pitchFamily="34" charset="-122"/>
-                <a:cs typeface="Arial" pitchFamily="34" charset="-120"/>
-              </a:rPr>
-              <a:t>↓</a:t>
-            </a:r>
-            <a:endParaRPr lang="en-US" sz="1200" dirty="0"/>
-          </a:p>
-        </p:txBody>
-      </p:sp>
-      <p:sp>
-        <p:nvSpPr>
-          <p:cNvPr id="33" name="Text 31"/>
-          <p:cNvSpPr/>
-          <p:nvPr/>
-        </p:nvSpPr>
-        <p:spPr>
-          <a:xfrm>
-            <a:off x="507950" y="3598813"/>
-            <a:ext cx="1615678" cy="269677"/>
-          </a:xfrm>
-          <a:prstGeom prst="roundRect">
-            <a:avLst>
-              <a:gd name="adj" fmla="val 18837"/>
-            </a:avLst>
-          </a:prstGeom>
-          <a:solidFill>
-            <a:srgbClr val="5EA8A7"/>
-          </a:solidFill>
-          <a:ln/>
-        </p:spPr>
-        <p:txBody>
-          <a:bodyPr wrap="square" rtlCol="0" anchor="ctr"/>
-          <a:lstStyle/>
-          <a:p>
-            <a:pPr indent="0" marL="0">
-              <a:buNone/>
-            </a:pPr>
-            <a:endParaRPr lang="en-US" dirty="0"/>
-          </a:p>
-        </p:txBody>
-      </p:sp>
-      <p:sp>
-        <p:nvSpPr>
-          <p:cNvPr id="34" name="Text 32"/>
-          <p:cNvSpPr/>
-          <p:nvPr/>
-        </p:nvSpPr>
-        <p:spPr>
-          <a:xfrm>
-            <a:off x="634901" y="3662214"/>
-            <a:ext cx="1389013" cy="142875"/>
-          </a:xfrm>
-          <a:prstGeom prst="rect">
-            <a:avLst/>
-          </a:prstGeom>
-          <a:noFill/>
-          <a:ln/>
-        </p:spPr>
-        <p:txBody>
-          <a:bodyPr wrap="square" lIns="0" tIns="0" rIns="0" bIns="0" rtlCol="0" anchor="t"/>
-          <a:lstStyle/>
-          <a:p>
-            <a:pPr algn="l" indent="0" marL="0">
-              <a:buNone/>
-            </a:pPr>
-            <a:r>
-              <a:rPr lang="en-US" sz="1000" b="1" dirty="0">
-                <a:solidFill>
-                  <a:srgbClr val="FFFFFF"/>
-                </a:solidFill>
-                <a:latin typeface="Arial" pitchFamily="34" charset="0"/>
-                <a:ea typeface="Arial" pitchFamily="34" charset="-122"/>
-                <a:cs typeface="Arial" pitchFamily="34" charset="-120"/>
-              </a:rPr>
-              <a:t>Human approves code</a:t>
-            </a:r>
-            <a:endParaRPr lang="en-US" sz="1000" dirty="0"/>
-          </a:p>
-        </p:txBody>
-      </p:sp>
-      <p:sp>
-        <p:nvSpPr>
-          <p:cNvPr id="35" name="Text 33"/>
-          <p:cNvSpPr/>
-          <p:nvPr/>
-        </p:nvSpPr>
-        <p:spPr>
-          <a:xfrm>
-            <a:off x="2199829" y="3647926"/>
-            <a:ext cx="155448" cy="171450"/>
-          </a:xfrm>
-          <a:prstGeom prst="rect">
-            <a:avLst/>
-          </a:prstGeom>
-          <a:noFill/>
-          <a:ln/>
-        </p:spPr>
-        <p:txBody>
-          <a:bodyPr wrap="square" lIns="0" tIns="0" rIns="0" bIns="0" rtlCol="0" anchor="t"/>
-          <a:lstStyle/>
-          <a:p>
-            <a:pPr algn="l" indent="0" marL="0">
-              <a:buNone/>
-            </a:pPr>
-            <a:r>
-              <a:rPr lang="en-US" sz="1200" b="1" dirty="0">
-                <a:solidFill>
-                  <a:srgbClr val="277884"/>
-                </a:solidFill>
-                <a:latin typeface="Arial" pitchFamily="34" charset="0"/>
-                <a:ea typeface="Arial" pitchFamily="34" charset="-122"/>
-                <a:cs typeface="Arial" pitchFamily="34" charset="-120"/>
-              </a:rPr>
-              <a:t>→</a:t>
-            </a:r>
-            <a:endParaRPr lang="en-US" sz="1200" dirty="0"/>
-          </a:p>
-        </p:txBody>
-      </p:sp>
-      <p:sp>
-        <p:nvSpPr>
-          <p:cNvPr id="36" name="Text 34"/>
-          <p:cNvSpPr/>
-          <p:nvPr/>
-        </p:nvSpPr>
-        <p:spPr>
-          <a:xfrm>
-            <a:off x="2428429" y="3598813"/>
-            <a:ext cx="430411" cy="269677"/>
-          </a:xfrm>
-          <a:prstGeom prst="roundRect">
-            <a:avLst>
-              <a:gd name="adj" fmla="val 18837"/>
-            </a:avLst>
-          </a:prstGeom>
-          <a:solidFill>
-            <a:srgbClr val="1C2833"/>
-          </a:solidFill>
-          <a:ln/>
-        </p:spPr>
-        <p:txBody>
-          <a:bodyPr wrap="square" rtlCol="0" anchor="ctr"/>
-          <a:lstStyle/>
-          <a:p>
-            <a:pPr indent="0" marL="0">
-              <a:buNone/>
-            </a:pPr>
-            <a:endParaRPr lang="en-US" dirty="0"/>
-          </a:p>
-        </p:txBody>
-      </p:sp>
-      <p:sp>
-        <p:nvSpPr>
-          <p:cNvPr id="37" name="Text 35"/>
-          <p:cNvSpPr/>
-          <p:nvPr/>
-        </p:nvSpPr>
-        <p:spPr>
-          <a:xfrm>
-            <a:off x="2555379" y="3662214"/>
-            <a:ext cx="180040" cy="142875"/>
-          </a:xfrm>
-          <a:prstGeom prst="rect">
-            <a:avLst/>
-          </a:prstGeom>
-          <a:noFill/>
-          <a:ln/>
-        </p:spPr>
-        <p:txBody>
-          <a:bodyPr wrap="square" lIns="0" tIns="0" rIns="0" bIns="0" rtlCol="0" anchor="t"/>
-          <a:lstStyle/>
-          <a:p>
-            <a:pPr algn="l" indent="0" marL="0">
-              <a:buNone/>
-            </a:pPr>
-            <a:r>
-              <a:rPr lang="en-US" sz="1000" b="1" dirty="0">
-                <a:solidFill>
-                  <a:srgbClr val="FFFFFF"/>
-                </a:solidFill>
-                <a:latin typeface="Arial" pitchFamily="34" charset="0"/>
-                <a:ea typeface="Arial" pitchFamily="34" charset="-122"/>
-                <a:cs typeface="Arial" pitchFamily="34" charset="-120"/>
-              </a:rPr>
-              <a:t>PR</a:t>
-            </a:r>
-            <a:endParaRPr lang="en-US" sz="1000" dirty="0"/>
+            <a:off x="4902101" y="1571327"/>
+            <a:ext cx="3530798" cy="1782366"/>
+          </a:xfrm>
+          <a:prstGeom prst="rect">
+            <a:avLst/>
+          </a:prstGeom>
+          <a:noFill/>
+          <a:ln/>
+        </p:spPr>
+        <p:txBody>
+          <a:bodyPr wrap="square" lIns="127000" tIns="0" rIns="0" bIns="0" rtlCol="0" anchor="t"/>
+          <a:lstStyle/>
+          <a:p>
+            <a:pPr algn="l" marL="127000" indent="-127000">
+              <a:lnSpc>
+                <a:spcPts val="2340"/>
+              </a:lnSpc>
+              <a:buSzPct val="100000"/>
+              <a:buChar char="•"/>
+            </a:pPr>
+            <a:r>
+              <a:rPr lang="en-US" sz="1300" dirty="0">
+                <a:solidFill>
+                  <a:srgbClr val="2C3E50"/>
+                </a:solidFill>
+                <a:latin typeface="Arial" pitchFamily="34" charset="0"/>
+                <a:ea typeface="Arial" pitchFamily="34" charset="-122"/>
+                <a:cs typeface="Arial" pitchFamily="34" charset="-120"/>
+              </a:rPr>
+              <a:t>Domain knowledge, not workflow instructions</a:t>
+            </a:r>
+            <a:endParaRPr lang="en-US" sz="1300" dirty="0"/>
+          </a:p>
+          <a:p>
+            <a:pPr algn="l" marL="127000" indent="-127000">
+              <a:lnSpc>
+                <a:spcPts val="2340"/>
+              </a:lnSpc>
+              <a:buSzPct val="100000"/>
+              <a:buChar char="•"/>
+            </a:pPr>
+            <a:r>
+              <a:rPr lang="en-US" sz="1300" dirty="0">
+                <a:solidFill>
+                  <a:srgbClr val="2C3E50"/>
+                </a:solidFill>
+                <a:latin typeface="Arial" pitchFamily="34" charset="0"/>
+                <a:ea typeface="Arial" pitchFamily="34" charset="-122"/>
+                <a:cs typeface="Arial" pitchFamily="34" charset="-120"/>
+              </a:rPr>
+              <a:t>Frontmatter: name + description (drives auto-loading)</a:t>
+            </a:r>
+            <a:endParaRPr lang="en-US" sz="1300" dirty="0"/>
+          </a:p>
+          <a:p>
+            <a:pPr algn="l" marL="127000" indent="-127000">
+              <a:lnSpc>
+                <a:spcPts val="2340"/>
+              </a:lnSpc>
+              <a:buSzPct val="100000"/>
+              <a:buChar char="•"/>
+            </a:pPr>
+            <a:r>
+              <a:rPr lang="en-US" sz="1300" dirty="0">
+                <a:solidFill>
+                  <a:srgbClr val="2C3E50"/>
+                </a:solidFill>
+                <a:latin typeface="Arial" pitchFamily="34" charset="0"/>
+                <a:ea typeface="Arial" pitchFamily="34" charset="-122"/>
+                <a:cs typeface="Arial" pitchFamily="34" charset="-120"/>
+              </a:rPr>
+              <a:t>Be concise — every line costs tokens</a:t>
+            </a:r>
+            <a:endParaRPr lang="en-US" sz="1300" dirty="0"/>
+          </a:p>
+          <a:p>
+            <a:pPr algn="l" marL="127000" indent="-127000">
+              <a:lnSpc>
+                <a:spcPts val="2340"/>
+              </a:lnSpc>
+              <a:buSzPct val="100000"/>
+              <a:buChar char="•"/>
+            </a:pPr>
+            <a:r>
+              <a:rPr lang="en-US" sz="1300" dirty="0">
+                <a:solidFill>
+                  <a:srgbClr val="2C3E50"/>
+                </a:solidFill>
+                <a:latin typeface="Arial" pitchFamily="34" charset="0"/>
+                <a:ea typeface="Arial" pitchFamily="34" charset="-122"/>
+                <a:cs typeface="Arial" pitchFamily="34" charset="-120"/>
+              </a:rPr>
+              <a:t>Reusable across projects and agents</a:t>
+            </a:r>
+            <a:endParaRPr lang="en-US" sz="1300" dirty="0"/>
           </a:p>
         </p:txBody>
       </p:sp>
@@ -4900,8 +4381,8 @@
         </p:nvSpPr>
         <p:spPr>
           <a:xfrm>
-            <a:off x="507950" y="457200"/>
-            <a:ext cx="8290661" cy="352425"/>
+            <a:off x="507950" y="406301"/>
+            <a:ext cx="8290661" cy="371475"/>
           </a:xfrm>
           <a:prstGeom prst="rect">
             <a:avLst/>
@@ -4915,15 +4396,15 @@
           <a:p>
             <a:pPr algn="l" indent="0" marL="0">
               <a:spcBef>
-                <a:spcPts val="3600"/>
+                <a:spcPts val="3200"/>
               </a:spcBef>
               <a:spcAft>
-                <a:spcPts val="2000"/>
+                <a:spcPts val="1600"/>
               </a:spcAft>
               <a:buNone/>
             </a:pPr>
             <a:r>
-              <a:rPr lang="en-US" sz="2400" b="1" dirty="0">
+              <a:rPr lang="en-US" sz="2600" b="1" dirty="0">
                 <a:solidFill>
                   <a:srgbClr val="1C2833"/>
                 </a:solidFill>
@@ -4931,9 +4412,9 @@
                 <a:ea typeface="Arial" pitchFamily="34" charset="-122"/>
                 <a:cs typeface="Arial" pitchFamily="34" charset="-120"/>
               </a:rPr>
-              <a:t>Two Automated Review Loops</a:t>
-            </a:r>
-            <a:endParaRPr lang="en-US" sz="2400" dirty="0"/>
+              <a:t>Getting the Right Answer</a:t>
+            </a:r>
+            <a:endParaRPr lang="en-US" sz="2600" dirty="0"/>
           </a:p>
         </p:txBody>
       </p:sp>
@@ -4945,125 +4426,45 @@
         </p:nvSpPr>
         <p:spPr>
           <a:xfrm>
-            <a:off x="507950" y="1063526"/>
-            <a:ext cx="3911650" cy="2965698"/>
-          </a:xfrm>
-          <a:prstGeom prst="roundRect">
-            <a:avLst>
-              <a:gd name="adj" fmla="val 2569"/>
-            </a:avLst>
-          </a:prstGeom>
-          <a:solidFill>
-            <a:srgbClr val="FFFFFF"/>
-          </a:solidFill>
-          <a:ln/>
-        </p:spPr>
-        <p:txBody>
-          <a:bodyPr wrap="square" rtlCol="0" anchor="ctr"/>
-          <a:lstStyle/>
-          <a:p>
-            <a:pPr indent="0" marL="0">
-              <a:buNone/>
-            </a:pPr>
-            <a:endParaRPr lang="en-US" dirty="0"/>
-          </a:p>
-        </p:txBody>
-      </p:sp>
-      <p:sp>
-        <p:nvSpPr>
-          <p:cNvPr id="4" name="Shape 2"/>
-          <p:cNvSpPr/>
-          <p:nvPr/>
-        </p:nvSpPr>
-        <p:spPr>
-          <a:xfrm>
-            <a:off x="507950" y="1087338"/>
-            <a:ext cx="3911650" cy="0"/>
-          </a:xfrm>
-          <a:prstGeom prst="line">
-            <a:avLst/>
-          </a:prstGeom>
-          <a:noFill/>
-          <a:ln w="47625">
-            <a:solidFill>
-              <a:srgbClr val="277884"/>
-            </a:solidFill>
-            <a:prstDash val="solid"/>
-          </a:ln>
-        </p:spPr>
-      </p:sp>
-      <p:sp>
-        <p:nvSpPr>
-          <p:cNvPr id="5" name="Text 3"/>
-          <p:cNvSpPr/>
-          <p:nvPr/>
-        </p:nvSpPr>
-        <p:spPr>
-          <a:xfrm>
-            <a:off x="711101" y="1314301"/>
-            <a:ext cx="3575456" cy="238125"/>
-          </a:xfrm>
-          <a:prstGeom prst="rect">
-            <a:avLst/>
-          </a:prstGeom>
-          <a:noFill/>
-          <a:ln/>
-        </p:spPr>
-        <p:txBody>
-          <a:bodyPr wrap="square" lIns="0" tIns="0" rIns="0" bIns="0" rtlCol="0" anchor="t"/>
-          <a:lstStyle/>
-          <a:p>
-            <a:pPr algn="l" indent="0" marL="0">
-              <a:spcAft>
-                <a:spcPts val="1200"/>
-              </a:spcAft>
-              <a:buNone/>
-            </a:pPr>
-            <a:r>
-              <a:rPr lang="en-US" sz="1600" b="1" dirty="0">
-                <a:solidFill>
-                  <a:srgbClr val="277884"/>
-                </a:solidFill>
-                <a:latin typeface="Arial" pitchFamily="34" charset="0"/>
-                <a:ea typeface="Arial" pitchFamily="34" charset="-122"/>
-                <a:cs typeface="Arial" pitchFamily="34" charset="-120"/>
-              </a:rPr>
-              <a:t>Design Review</a:t>
-            </a:r>
-            <a:endParaRPr lang="en-US" sz="1600" dirty="0"/>
-          </a:p>
-        </p:txBody>
-      </p:sp>
-      <p:sp>
-        <p:nvSpPr>
-          <p:cNvPr id="6" name="Text 4"/>
-          <p:cNvSpPr/>
-          <p:nvPr/>
-        </p:nvSpPr>
-        <p:spPr>
-          <a:xfrm>
-            <a:off x="711101" y="1704826"/>
-            <a:ext cx="3505349" cy="940743"/>
-          </a:xfrm>
-          <a:prstGeom prst="rect">
-            <a:avLst/>
-          </a:prstGeom>
-          <a:noFill/>
-          <a:ln/>
-        </p:spPr>
-        <p:txBody>
-          <a:bodyPr wrap="square" lIns="114300" tIns="0" rIns="0" bIns="0" rtlCol="0" anchor="t"/>
-          <a:lstStyle/>
-          <a:p>
-            <a:pPr algn="l" marL="114300" indent="-114300">
+            <a:off x="507950" y="980926"/>
+            <a:ext cx="8128099" cy="2027039"/>
+          </a:xfrm>
+          <a:prstGeom prst="rect">
+            <a:avLst/>
+          </a:prstGeom>
+          <a:noFill/>
+          <a:ln/>
+        </p:spPr>
+        <p:txBody>
+          <a:bodyPr wrap="square" lIns="152400" tIns="0" rIns="0" bIns="0" rtlCol="0" anchor="t"/>
+          <a:lstStyle/>
+          <a:p>
+            <a:pPr algn="l" marL="152400" indent="-152400">
               <a:lnSpc>
-                <a:spcPts val="2470"/>
+                <a:spcPts val="2660"/>
               </a:lnSpc>
               <a:buSzPct val="100000"/>
               <a:buChar char="•"/>
             </a:pPr>
             <a:r>
-              <a:rPr lang="en-US" sz="1300" dirty="0">
+              <a:rPr lang="en-US" sz="1400" b="1" dirty="0">
+                <a:solidFill>
+                  <a:srgbClr val="277884"/>
+                </a:solidFill>
+                <a:latin typeface="Arial" pitchFamily="34" charset="0"/>
+                <a:ea typeface="Arial" pitchFamily="34" charset="-122"/>
+                <a:cs typeface="Arial" pitchFamily="34" charset="-120"/>
+              </a:rPr>
+              <a:t>Ask for 5 options</a:t>
+            </a:r>
+            <a:pPr algn="l" indent="0" marL="0">
+              <a:lnSpc>
+                <a:spcPts val="2660"/>
+              </a:lnSpc>
+              <a:buNone/>
+            </a:pPr>
+            <a:r>
+              <a:rPr lang="en-US" sz="1400" dirty="0">
                 <a:solidFill>
                   <a:srgbClr val="2C3E50"/>
                 </a:solidFill>
@@ -5071,20 +4472,37 @@
                 <a:ea typeface="Arial" pitchFamily="34" charset="-122"/>
                 <a:cs typeface="Arial" pitchFamily="34" charset="-120"/>
               </a:rPr>
-              <a:t>Design agent ↔ Fresh opus instance</a:t>
-            </a:r>
-            <a:endParaRPr lang="en-US" sz="1300" dirty="0"/>
-          </a:p>
-          <a:p>
-            <a:pPr algn="l" marL="114300" indent="-114300">
+              <a:t> from most to least probable — then pick</a:t>
+            </a:r>
+            <a:endParaRPr lang="en-US" sz="1400" dirty="0"/>
+          </a:p>
+          <a:p>
+            <a:pPr algn="l" marL="152400" indent="-152400">
               <a:lnSpc>
-                <a:spcPts val="2470"/>
+                <a:spcPts val="2660"/>
               </a:lnSpc>
               <a:buSzPct val="100000"/>
               <a:buChar char="•"/>
             </a:pPr>
             <a:r>
-              <a:rPr lang="en-US" sz="1300" dirty="0">
+              <a:rPr lang="en-US" sz="1400" b="1" dirty="0">
+                <a:solidFill>
+                  <a:srgbClr val="277884"/>
+                </a:solidFill>
+                <a:latin typeface="Arial" pitchFamily="34" charset="0"/>
+                <a:ea typeface="Arial" pitchFamily="34" charset="-122"/>
+                <a:cs typeface="Arial" pitchFamily="34" charset="-120"/>
+              </a:rPr>
+              <a:t>Be specific:</a:t>
+            </a:r>
+            <a:pPr algn="l" indent="0" marL="0">
+              <a:lnSpc>
+                <a:spcPts val="2660"/>
+              </a:lnSpc>
+              <a:buNone/>
+            </a:pPr>
+            <a:r>
+              <a:rPr lang="en-US" sz="1400" dirty="0">
                 <a:solidFill>
                   <a:srgbClr val="2C3E50"/>
                 </a:solidFill>
@@ -5092,20 +4510,37 @@
                 <a:ea typeface="Arial" pitchFamily="34" charset="-122"/>
                 <a:cs typeface="Arial" pitchFamily="34" charset="-120"/>
               </a:rPr>
-              <a:t>Adversarial prompt</a:t>
-            </a:r>
-            <a:endParaRPr lang="en-US" sz="1300" dirty="0"/>
-          </a:p>
-          <a:p>
-            <a:pPr algn="l" marL="114300" indent="-114300">
+              <a:t> ‘fix the bug’ vs ‘the test fails because X, the root cause is likely Y’</a:t>
+            </a:r>
+            <a:endParaRPr lang="en-US" sz="1400" dirty="0"/>
+          </a:p>
+          <a:p>
+            <a:pPr algn="l" marL="152400" indent="-152400">
               <a:lnSpc>
-                <a:spcPts val="2470"/>
+                <a:spcPts val="2660"/>
               </a:lnSpc>
               <a:buSzPct val="100000"/>
               <a:buChar char="•"/>
             </a:pPr>
             <a:r>
-              <a:rPr lang="en-US" sz="1300" dirty="0">
+              <a:rPr lang="en-US" sz="1400" b="1" dirty="0">
+                <a:solidFill>
+                  <a:srgbClr val="277884"/>
+                </a:solidFill>
+                <a:latin typeface="Arial" pitchFamily="34" charset="0"/>
+                <a:ea typeface="Arial" pitchFamily="34" charset="-122"/>
+                <a:cs typeface="Arial" pitchFamily="34" charset="-120"/>
+              </a:rPr>
+              <a:t>Constrain the output:</a:t>
+            </a:r>
+            <a:pPr algn="l" indent="0" marL="0">
+              <a:lnSpc>
+                <a:spcPts val="2660"/>
+              </a:lnSpc>
+              <a:buNone/>
+            </a:pPr>
+            <a:r>
+              <a:rPr lang="en-US" sz="1400" dirty="0">
                 <a:solidFill>
                   <a:srgbClr val="2C3E50"/>
                 </a:solidFill>
@@ -5113,139 +4548,37 @@
                 <a:ea typeface="Arial" pitchFamily="34" charset="-122"/>
                 <a:cs typeface="Arial" pitchFamily="34" charset="-120"/>
               </a:rPr>
-              <a:t>Cycles until convergence</a:t>
-            </a:r>
-            <a:endParaRPr lang="en-US" sz="1300" dirty="0"/>
-          </a:p>
-        </p:txBody>
-      </p:sp>
-      <p:sp>
-        <p:nvSpPr>
-          <p:cNvPr id="7" name="Text 5"/>
-          <p:cNvSpPr/>
-          <p:nvPr/>
-        </p:nvSpPr>
-        <p:spPr>
-          <a:xfrm>
-            <a:off x="4724400" y="1063526"/>
-            <a:ext cx="3911650" cy="2965698"/>
-          </a:xfrm>
-          <a:prstGeom prst="roundRect">
-            <a:avLst>
-              <a:gd name="adj" fmla="val 2569"/>
-            </a:avLst>
-          </a:prstGeom>
-          <a:solidFill>
-            <a:srgbClr val="FFFFFF"/>
-          </a:solidFill>
-          <a:ln/>
-        </p:spPr>
-        <p:txBody>
-          <a:bodyPr wrap="square" rtlCol="0" anchor="ctr"/>
-          <a:lstStyle/>
-          <a:p>
-            <a:pPr indent="0" marL="0">
-              <a:buNone/>
-            </a:pPr>
-            <a:endParaRPr lang="en-US" dirty="0"/>
-          </a:p>
-        </p:txBody>
-      </p:sp>
-      <p:sp>
-        <p:nvSpPr>
-          <p:cNvPr id="8" name="Shape 6"/>
-          <p:cNvSpPr/>
-          <p:nvPr/>
-        </p:nvSpPr>
-        <p:spPr>
-          <a:xfrm>
-            <a:off x="4724400" y="1087338"/>
-            <a:ext cx="3911650" cy="0"/>
-          </a:xfrm>
-          <a:prstGeom prst="line">
-            <a:avLst/>
-          </a:prstGeom>
-          <a:noFill/>
-          <a:ln w="47625">
-            <a:solidFill>
-              <a:srgbClr val="277884"/>
-            </a:solidFill>
-            <a:prstDash val="solid"/>
-          </a:ln>
-        </p:spPr>
-      </p:sp>
-      <p:sp>
-        <p:nvSpPr>
-          <p:cNvPr id="9" name="Text 7"/>
-          <p:cNvSpPr/>
-          <p:nvPr/>
-        </p:nvSpPr>
-        <p:spPr>
-          <a:xfrm>
-            <a:off x="4927550" y="1314301"/>
-            <a:ext cx="3575456" cy="238125"/>
-          </a:xfrm>
-          <a:prstGeom prst="rect">
-            <a:avLst/>
-          </a:prstGeom>
-          <a:noFill/>
-          <a:ln/>
-        </p:spPr>
-        <p:txBody>
-          <a:bodyPr wrap="square" lIns="0" tIns="0" rIns="0" bIns="0" rtlCol="0" anchor="t"/>
-          <a:lstStyle/>
-          <a:p>
-            <a:pPr algn="l" indent="0" marL="0">
-              <a:spcAft>
-                <a:spcPts val="1200"/>
-              </a:spcAft>
-              <a:buNone/>
-            </a:pPr>
-            <a:r>
-              <a:rPr lang="en-US" sz="1600" b="1" dirty="0">
-                <a:solidFill>
-                  <a:srgbClr val="277884"/>
-                </a:solidFill>
-                <a:latin typeface="Arial" pitchFamily="34" charset="0"/>
-                <a:ea typeface="Arial" pitchFamily="34" charset="-122"/>
-                <a:cs typeface="Arial" pitchFamily="34" charset="-120"/>
-              </a:rPr>
-              <a:t>Code Review</a:t>
-            </a:r>
-            <a:endParaRPr lang="en-US" sz="1600" dirty="0"/>
-          </a:p>
-        </p:txBody>
-      </p:sp>
-      <p:sp>
-        <p:nvSpPr>
-          <p:cNvPr id="10" name="Text 8"/>
-          <p:cNvSpPr/>
-          <p:nvPr/>
-        </p:nvSpPr>
-        <p:spPr>
-          <a:xfrm>
-            <a:off x="4927550" y="1704826"/>
-            <a:ext cx="3505349" cy="940743"/>
-          </a:xfrm>
-          <a:prstGeom prst="rect">
-            <a:avLst/>
-          </a:prstGeom>
-          <a:noFill/>
-          <a:ln/>
-        </p:spPr>
-        <p:txBody>
-          <a:bodyPr wrap="square" lIns="114300" tIns="0" rIns="0" bIns="0" rtlCol="0" anchor="t"/>
-          <a:lstStyle/>
-          <a:p>
-            <a:pPr algn="l" marL="114300" indent="-114300">
+              <a:t> ‘return only the changed function, not the whole file’</a:t>
+            </a:r>
+            <a:endParaRPr lang="en-US" sz="1400" dirty="0"/>
+          </a:p>
+          <a:p>
+            <a:pPr algn="l" marL="152400" indent="-152400">
               <a:lnSpc>
-                <a:spcPts val="2470"/>
+                <a:spcPts val="2660"/>
               </a:lnSpc>
               <a:buSzPct val="100000"/>
               <a:buChar char="•"/>
             </a:pPr>
             <a:r>
-              <a:rPr lang="en-US" sz="1300" dirty="0">
+              <a:rPr lang="en-US" sz="1400" b="1" dirty="0">
+                <a:solidFill>
+                  <a:srgbClr val="277884"/>
+                </a:solidFill>
+                <a:latin typeface="Arial" pitchFamily="34" charset="0"/>
+                <a:ea typeface="Arial" pitchFamily="34" charset="-122"/>
+                <a:cs typeface="Arial" pitchFamily="34" charset="-120"/>
+              </a:rPr>
+              <a:t>Ultracritical review prompts</a:t>
+            </a:r>
+            <a:pPr algn="l" indent="0" marL="0">
+              <a:lnSpc>
+                <a:spcPts val="2660"/>
+              </a:lnSpc>
+              <a:buNone/>
+            </a:pPr>
+            <a:r>
+              <a:rPr lang="en-US" sz="1400" dirty="0">
                 <a:solidFill>
                   <a:srgbClr val="2C3E50"/>
                 </a:solidFill>
@@ -5253,20 +4586,37 @@
                 <a:ea typeface="Arial" pitchFamily="34" charset="-122"/>
                 <a:cs typeface="Arial" pitchFamily="34" charset="-120"/>
               </a:rPr>
-              <a:t>Developer agent ↔ Fresh opus instance</a:t>
-            </a:r>
-            <a:endParaRPr lang="en-US" sz="1300" dirty="0"/>
-          </a:p>
-          <a:p>
-            <a:pPr algn="l" marL="114300" indent="-114300">
+              <a:t> — ‘NO STONE UNTURNED, try to BREAK this’</a:t>
+            </a:r>
+            <a:endParaRPr lang="en-US" sz="1400" dirty="0"/>
+          </a:p>
+          <a:p>
+            <a:pPr algn="l" marL="152400" indent="-152400">
               <a:lnSpc>
-                <a:spcPts val="2470"/>
+                <a:spcPts val="2660"/>
               </a:lnSpc>
               <a:buSzPct val="100000"/>
               <a:buChar char="•"/>
             </a:pPr>
             <a:r>
-              <a:rPr lang="en-US" sz="1300" dirty="0">
+              <a:rPr lang="en-US" sz="1400" b="1" dirty="0">
+                <a:solidFill>
+                  <a:srgbClr val="277884"/>
+                </a:solidFill>
+                <a:latin typeface="Arial" pitchFamily="34" charset="0"/>
+                <a:ea typeface="Arial" pitchFamily="34" charset="-122"/>
+                <a:cs typeface="Arial" pitchFamily="34" charset="-120"/>
+              </a:rPr>
+              <a:t>Escalation rules:</a:t>
+            </a:r>
+            <a:pPr algn="l" indent="0" marL="0">
+              <a:lnSpc>
+                <a:spcPts val="2660"/>
+              </a:lnSpc>
+              <a:buNone/>
+            </a:pPr>
+            <a:r>
+              <a:rPr lang="en-US" sz="1400" dirty="0">
                 <a:solidFill>
                   <a:srgbClr val="2C3E50"/>
                 </a:solidFill>
@@ -5274,20 +4624,37 @@
                 <a:ea typeface="Arial" pitchFamily="34" charset="-122"/>
                 <a:cs typeface="Arial" pitchFamily="34" charset="-120"/>
               </a:rPr>
-              <a:t>Adversarial prompt</a:t>
-            </a:r>
-            <a:endParaRPr lang="en-US" sz="1300" dirty="0"/>
-          </a:p>
-          <a:p>
-            <a:pPr algn="l" marL="114300" indent="-114300">
+              <a:t> ‘if unclear, ASK — never guess’</a:t>
+            </a:r>
+            <a:endParaRPr lang="en-US" sz="1400" dirty="0"/>
+          </a:p>
+          <a:p>
+            <a:pPr algn="l" marL="152400" indent="-152400">
               <a:lnSpc>
-                <a:spcPts val="2470"/>
+                <a:spcPts val="2660"/>
               </a:lnSpc>
               <a:buSzPct val="100000"/>
               <a:buChar char="•"/>
             </a:pPr>
             <a:r>
-              <a:rPr lang="en-US" sz="1300" dirty="0">
+              <a:rPr lang="en-US" sz="1400" b="1" dirty="0">
+                <a:solidFill>
+                  <a:srgbClr val="277884"/>
+                </a:solidFill>
+                <a:latin typeface="Arial" pitchFamily="34" charset="0"/>
+                <a:ea typeface="Arial" pitchFamily="34" charset="-122"/>
+                <a:cs typeface="Arial" pitchFamily="34" charset="-120"/>
+              </a:rPr>
+              <a:t>Primacy clause:</a:t>
+            </a:r>
+            <a:pPr algn="l" indent="0" marL="0">
+              <a:lnSpc>
+                <a:spcPts val="2660"/>
+              </a:lnSpc>
+              <a:buNone/>
+            </a:pPr>
+            <a:r>
+              <a:rPr lang="en-US" sz="1400" dirty="0">
                 <a:solidFill>
                   <a:srgbClr val="2C3E50"/>
                 </a:solidFill>
@@ -5295,71 +4662,9 @@
                 <a:ea typeface="Arial" pitchFamily="34" charset="-122"/>
                 <a:cs typeface="Arial" pitchFamily="34" charset="-120"/>
               </a:rPr>
-              <a:t>Cycles until convergence</a:t>
-            </a:r>
-            <a:endParaRPr lang="en-US" sz="1300" dirty="0"/>
-          </a:p>
-        </p:txBody>
-      </p:sp>
-      <p:sp>
-        <p:nvSpPr>
-          <p:cNvPr id="11" name="Shape 9"/>
-          <p:cNvSpPr/>
-          <p:nvPr/>
-        </p:nvSpPr>
-        <p:spPr>
-          <a:xfrm>
-            <a:off x="546050" y="4232374"/>
-            <a:ext cx="0" cy="453926"/>
-          </a:xfrm>
-          <a:prstGeom prst="line">
-            <a:avLst/>
-          </a:prstGeom>
-          <a:noFill/>
-          <a:ln w="76200">
-            <a:solidFill>
-              <a:srgbClr val="277884"/>
-            </a:solidFill>
-            <a:prstDash val="solid"/>
-          </a:ln>
-        </p:spPr>
-      </p:sp>
-      <p:sp>
-        <p:nvSpPr>
-          <p:cNvPr id="12" name="Text 10"/>
-          <p:cNvSpPr/>
-          <p:nvPr/>
-        </p:nvSpPr>
-        <p:spPr>
-          <a:xfrm>
-            <a:off x="787301" y="4359325"/>
-            <a:ext cx="7798510" cy="200025"/>
-          </a:xfrm>
-          <a:prstGeom prst="rect">
-            <a:avLst/>
-          </a:prstGeom>
-          <a:noFill/>
-          <a:ln/>
-        </p:spPr>
-        <p:txBody>
-          <a:bodyPr wrap="square" lIns="0" tIns="0" rIns="0" bIns="0" rtlCol="0" anchor="t"/>
-          <a:lstStyle/>
-          <a:p>
-            <a:pPr algn="l" indent="0" marL="0">
-              <a:buNone/>
-            </a:pPr>
-            <a:r>
-              <a:rPr lang="en-US" sz="1300" b="1" dirty="0">
-                <a:solidFill>
-                  <a:srgbClr val="2C3E50"/>
-                </a:solidFill>
-                <a:latin typeface="Arial" pitchFamily="34" charset="0"/>
-                <a:ea typeface="Arial" pitchFamily="34" charset="-122"/>
-                <a:cs typeface="Arial" pitchFamily="34" charset="-120"/>
-              </a:rPr>
-              <a:t>Human only reviews AFTER automated convergence</a:t>
-            </a:r>
-            <a:endParaRPr lang="en-US" sz="1300" dirty="0"/>
+              <a:t> make your rules win over default behavior</a:t>
+            </a:r>
+            <a:endParaRPr lang="en-US" sz="1400" dirty="0"/>
           </a:p>
         </p:txBody>
       </p:sp>
@@ -5403,8 +4708,8 @@
         </p:nvSpPr>
         <p:spPr>
           <a:xfrm>
-            <a:off x="507950" y="507950"/>
-            <a:ext cx="8290661" cy="409575"/>
+            <a:off x="507950" y="355550"/>
+            <a:ext cx="8290661" cy="352425"/>
           </a:xfrm>
           <a:prstGeom prst="rect">
             <a:avLst/>
@@ -5418,15 +4723,15 @@
           <a:p>
             <a:pPr algn="l" indent="0" marL="0">
               <a:spcBef>
-                <a:spcPts val="4000"/>
+                <a:spcPts val="2800"/>
               </a:spcBef>
               <a:spcAft>
-                <a:spcPts val="2000"/>
+                <a:spcPts val="1400"/>
               </a:spcAft>
               <a:buNone/>
             </a:pPr>
             <a:r>
-              <a:rPr lang="en-US" sz="2800" b="1" dirty="0">
+              <a:rPr lang="en-US" sz="2400" b="1" dirty="0">
                 <a:solidFill>
                   <a:srgbClr val="1C2833"/>
                 </a:solidFill>
@@ -5434,9 +4739,9 @@
                 <a:ea typeface="Arial" pitchFamily="34" charset="-122"/>
                 <a:cs typeface="Arial" pitchFamily="34" charset="-120"/>
               </a:rPr>
-              <a:t>TDD as a Forcing Function</a:t>
-            </a:r>
-            <a:endParaRPr lang="en-US" sz="2800" dirty="0"/>
+              <a:t>The Full Pipeline</a:t>
+            </a:r>
+            <a:endParaRPr lang="en-US" sz="2400" dirty="0"/>
           </a:p>
         </p:txBody>
       </p:sp>
@@ -5448,122 +4753,1276 @@
         </p:nvSpPr>
         <p:spPr>
           <a:xfrm>
-            <a:off x="507950" y="1171426"/>
-            <a:ext cx="8128099" cy="1905000"/>
-          </a:xfrm>
-          <a:prstGeom prst="rect">
-            <a:avLst/>
-          </a:prstGeom>
-          <a:noFill/>
-          <a:ln/>
-        </p:spPr>
-        <p:txBody>
-          <a:bodyPr wrap="square" lIns="152400" tIns="0" rIns="0" bIns="0" rtlCol="0" anchor="t"/>
-          <a:lstStyle/>
-          <a:p>
-            <a:pPr algn="l" marL="152400" indent="-152400">
-              <a:lnSpc>
-                <a:spcPts val="3000"/>
-              </a:lnSpc>
-              <a:buSzPct val="100000"/>
-              <a:buChar char="•"/>
-            </a:pPr>
-            <a:r>
-              <a:rPr lang="en-US" sz="1500" dirty="0">
-                <a:solidFill>
-                  <a:srgbClr val="2C3E50"/>
-                </a:solidFill>
-                <a:latin typeface="Arial" pitchFamily="34" charset="0"/>
-                <a:ea typeface="Arial" pitchFamily="34" charset="-122"/>
-                <a:cs typeface="Arial" pitchFamily="34" charset="-120"/>
-              </a:rPr>
-              <a:t>Every acceptance criterion → a test</a:t>
-            </a:r>
-            <a:endParaRPr lang="en-US" sz="1500" dirty="0"/>
-          </a:p>
-          <a:p>
-            <a:pPr algn="l" marL="152400" indent="-152400">
-              <a:lnSpc>
-                <a:spcPts val="3000"/>
-              </a:lnSpc>
-              <a:buSzPct val="100000"/>
-              <a:buChar char="•"/>
-            </a:pPr>
-            <a:r>
-              <a:rPr lang="en-US" sz="1500" dirty="0">
-                <a:solidFill>
-                  <a:srgbClr val="2C3E50"/>
-                </a:solidFill>
-                <a:latin typeface="Arial" pitchFamily="34" charset="0"/>
-                <a:ea typeface="Arial" pitchFamily="34" charset="-122"/>
-                <a:cs typeface="Arial" pitchFamily="34" charset="-120"/>
-              </a:rPr>
-              <a:t>Tests written FIRST, implementation second</a:t>
-            </a:r>
-            <a:endParaRPr lang="en-US" sz="1500" dirty="0"/>
-          </a:p>
-          <a:p>
-            <a:pPr algn="l" marL="152400" indent="-152400">
-              <a:lnSpc>
-                <a:spcPts val="3000"/>
-              </a:lnSpc>
-              <a:buSzPct val="100000"/>
-              <a:buChar char="•"/>
-            </a:pPr>
-            <a:r>
-              <a:rPr lang="en-US" sz="1500" dirty="0">
-                <a:solidFill>
-                  <a:srgbClr val="2C3E50"/>
-                </a:solidFill>
-                <a:latin typeface="Arial" pitchFamily="34" charset="0"/>
-                <a:ea typeface="Arial" pitchFamily="34" charset="-122"/>
-                <a:cs typeface="Arial" pitchFamily="34" charset="-120"/>
-              </a:rPr>
-              <a:t>85% coverage minimum</a:t>
-            </a:r>
-            <a:endParaRPr lang="en-US" sz="1500" dirty="0"/>
-          </a:p>
-          <a:p>
-            <a:pPr algn="l" marL="152400" indent="-152400">
-              <a:lnSpc>
-                <a:spcPts val="3000"/>
-              </a:lnSpc>
-              <a:buSzPct val="100000"/>
-              <a:buChar char="•"/>
-            </a:pPr>
-            <a:r>
-              <a:rPr lang="en-US" sz="1500" dirty="0">
-                <a:solidFill>
-                  <a:srgbClr val="2C3E50"/>
-                </a:solidFill>
-                <a:latin typeface="Arial" pitchFamily="34" charset="0"/>
-                <a:ea typeface="Arial" pitchFamily="34" charset="-122"/>
-                <a:cs typeface="Arial" pitchFamily="34" charset="-120"/>
-              </a:rPr>
-              <a:t>Forces clarity of requirements</a:t>
-            </a:r>
-            <a:endParaRPr lang="en-US" sz="1500" dirty="0"/>
-          </a:p>
-          <a:p>
-            <a:pPr algn="l" marL="152400" indent="-152400">
-              <a:lnSpc>
-                <a:spcPts val="3000"/>
-              </a:lnSpc>
-              <a:buSzPct val="100000"/>
-              <a:buChar char="•"/>
-            </a:pPr>
-            <a:r>
-              <a:rPr lang="en-US" sz="1500" dirty="0">
-                <a:solidFill>
-                  <a:srgbClr val="2C3E50"/>
-                </a:solidFill>
-                <a:latin typeface="Arial" pitchFamily="34" charset="0"/>
-                <a:ea typeface="Arial" pitchFamily="34" charset="-122"/>
-                <a:cs typeface="Arial" pitchFamily="34" charset="-120"/>
-              </a:rPr>
-              <a:t>Catches regressions automatically</a:t>
-            </a:r>
-            <a:endParaRPr lang="en-US" sz="1500" dirty="0"/>
+            <a:off x="507950" y="885676"/>
+            <a:ext cx="822871" cy="269677"/>
+          </a:xfrm>
+          <a:prstGeom prst="roundRect">
+            <a:avLst>
+              <a:gd name="adj" fmla="val 18837"/>
+            </a:avLst>
+          </a:prstGeom>
+          <a:solidFill>
+            <a:srgbClr val="1C2833"/>
+          </a:solidFill>
+          <a:ln/>
+        </p:spPr>
+        <p:txBody>
+          <a:bodyPr wrap="square" rtlCol="0" anchor="ctr"/>
+          <a:lstStyle/>
+          <a:p>
+            <a:pPr indent="0" marL="0">
+              <a:buNone/>
+            </a:pPr>
+            <a:endParaRPr lang="en-US" dirty="0"/>
+          </a:p>
+        </p:txBody>
+      </p:sp>
+      <p:sp>
+        <p:nvSpPr>
+          <p:cNvPr id="4" name="Text 2"/>
+          <p:cNvSpPr/>
+          <p:nvPr/>
+        </p:nvSpPr>
+        <p:spPr>
+          <a:xfrm>
+            <a:off x="634901" y="949077"/>
+            <a:ext cx="580349" cy="142875"/>
+          </a:xfrm>
+          <a:prstGeom prst="rect">
+            <a:avLst/>
+          </a:prstGeom>
+          <a:noFill/>
+          <a:ln/>
+        </p:spPr>
+        <p:txBody>
+          <a:bodyPr wrap="square" lIns="0" tIns="0" rIns="0" bIns="0" rtlCol="0" anchor="t"/>
+          <a:lstStyle/>
+          <a:p>
+            <a:pPr algn="l" indent="0" marL="0">
+              <a:buNone/>
+            </a:pPr>
+            <a:r>
+              <a:rPr lang="en-US" sz="1000" b="1" dirty="0">
+                <a:solidFill>
+                  <a:srgbClr val="FFFFFF"/>
+                </a:solidFill>
+                <a:latin typeface="Arial" pitchFamily="34" charset="0"/>
+                <a:ea typeface="Arial" pitchFamily="34" charset="-122"/>
+                <a:cs typeface="Arial" pitchFamily="34" charset="-120"/>
+              </a:rPr>
+              <a:t>BA Agent</a:t>
+            </a:r>
+            <a:endParaRPr lang="en-US" sz="1000" dirty="0"/>
+          </a:p>
+        </p:txBody>
+      </p:sp>
+      <p:sp>
+        <p:nvSpPr>
+          <p:cNvPr id="5" name="Text 3"/>
+          <p:cNvSpPr/>
+          <p:nvPr/>
+        </p:nvSpPr>
+        <p:spPr>
+          <a:xfrm>
+            <a:off x="1407021" y="934789"/>
+            <a:ext cx="155448" cy="171450"/>
+          </a:xfrm>
+          <a:prstGeom prst="rect">
+            <a:avLst/>
+          </a:prstGeom>
+          <a:noFill/>
+          <a:ln/>
+        </p:spPr>
+        <p:txBody>
+          <a:bodyPr wrap="square" lIns="0" tIns="0" rIns="0" bIns="0" rtlCol="0" anchor="t"/>
+          <a:lstStyle/>
+          <a:p>
+            <a:pPr algn="l" indent="0" marL="0">
+              <a:buNone/>
+            </a:pPr>
+            <a:r>
+              <a:rPr lang="en-US" sz="1200" b="1" dirty="0">
+                <a:solidFill>
+                  <a:srgbClr val="277884"/>
+                </a:solidFill>
+                <a:latin typeface="Arial" pitchFamily="34" charset="0"/>
+                <a:ea typeface="Arial" pitchFamily="34" charset="-122"/>
+                <a:cs typeface="Arial" pitchFamily="34" charset="-120"/>
+              </a:rPr>
+              <a:t>→</a:t>
+            </a:r>
+            <a:endParaRPr lang="en-US" sz="1200" dirty="0"/>
+          </a:p>
+        </p:txBody>
+      </p:sp>
+      <p:sp>
+        <p:nvSpPr>
+          <p:cNvPr id="6" name="Text 4"/>
+          <p:cNvSpPr/>
+          <p:nvPr/>
+        </p:nvSpPr>
+        <p:spPr>
+          <a:xfrm>
+            <a:off x="1635621" y="885676"/>
+            <a:ext cx="959495" cy="269677"/>
+          </a:xfrm>
+          <a:prstGeom prst="roundRect">
+            <a:avLst>
+              <a:gd name="adj" fmla="val 18837"/>
+            </a:avLst>
+          </a:prstGeom>
+          <a:solidFill>
+            <a:srgbClr val="1C2833"/>
+          </a:solidFill>
+          <a:ln/>
+        </p:spPr>
+        <p:txBody>
+          <a:bodyPr wrap="square" rtlCol="0" anchor="ctr"/>
+          <a:lstStyle/>
+          <a:p>
+            <a:pPr indent="0" marL="0">
+              <a:buNone/>
+            </a:pPr>
+            <a:endParaRPr lang="en-US" dirty="0"/>
+          </a:p>
+        </p:txBody>
+      </p:sp>
+      <p:sp>
+        <p:nvSpPr>
+          <p:cNvPr id="7" name="Text 5"/>
+          <p:cNvSpPr/>
+          <p:nvPr/>
+        </p:nvSpPr>
+        <p:spPr>
+          <a:xfrm>
+            <a:off x="1762571" y="949077"/>
+            <a:ext cx="719706" cy="142875"/>
+          </a:xfrm>
+          <a:prstGeom prst="rect">
+            <a:avLst/>
+          </a:prstGeom>
+          <a:noFill/>
+          <a:ln/>
+        </p:spPr>
+        <p:txBody>
+          <a:bodyPr wrap="square" lIns="0" tIns="0" rIns="0" bIns="0" rtlCol="0" anchor="t"/>
+          <a:lstStyle/>
+          <a:p>
+            <a:pPr algn="l" indent="0" marL="0">
+              <a:buNone/>
+            </a:pPr>
+            <a:r>
+              <a:rPr lang="en-US" sz="1000" b="1" dirty="0">
+                <a:solidFill>
+                  <a:srgbClr val="FFFFFF"/>
+                </a:solidFill>
+                <a:latin typeface="Arial" pitchFamily="34" charset="0"/>
+                <a:ea typeface="Arial" pitchFamily="34" charset="-122"/>
+                <a:cs typeface="Arial" pitchFamily="34" charset="-120"/>
+              </a:rPr>
+              <a:t>Issue (DoR)</a:t>
+            </a:r>
+            <a:endParaRPr lang="en-US" sz="1000" dirty="0"/>
+          </a:p>
+        </p:txBody>
+      </p:sp>
+      <p:sp>
+        <p:nvSpPr>
+          <p:cNvPr id="8" name="Text 6"/>
+          <p:cNvSpPr/>
+          <p:nvPr/>
+        </p:nvSpPr>
+        <p:spPr>
+          <a:xfrm>
+            <a:off x="2671316" y="934789"/>
+            <a:ext cx="155448" cy="171450"/>
+          </a:xfrm>
+          <a:prstGeom prst="rect">
+            <a:avLst/>
+          </a:prstGeom>
+          <a:noFill/>
+          <a:ln/>
+        </p:spPr>
+        <p:txBody>
+          <a:bodyPr wrap="square" lIns="0" tIns="0" rIns="0" bIns="0" rtlCol="0" anchor="t"/>
+          <a:lstStyle/>
+          <a:p>
+            <a:pPr algn="l" indent="0" marL="0">
+              <a:buNone/>
+            </a:pPr>
+            <a:r>
+              <a:rPr lang="en-US" sz="1200" b="1" dirty="0">
+                <a:solidFill>
+                  <a:srgbClr val="277884"/>
+                </a:solidFill>
+                <a:latin typeface="Arial" pitchFamily="34" charset="0"/>
+                <a:ea typeface="Arial" pitchFamily="34" charset="-122"/>
+                <a:cs typeface="Arial" pitchFamily="34" charset="-120"/>
+              </a:rPr>
+              <a:t>→</a:t>
+            </a:r>
+            <a:endParaRPr lang="en-US" sz="1200" dirty="0"/>
+          </a:p>
+        </p:txBody>
+      </p:sp>
+      <p:sp>
+        <p:nvSpPr>
+          <p:cNvPr id="9" name="Text 7"/>
+          <p:cNvSpPr/>
+          <p:nvPr/>
+        </p:nvSpPr>
+        <p:spPr>
+          <a:xfrm>
+            <a:off x="2899916" y="885676"/>
+            <a:ext cx="1185416" cy="269677"/>
+          </a:xfrm>
+          <a:prstGeom prst="roundRect">
+            <a:avLst>
+              <a:gd name="adj" fmla="val 18837"/>
+            </a:avLst>
+          </a:prstGeom>
+          <a:solidFill>
+            <a:srgbClr val="5EA8A7"/>
+          </a:solidFill>
+          <a:ln/>
+        </p:spPr>
+        <p:txBody>
+          <a:bodyPr wrap="square" rtlCol="0" anchor="ctr"/>
+          <a:lstStyle/>
+          <a:p>
+            <a:pPr indent="0" marL="0">
+              <a:buNone/>
+            </a:pPr>
+            <a:endParaRPr lang="en-US" dirty="0"/>
+          </a:p>
+        </p:txBody>
+      </p:sp>
+      <p:sp>
+        <p:nvSpPr>
+          <p:cNvPr id="10" name="Text 8"/>
+          <p:cNvSpPr/>
+          <p:nvPr/>
+        </p:nvSpPr>
+        <p:spPr>
+          <a:xfrm>
+            <a:off x="3026866" y="949077"/>
+            <a:ext cx="950146" cy="142875"/>
+          </a:xfrm>
+          <a:prstGeom prst="rect">
+            <a:avLst/>
+          </a:prstGeom>
+          <a:noFill/>
+          <a:ln/>
+        </p:spPr>
+        <p:txBody>
+          <a:bodyPr wrap="square" lIns="0" tIns="0" rIns="0" bIns="0" rtlCol="0" anchor="t"/>
+          <a:lstStyle/>
+          <a:p>
+            <a:pPr algn="l" indent="0" marL="0">
+              <a:buNone/>
+            </a:pPr>
+            <a:r>
+              <a:rPr lang="en-US" sz="1000" b="1" dirty="0">
+                <a:solidFill>
+                  <a:srgbClr val="FFFFFF"/>
+                </a:solidFill>
+                <a:latin typeface="Arial" pitchFamily="34" charset="0"/>
+                <a:ea typeface="Arial" pitchFamily="34" charset="-122"/>
+                <a:cs typeface="Arial" pitchFamily="34" charset="-120"/>
+              </a:rPr>
+              <a:t>Human reviews</a:t>
+            </a:r>
+            <a:endParaRPr lang="en-US" sz="1000" dirty="0"/>
+          </a:p>
+        </p:txBody>
+      </p:sp>
+      <p:sp>
+        <p:nvSpPr>
+          <p:cNvPr id="11" name="Text 9"/>
+          <p:cNvSpPr/>
+          <p:nvPr/>
+        </p:nvSpPr>
+        <p:spPr>
+          <a:xfrm>
+            <a:off x="683109" y="1206103"/>
+            <a:ext cx="8031682" cy="171450"/>
+          </a:xfrm>
+          <a:prstGeom prst="rect">
+            <a:avLst/>
+          </a:prstGeom>
+          <a:noFill/>
+          <a:ln/>
+        </p:spPr>
+        <p:txBody>
+          <a:bodyPr wrap="square" lIns="0" tIns="0" rIns="0" bIns="0" rtlCol="0" anchor="t"/>
+          <a:lstStyle/>
+          <a:p>
+            <a:pPr algn="ctr" indent="0" marL="0">
+              <a:buNone/>
+            </a:pPr>
+            <a:r>
+              <a:rPr lang="en-US" sz="1200" b="1" dirty="0">
+                <a:solidFill>
+                  <a:srgbClr val="277884"/>
+                </a:solidFill>
+                <a:latin typeface="Arial" pitchFamily="34" charset="0"/>
+                <a:ea typeface="Arial" pitchFamily="34" charset="-122"/>
+                <a:cs typeface="Arial" pitchFamily="34" charset="-120"/>
+              </a:rPr>
+              <a:t>↓</a:t>
+            </a:r>
+            <a:endParaRPr lang="en-US" sz="1200" dirty="0"/>
+          </a:p>
+        </p:txBody>
+      </p:sp>
+      <p:sp>
+        <p:nvSpPr>
+          <p:cNvPr id="12" name="Text 10"/>
+          <p:cNvSpPr/>
+          <p:nvPr/>
+        </p:nvSpPr>
+        <p:spPr>
+          <a:xfrm>
+            <a:off x="507950" y="1428304"/>
+            <a:ext cx="1468041" cy="269677"/>
+          </a:xfrm>
+          <a:prstGeom prst="roundRect">
+            <a:avLst>
+              <a:gd name="adj" fmla="val 18837"/>
+            </a:avLst>
+          </a:prstGeom>
+          <a:solidFill>
+            <a:srgbClr val="1C2833"/>
+          </a:solidFill>
+          <a:ln/>
+        </p:spPr>
+        <p:txBody>
+          <a:bodyPr wrap="square" rtlCol="0" anchor="ctr"/>
+          <a:lstStyle/>
+          <a:p>
+            <a:pPr indent="0" marL="0">
+              <a:buNone/>
+            </a:pPr>
+            <a:endParaRPr lang="en-US" dirty="0"/>
+          </a:p>
+        </p:txBody>
+      </p:sp>
+      <p:sp>
+        <p:nvSpPr>
+          <p:cNvPr id="13" name="Text 11"/>
+          <p:cNvSpPr/>
+          <p:nvPr/>
+        </p:nvSpPr>
+        <p:spPr>
+          <a:xfrm>
+            <a:off x="634901" y="1491704"/>
+            <a:ext cx="1238423" cy="142875"/>
+          </a:xfrm>
+          <a:prstGeom prst="rect">
+            <a:avLst/>
+          </a:prstGeom>
+          <a:noFill/>
+          <a:ln/>
+        </p:spPr>
+        <p:txBody>
+          <a:bodyPr wrap="square" lIns="0" tIns="0" rIns="0" bIns="0" rtlCol="0" anchor="t"/>
+          <a:lstStyle/>
+          <a:p>
+            <a:pPr algn="l" indent="0" marL="0">
+              <a:buNone/>
+            </a:pPr>
+            <a:r>
+              <a:rPr lang="en-US" sz="1000" b="1" dirty="0">
+                <a:solidFill>
+                  <a:srgbClr val="FFFFFF"/>
+                </a:solidFill>
+                <a:latin typeface="Arial" pitchFamily="34" charset="0"/>
+                <a:ea typeface="Arial" pitchFamily="34" charset="-122"/>
+                <a:cs typeface="Arial" pitchFamily="34" charset="-120"/>
+              </a:rPr>
+              <a:t>Developer assesses</a:t>
+            </a:r>
+            <a:endParaRPr lang="en-US" sz="1000" dirty="0"/>
+          </a:p>
+        </p:txBody>
+      </p:sp>
+      <p:sp>
+        <p:nvSpPr>
+          <p:cNvPr id="14" name="Text 12"/>
+          <p:cNvSpPr/>
+          <p:nvPr/>
+        </p:nvSpPr>
+        <p:spPr>
+          <a:xfrm>
+            <a:off x="2052191" y="1477417"/>
+            <a:ext cx="155448" cy="171450"/>
+          </a:xfrm>
+          <a:prstGeom prst="rect">
+            <a:avLst/>
+          </a:prstGeom>
+          <a:noFill/>
+          <a:ln/>
+        </p:spPr>
+        <p:txBody>
+          <a:bodyPr wrap="square" lIns="0" tIns="0" rIns="0" bIns="0" rtlCol="0" anchor="t"/>
+          <a:lstStyle/>
+          <a:p>
+            <a:pPr algn="l" indent="0" marL="0">
+              <a:buNone/>
+            </a:pPr>
+            <a:r>
+              <a:rPr lang="en-US" sz="1200" b="1" dirty="0">
+                <a:solidFill>
+                  <a:srgbClr val="277884"/>
+                </a:solidFill>
+                <a:latin typeface="Arial" pitchFamily="34" charset="0"/>
+                <a:ea typeface="Arial" pitchFamily="34" charset="-122"/>
+                <a:cs typeface="Arial" pitchFamily="34" charset="-120"/>
+              </a:rPr>
+              <a:t>→</a:t>
+            </a:r>
+            <a:endParaRPr lang="en-US" sz="1200" dirty="0"/>
+          </a:p>
+        </p:txBody>
+      </p:sp>
+      <p:sp>
+        <p:nvSpPr>
+          <p:cNvPr id="15" name="Text 13"/>
+          <p:cNvSpPr/>
+          <p:nvPr/>
+        </p:nvSpPr>
+        <p:spPr>
+          <a:xfrm>
+            <a:off x="2280791" y="1428304"/>
+            <a:ext cx="1495871" cy="269677"/>
+          </a:xfrm>
+          <a:prstGeom prst="roundRect">
+            <a:avLst>
+              <a:gd name="adj" fmla="val 18837"/>
+            </a:avLst>
+          </a:prstGeom>
+          <a:solidFill>
+            <a:srgbClr val="5EA8A7"/>
+          </a:solidFill>
+          <a:ln/>
+        </p:spPr>
+        <p:txBody>
+          <a:bodyPr wrap="square" rtlCol="0" anchor="ctr"/>
+          <a:lstStyle/>
+          <a:p>
+            <a:pPr indent="0" marL="0">
+              <a:buNone/>
+            </a:pPr>
+            <a:endParaRPr lang="en-US" dirty="0"/>
+          </a:p>
+        </p:txBody>
+      </p:sp>
+      <p:sp>
+        <p:nvSpPr>
+          <p:cNvPr id="16" name="Text 14"/>
+          <p:cNvSpPr/>
+          <p:nvPr/>
+        </p:nvSpPr>
+        <p:spPr>
+          <a:xfrm>
+            <a:off x="2407741" y="1491704"/>
+            <a:ext cx="1266810" cy="142875"/>
+          </a:xfrm>
+          <a:prstGeom prst="rect">
+            <a:avLst/>
+          </a:prstGeom>
+          <a:noFill/>
+          <a:ln/>
+        </p:spPr>
+        <p:txBody>
+          <a:bodyPr wrap="square" lIns="0" tIns="0" rIns="0" bIns="0" rtlCol="0" anchor="t"/>
+          <a:lstStyle/>
+          <a:p>
+            <a:pPr algn="l" indent="0" marL="0">
+              <a:buNone/>
+            </a:pPr>
+            <a:r>
+              <a:rPr lang="en-US" sz="1000" b="1" dirty="0">
+                <a:solidFill>
+                  <a:srgbClr val="FFFFFF"/>
+                </a:solidFill>
+                <a:latin typeface="Arial" pitchFamily="34" charset="0"/>
+                <a:ea typeface="Arial" pitchFamily="34" charset="-122"/>
+                <a:cs typeface="Arial" pitchFamily="34" charset="-120"/>
+              </a:rPr>
+              <a:t>Questions answered</a:t>
+            </a:r>
+            <a:endParaRPr lang="en-US" sz="1000" dirty="0"/>
+          </a:p>
+        </p:txBody>
+      </p:sp>
+      <p:sp>
+        <p:nvSpPr>
+          <p:cNvPr id="17" name="Text 15"/>
+          <p:cNvSpPr/>
+          <p:nvPr/>
+        </p:nvSpPr>
+        <p:spPr>
+          <a:xfrm>
+            <a:off x="683109" y="1748730"/>
+            <a:ext cx="8031682" cy="171450"/>
+          </a:xfrm>
+          <a:prstGeom prst="rect">
+            <a:avLst/>
+          </a:prstGeom>
+          <a:noFill/>
+          <a:ln/>
+        </p:spPr>
+        <p:txBody>
+          <a:bodyPr wrap="square" lIns="0" tIns="0" rIns="0" bIns="0" rtlCol="0" anchor="t"/>
+          <a:lstStyle/>
+          <a:p>
+            <a:pPr algn="ctr" indent="0" marL="0">
+              <a:buNone/>
+            </a:pPr>
+            <a:r>
+              <a:rPr lang="en-US" sz="1200" b="1" dirty="0">
+                <a:solidFill>
+                  <a:srgbClr val="277884"/>
+                </a:solidFill>
+                <a:latin typeface="Arial" pitchFamily="34" charset="0"/>
+                <a:ea typeface="Arial" pitchFamily="34" charset="-122"/>
+                <a:cs typeface="Arial" pitchFamily="34" charset="-120"/>
+              </a:rPr>
+              <a:t>↓</a:t>
+            </a:r>
+            <a:endParaRPr lang="en-US" sz="1200" dirty="0"/>
+          </a:p>
+        </p:txBody>
+      </p:sp>
+      <p:sp>
+        <p:nvSpPr>
+          <p:cNvPr id="18" name="Text 16"/>
+          <p:cNvSpPr/>
+          <p:nvPr/>
+        </p:nvSpPr>
+        <p:spPr>
+          <a:xfrm>
+            <a:off x="507950" y="1970931"/>
+            <a:ext cx="1164282" cy="269677"/>
+          </a:xfrm>
+          <a:prstGeom prst="roundRect">
+            <a:avLst>
+              <a:gd name="adj" fmla="val 18837"/>
+            </a:avLst>
+          </a:prstGeom>
+          <a:solidFill>
+            <a:srgbClr val="1C2833"/>
+          </a:solidFill>
+          <a:ln/>
+        </p:spPr>
+        <p:txBody>
+          <a:bodyPr wrap="square" rtlCol="0" anchor="ctr"/>
+          <a:lstStyle/>
+          <a:p>
+            <a:pPr indent="0" marL="0">
+              <a:buNone/>
+            </a:pPr>
+            <a:endParaRPr lang="en-US" dirty="0"/>
+          </a:p>
+        </p:txBody>
+      </p:sp>
+      <p:sp>
+        <p:nvSpPr>
+          <p:cNvPr id="19" name="Text 17"/>
+          <p:cNvSpPr/>
+          <p:nvPr/>
+        </p:nvSpPr>
+        <p:spPr>
+          <a:xfrm>
+            <a:off x="634901" y="2034332"/>
+            <a:ext cx="928589" cy="142875"/>
+          </a:xfrm>
+          <a:prstGeom prst="rect">
+            <a:avLst/>
+          </a:prstGeom>
+          <a:noFill/>
+          <a:ln/>
+        </p:spPr>
+        <p:txBody>
+          <a:bodyPr wrap="square" lIns="0" tIns="0" rIns="0" bIns="0" rtlCol="0" anchor="t"/>
+          <a:lstStyle/>
+          <a:p>
+            <a:pPr algn="l" indent="0" marL="0">
+              <a:buNone/>
+            </a:pPr>
+            <a:r>
+              <a:rPr lang="en-US" sz="1000" b="1" dirty="0">
+                <a:solidFill>
+                  <a:srgbClr val="FFFFFF"/>
+                </a:solidFill>
+                <a:latin typeface="Arial" pitchFamily="34" charset="0"/>
+                <a:ea typeface="Arial" pitchFamily="34" charset="-122"/>
+                <a:cs typeface="Arial" pitchFamily="34" charset="-120"/>
+              </a:rPr>
+              <a:t>Design created</a:t>
+            </a:r>
+            <a:endParaRPr lang="en-US" sz="1000" dirty="0"/>
+          </a:p>
+        </p:txBody>
+      </p:sp>
+      <p:sp>
+        <p:nvSpPr>
+          <p:cNvPr id="20" name="Text 18"/>
+          <p:cNvSpPr/>
+          <p:nvPr/>
+        </p:nvSpPr>
+        <p:spPr>
+          <a:xfrm>
+            <a:off x="1748433" y="2020044"/>
+            <a:ext cx="155448" cy="171450"/>
+          </a:xfrm>
+          <a:prstGeom prst="rect">
+            <a:avLst/>
+          </a:prstGeom>
+          <a:noFill/>
+          <a:ln/>
+        </p:spPr>
+        <p:txBody>
+          <a:bodyPr wrap="square" lIns="0" tIns="0" rIns="0" bIns="0" rtlCol="0" anchor="t"/>
+          <a:lstStyle/>
+          <a:p>
+            <a:pPr algn="l" indent="0" marL="0">
+              <a:buNone/>
+            </a:pPr>
+            <a:r>
+              <a:rPr lang="en-US" sz="1200" b="1" dirty="0">
+                <a:solidFill>
+                  <a:srgbClr val="277884"/>
+                </a:solidFill>
+                <a:latin typeface="Arial" pitchFamily="34" charset="0"/>
+                <a:ea typeface="Arial" pitchFamily="34" charset="-122"/>
+                <a:cs typeface="Arial" pitchFamily="34" charset="-120"/>
+              </a:rPr>
+              <a:t>→</a:t>
+            </a:r>
+            <a:endParaRPr lang="en-US" sz="1200" dirty="0"/>
+          </a:p>
+        </p:txBody>
+      </p:sp>
+      <p:sp>
+        <p:nvSpPr>
+          <p:cNvPr id="21" name="Text 19"/>
+          <p:cNvSpPr/>
+          <p:nvPr/>
+        </p:nvSpPr>
+        <p:spPr>
+          <a:xfrm>
+            <a:off x="1977033" y="1970931"/>
+            <a:ext cx="1679525" cy="269677"/>
+          </a:xfrm>
+          <a:prstGeom prst="roundRect">
+            <a:avLst>
+              <a:gd name="adj" fmla="val 18837"/>
+            </a:avLst>
+          </a:prstGeom>
+          <a:solidFill>
+            <a:srgbClr val="277884"/>
+          </a:solidFill>
+          <a:ln/>
+        </p:spPr>
+        <p:txBody>
+          <a:bodyPr wrap="square" rtlCol="0" anchor="ctr"/>
+          <a:lstStyle/>
+          <a:p>
+            <a:pPr indent="0" marL="0">
+              <a:buNone/>
+            </a:pPr>
+            <a:endParaRPr lang="en-US" dirty="0"/>
+          </a:p>
+        </p:txBody>
+      </p:sp>
+      <p:sp>
+        <p:nvSpPr>
+          <p:cNvPr id="22" name="Text 20"/>
+          <p:cNvSpPr/>
+          <p:nvPr/>
+        </p:nvSpPr>
+        <p:spPr>
+          <a:xfrm>
+            <a:off x="2103983" y="2034332"/>
+            <a:ext cx="1454137" cy="142875"/>
+          </a:xfrm>
+          <a:prstGeom prst="rect">
+            <a:avLst/>
+          </a:prstGeom>
+          <a:noFill/>
+          <a:ln/>
+        </p:spPr>
+        <p:txBody>
+          <a:bodyPr wrap="square" lIns="0" tIns="0" rIns="0" bIns="0" rtlCol="0" anchor="t"/>
+          <a:lstStyle/>
+          <a:p>
+            <a:pPr algn="l" indent="0" marL="0">
+              <a:buNone/>
+            </a:pPr>
+            <a:r>
+              <a:rPr lang="en-US" sz="1000" b="1" dirty="0">
+                <a:solidFill>
+                  <a:srgbClr val="FFFFFF"/>
+                </a:solidFill>
+                <a:latin typeface="Arial" pitchFamily="34" charset="0"/>
+                <a:ea typeface="Arial" pitchFamily="34" charset="-122"/>
+                <a:cs typeface="Arial" pitchFamily="34" charset="-120"/>
+              </a:rPr>
+              <a:t>Adversarial review loop</a:t>
+            </a:r>
+            <a:endParaRPr lang="en-US" sz="1000" dirty="0"/>
+          </a:p>
+        </p:txBody>
+      </p:sp>
+      <p:sp>
+        <p:nvSpPr>
+          <p:cNvPr id="23" name="Text 21"/>
+          <p:cNvSpPr/>
+          <p:nvPr/>
+        </p:nvSpPr>
+        <p:spPr>
+          <a:xfrm>
+            <a:off x="683109" y="2291358"/>
+            <a:ext cx="8031682" cy="171450"/>
+          </a:xfrm>
+          <a:prstGeom prst="rect">
+            <a:avLst/>
+          </a:prstGeom>
+          <a:noFill/>
+          <a:ln/>
+        </p:spPr>
+        <p:txBody>
+          <a:bodyPr wrap="square" lIns="0" tIns="0" rIns="0" bIns="0" rtlCol="0" anchor="t"/>
+          <a:lstStyle/>
+          <a:p>
+            <a:pPr algn="ctr" indent="0" marL="0">
+              <a:buNone/>
+            </a:pPr>
+            <a:r>
+              <a:rPr lang="en-US" sz="1200" b="1" dirty="0">
+                <a:solidFill>
+                  <a:srgbClr val="277884"/>
+                </a:solidFill>
+                <a:latin typeface="Arial" pitchFamily="34" charset="0"/>
+                <a:ea typeface="Arial" pitchFamily="34" charset="-122"/>
+                <a:cs typeface="Arial" pitchFamily="34" charset="-120"/>
+              </a:rPr>
+              <a:t>↓</a:t>
+            </a:r>
+            <a:endParaRPr lang="en-US" sz="1200" dirty="0"/>
+          </a:p>
+        </p:txBody>
+      </p:sp>
+      <p:sp>
+        <p:nvSpPr>
+          <p:cNvPr id="24" name="Text 22"/>
+          <p:cNvSpPr/>
+          <p:nvPr/>
+        </p:nvSpPr>
+        <p:spPr>
+          <a:xfrm>
+            <a:off x="507950" y="2513558"/>
+            <a:ext cx="1728490" cy="269677"/>
+          </a:xfrm>
+          <a:prstGeom prst="roundRect">
+            <a:avLst>
+              <a:gd name="adj" fmla="val 18837"/>
+            </a:avLst>
+          </a:prstGeom>
+          <a:solidFill>
+            <a:srgbClr val="5EA8A7"/>
+          </a:solidFill>
+          <a:ln/>
+        </p:spPr>
+        <p:txBody>
+          <a:bodyPr wrap="square" rtlCol="0" anchor="ctr"/>
+          <a:lstStyle/>
+          <a:p>
+            <a:pPr indent="0" marL="0">
+              <a:buNone/>
+            </a:pPr>
+            <a:endParaRPr lang="en-US" dirty="0"/>
+          </a:p>
+        </p:txBody>
+      </p:sp>
+      <p:sp>
+        <p:nvSpPr>
+          <p:cNvPr id="25" name="Text 23"/>
+          <p:cNvSpPr/>
+          <p:nvPr/>
+        </p:nvSpPr>
+        <p:spPr>
+          <a:xfrm>
+            <a:off x="634901" y="2576959"/>
+            <a:ext cx="1504081" cy="142875"/>
+          </a:xfrm>
+          <a:prstGeom prst="rect">
+            <a:avLst/>
+          </a:prstGeom>
+          <a:noFill/>
+          <a:ln/>
+        </p:spPr>
+        <p:txBody>
+          <a:bodyPr wrap="square" lIns="0" tIns="0" rIns="0" bIns="0" rtlCol="0" anchor="t"/>
+          <a:lstStyle/>
+          <a:p>
+            <a:pPr algn="l" indent="0" marL="0">
+              <a:buNone/>
+            </a:pPr>
+            <a:r>
+              <a:rPr lang="en-US" sz="1000" b="1" dirty="0">
+                <a:solidFill>
+                  <a:srgbClr val="FFFFFF"/>
+                </a:solidFill>
+                <a:latin typeface="Arial" pitchFamily="34" charset="0"/>
+                <a:ea typeface="Arial" pitchFamily="34" charset="-122"/>
+                <a:cs typeface="Arial" pitchFamily="34" charset="-120"/>
+              </a:rPr>
+              <a:t>Human approves design</a:t>
+            </a:r>
+            <a:endParaRPr lang="en-US" sz="1000" dirty="0"/>
+          </a:p>
+        </p:txBody>
+      </p:sp>
+      <p:sp>
+        <p:nvSpPr>
+          <p:cNvPr id="26" name="Text 24"/>
+          <p:cNvSpPr/>
+          <p:nvPr/>
+        </p:nvSpPr>
+        <p:spPr>
+          <a:xfrm>
+            <a:off x="683109" y="2833985"/>
+            <a:ext cx="8031682" cy="171450"/>
+          </a:xfrm>
+          <a:prstGeom prst="rect">
+            <a:avLst/>
+          </a:prstGeom>
+          <a:noFill/>
+          <a:ln/>
+        </p:spPr>
+        <p:txBody>
+          <a:bodyPr wrap="square" lIns="0" tIns="0" rIns="0" bIns="0" rtlCol="0" anchor="t"/>
+          <a:lstStyle/>
+          <a:p>
+            <a:pPr algn="ctr" indent="0" marL="0">
+              <a:buNone/>
+            </a:pPr>
+            <a:r>
+              <a:rPr lang="en-US" sz="1200" b="1" dirty="0">
+                <a:solidFill>
+                  <a:srgbClr val="277884"/>
+                </a:solidFill>
+                <a:latin typeface="Arial" pitchFamily="34" charset="0"/>
+                <a:ea typeface="Arial" pitchFamily="34" charset="-122"/>
+                <a:cs typeface="Arial" pitchFamily="34" charset="-120"/>
+              </a:rPr>
+              <a:t>↓</a:t>
+            </a:r>
+            <a:endParaRPr lang="en-US" sz="1200" dirty="0"/>
+          </a:p>
+        </p:txBody>
+      </p:sp>
+      <p:sp>
+        <p:nvSpPr>
+          <p:cNvPr id="27" name="Text 25"/>
+          <p:cNvSpPr/>
+          <p:nvPr/>
+        </p:nvSpPr>
+        <p:spPr>
+          <a:xfrm>
+            <a:off x="507950" y="3056186"/>
+            <a:ext cx="1488430" cy="269677"/>
+          </a:xfrm>
+          <a:prstGeom prst="roundRect">
+            <a:avLst>
+              <a:gd name="adj" fmla="val 18837"/>
+            </a:avLst>
+          </a:prstGeom>
+          <a:solidFill>
+            <a:srgbClr val="1C2833"/>
+          </a:solidFill>
+          <a:ln/>
+        </p:spPr>
+        <p:txBody>
+          <a:bodyPr wrap="square" rtlCol="0" anchor="ctr"/>
+          <a:lstStyle/>
+          <a:p>
+            <a:pPr indent="0" marL="0">
+              <a:buNone/>
+            </a:pPr>
+            <a:endParaRPr lang="en-US" dirty="0"/>
+          </a:p>
+        </p:txBody>
+      </p:sp>
+      <p:sp>
+        <p:nvSpPr>
+          <p:cNvPr id="28" name="Text 26"/>
+          <p:cNvSpPr/>
+          <p:nvPr/>
+        </p:nvSpPr>
+        <p:spPr>
+          <a:xfrm>
+            <a:off x="634901" y="3119586"/>
+            <a:ext cx="1259220" cy="142875"/>
+          </a:xfrm>
+          <a:prstGeom prst="rect">
+            <a:avLst/>
+          </a:prstGeom>
+          <a:noFill/>
+          <a:ln/>
+        </p:spPr>
+        <p:txBody>
+          <a:bodyPr wrap="square" lIns="0" tIns="0" rIns="0" bIns="0" rtlCol="0" anchor="t"/>
+          <a:lstStyle/>
+          <a:p>
+            <a:pPr algn="l" indent="0" marL="0">
+              <a:buNone/>
+            </a:pPr>
+            <a:r>
+              <a:rPr lang="en-US" sz="1000" b="1" dirty="0">
+                <a:solidFill>
+                  <a:srgbClr val="FFFFFF"/>
+                </a:solidFill>
+                <a:latin typeface="Arial" pitchFamily="34" charset="0"/>
+                <a:ea typeface="Arial" pitchFamily="34" charset="-122"/>
+                <a:cs typeface="Arial" pitchFamily="34" charset="-120"/>
+              </a:rPr>
+              <a:t>TDD implementation</a:t>
+            </a:r>
+            <a:endParaRPr lang="en-US" sz="1000" dirty="0"/>
+          </a:p>
+        </p:txBody>
+      </p:sp>
+      <p:sp>
+        <p:nvSpPr>
+          <p:cNvPr id="29" name="Text 27"/>
+          <p:cNvSpPr/>
+          <p:nvPr/>
+        </p:nvSpPr>
+        <p:spPr>
+          <a:xfrm>
+            <a:off x="2072580" y="3105299"/>
+            <a:ext cx="155448" cy="171450"/>
+          </a:xfrm>
+          <a:prstGeom prst="rect">
+            <a:avLst/>
+          </a:prstGeom>
+          <a:noFill/>
+          <a:ln/>
+        </p:spPr>
+        <p:txBody>
+          <a:bodyPr wrap="square" lIns="0" tIns="0" rIns="0" bIns="0" rtlCol="0" anchor="t"/>
+          <a:lstStyle/>
+          <a:p>
+            <a:pPr algn="l" indent="0" marL="0">
+              <a:buNone/>
+            </a:pPr>
+            <a:r>
+              <a:rPr lang="en-US" sz="1200" b="1" dirty="0">
+                <a:solidFill>
+                  <a:srgbClr val="277884"/>
+                </a:solidFill>
+                <a:latin typeface="Arial" pitchFamily="34" charset="0"/>
+                <a:ea typeface="Arial" pitchFamily="34" charset="-122"/>
+                <a:cs typeface="Arial" pitchFamily="34" charset="-120"/>
+              </a:rPr>
+              <a:t>→</a:t>
+            </a:r>
+            <a:endParaRPr lang="en-US" sz="1200" dirty="0"/>
+          </a:p>
+        </p:txBody>
+      </p:sp>
+      <p:sp>
+        <p:nvSpPr>
+          <p:cNvPr id="30" name="Text 28"/>
+          <p:cNvSpPr/>
+          <p:nvPr/>
+        </p:nvSpPr>
+        <p:spPr>
+          <a:xfrm>
+            <a:off x="2301180" y="3056186"/>
+            <a:ext cx="1679525" cy="269677"/>
+          </a:xfrm>
+          <a:prstGeom prst="roundRect">
+            <a:avLst>
+              <a:gd name="adj" fmla="val 18837"/>
+            </a:avLst>
+          </a:prstGeom>
+          <a:solidFill>
+            <a:srgbClr val="277884"/>
+          </a:solidFill>
+          <a:ln/>
+        </p:spPr>
+        <p:txBody>
+          <a:bodyPr wrap="square" rtlCol="0" anchor="ctr"/>
+          <a:lstStyle/>
+          <a:p>
+            <a:pPr indent="0" marL="0">
+              <a:buNone/>
+            </a:pPr>
+            <a:endParaRPr lang="en-US" dirty="0"/>
+          </a:p>
+        </p:txBody>
+      </p:sp>
+      <p:sp>
+        <p:nvSpPr>
+          <p:cNvPr id="31" name="Text 29"/>
+          <p:cNvSpPr/>
+          <p:nvPr/>
+        </p:nvSpPr>
+        <p:spPr>
+          <a:xfrm>
+            <a:off x="2428131" y="3119586"/>
+            <a:ext cx="1454137" cy="142875"/>
+          </a:xfrm>
+          <a:prstGeom prst="rect">
+            <a:avLst/>
+          </a:prstGeom>
+          <a:noFill/>
+          <a:ln/>
+        </p:spPr>
+        <p:txBody>
+          <a:bodyPr wrap="square" lIns="0" tIns="0" rIns="0" bIns="0" rtlCol="0" anchor="t"/>
+          <a:lstStyle/>
+          <a:p>
+            <a:pPr algn="l" indent="0" marL="0">
+              <a:buNone/>
+            </a:pPr>
+            <a:r>
+              <a:rPr lang="en-US" sz="1000" b="1" dirty="0">
+                <a:solidFill>
+                  <a:srgbClr val="FFFFFF"/>
+                </a:solidFill>
+                <a:latin typeface="Arial" pitchFamily="34" charset="0"/>
+                <a:ea typeface="Arial" pitchFamily="34" charset="-122"/>
+                <a:cs typeface="Arial" pitchFamily="34" charset="-120"/>
+              </a:rPr>
+              <a:t>Adversarial review loop</a:t>
+            </a:r>
+            <a:endParaRPr lang="en-US" sz="1000" dirty="0"/>
+          </a:p>
+        </p:txBody>
+      </p:sp>
+      <p:sp>
+        <p:nvSpPr>
+          <p:cNvPr id="32" name="Text 30"/>
+          <p:cNvSpPr/>
+          <p:nvPr/>
+        </p:nvSpPr>
+        <p:spPr>
+          <a:xfrm>
+            <a:off x="683109" y="3376613"/>
+            <a:ext cx="8031682" cy="171450"/>
+          </a:xfrm>
+          <a:prstGeom prst="rect">
+            <a:avLst/>
+          </a:prstGeom>
+          <a:noFill/>
+          <a:ln/>
+        </p:spPr>
+        <p:txBody>
+          <a:bodyPr wrap="square" lIns="0" tIns="0" rIns="0" bIns="0" rtlCol="0" anchor="t"/>
+          <a:lstStyle/>
+          <a:p>
+            <a:pPr algn="ctr" indent="0" marL="0">
+              <a:buNone/>
+            </a:pPr>
+            <a:r>
+              <a:rPr lang="en-US" sz="1200" b="1" dirty="0">
+                <a:solidFill>
+                  <a:srgbClr val="277884"/>
+                </a:solidFill>
+                <a:latin typeface="Arial" pitchFamily="34" charset="0"/>
+                <a:ea typeface="Arial" pitchFamily="34" charset="-122"/>
+                <a:cs typeface="Arial" pitchFamily="34" charset="-120"/>
+              </a:rPr>
+              <a:t>↓</a:t>
+            </a:r>
+            <a:endParaRPr lang="en-US" sz="1200" dirty="0"/>
+          </a:p>
+        </p:txBody>
+      </p:sp>
+      <p:sp>
+        <p:nvSpPr>
+          <p:cNvPr id="33" name="Text 31"/>
+          <p:cNvSpPr/>
+          <p:nvPr/>
+        </p:nvSpPr>
+        <p:spPr>
+          <a:xfrm>
+            <a:off x="507950" y="3598813"/>
+            <a:ext cx="1615678" cy="269677"/>
+          </a:xfrm>
+          <a:prstGeom prst="roundRect">
+            <a:avLst>
+              <a:gd name="adj" fmla="val 18837"/>
+            </a:avLst>
+          </a:prstGeom>
+          <a:solidFill>
+            <a:srgbClr val="5EA8A7"/>
+          </a:solidFill>
+          <a:ln/>
+        </p:spPr>
+        <p:txBody>
+          <a:bodyPr wrap="square" rtlCol="0" anchor="ctr"/>
+          <a:lstStyle/>
+          <a:p>
+            <a:pPr indent="0" marL="0">
+              <a:buNone/>
+            </a:pPr>
+            <a:endParaRPr lang="en-US" dirty="0"/>
+          </a:p>
+        </p:txBody>
+      </p:sp>
+      <p:sp>
+        <p:nvSpPr>
+          <p:cNvPr id="34" name="Text 32"/>
+          <p:cNvSpPr/>
+          <p:nvPr/>
+        </p:nvSpPr>
+        <p:spPr>
+          <a:xfrm>
+            <a:off x="634901" y="3662214"/>
+            <a:ext cx="1389013" cy="142875"/>
+          </a:xfrm>
+          <a:prstGeom prst="rect">
+            <a:avLst/>
+          </a:prstGeom>
+          <a:noFill/>
+          <a:ln/>
+        </p:spPr>
+        <p:txBody>
+          <a:bodyPr wrap="square" lIns="0" tIns="0" rIns="0" bIns="0" rtlCol="0" anchor="t"/>
+          <a:lstStyle/>
+          <a:p>
+            <a:pPr algn="l" indent="0" marL="0">
+              <a:buNone/>
+            </a:pPr>
+            <a:r>
+              <a:rPr lang="en-US" sz="1000" b="1" dirty="0">
+                <a:solidFill>
+                  <a:srgbClr val="FFFFFF"/>
+                </a:solidFill>
+                <a:latin typeface="Arial" pitchFamily="34" charset="0"/>
+                <a:ea typeface="Arial" pitchFamily="34" charset="-122"/>
+                <a:cs typeface="Arial" pitchFamily="34" charset="-120"/>
+              </a:rPr>
+              <a:t>Human approves code</a:t>
+            </a:r>
+            <a:endParaRPr lang="en-US" sz="1000" dirty="0"/>
+          </a:p>
+        </p:txBody>
+      </p:sp>
+      <p:sp>
+        <p:nvSpPr>
+          <p:cNvPr id="35" name="Text 33"/>
+          <p:cNvSpPr/>
+          <p:nvPr/>
+        </p:nvSpPr>
+        <p:spPr>
+          <a:xfrm>
+            <a:off x="2199829" y="3647926"/>
+            <a:ext cx="155448" cy="171450"/>
+          </a:xfrm>
+          <a:prstGeom prst="rect">
+            <a:avLst/>
+          </a:prstGeom>
+          <a:noFill/>
+          <a:ln/>
+        </p:spPr>
+        <p:txBody>
+          <a:bodyPr wrap="square" lIns="0" tIns="0" rIns="0" bIns="0" rtlCol="0" anchor="t"/>
+          <a:lstStyle/>
+          <a:p>
+            <a:pPr algn="l" indent="0" marL="0">
+              <a:buNone/>
+            </a:pPr>
+            <a:r>
+              <a:rPr lang="en-US" sz="1200" b="1" dirty="0">
+                <a:solidFill>
+                  <a:srgbClr val="277884"/>
+                </a:solidFill>
+                <a:latin typeface="Arial" pitchFamily="34" charset="0"/>
+                <a:ea typeface="Arial" pitchFamily="34" charset="-122"/>
+                <a:cs typeface="Arial" pitchFamily="34" charset="-120"/>
+              </a:rPr>
+              <a:t>→</a:t>
+            </a:r>
+            <a:endParaRPr lang="en-US" sz="1200" dirty="0"/>
+          </a:p>
+        </p:txBody>
+      </p:sp>
+      <p:sp>
+        <p:nvSpPr>
+          <p:cNvPr id="36" name="Text 34"/>
+          <p:cNvSpPr/>
+          <p:nvPr/>
+        </p:nvSpPr>
+        <p:spPr>
+          <a:xfrm>
+            <a:off x="2428429" y="3598813"/>
+            <a:ext cx="430411" cy="269677"/>
+          </a:xfrm>
+          <a:prstGeom prst="roundRect">
+            <a:avLst>
+              <a:gd name="adj" fmla="val 18837"/>
+            </a:avLst>
+          </a:prstGeom>
+          <a:solidFill>
+            <a:srgbClr val="1C2833"/>
+          </a:solidFill>
+          <a:ln/>
+        </p:spPr>
+        <p:txBody>
+          <a:bodyPr wrap="square" rtlCol="0" anchor="ctr"/>
+          <a:lstStyle/>
+          <a:p>
+            <a:pPr indent="0" marL="0">
+              <a:buNone/>
+            </a:pPr>
+            <a:endParaRPr lang="en-US" dirty="0"/>
+          </a:p>
+        </p:txBody>
+      </p:sp>
+      <p:sp>
+        <p:nvSpPr>
+          <p:cNvPr id="37" name="Text 35"/>
+          <p:cNvSpPr/>
+          <p:nvPr/>
+        </p:nvSpPr>
+        <p:spPr>
+          <a:xfrm>
+            <a:off x="2555379" y="3662214"/>
+            <a:ext cx="180040" cy="142875"/>
+          </a:xfrm>
+          <a:prstGeom prst="rect">
+            <a:avLst/>
+          </a:prstGeom>
+          <a:noFill/>
+          <a:ln/>
+        </p:spPr>
+        <p:txBody>
+          <a:bodyPr wrap="square" lIns="0" tIns="0" rIns="0" bIns="0" rtlCol="0" anchor="t"/>
+          <a:lstStyle/>
+          <a:p>
+            <a:pPr algn="l" indent="0" marL="0">
+              <a:buNone/>
+            </a:pPr>
+            <a:r>
+              <a:rPr lang="en-US" sz="1000" b="1" dirty="0">
+                <a:solidFill>
+                  <a:srgbClr val="FFFFFF"/>
+                </a:solidFill>
+                <a:latin typeface="Arial" pitchFamily="34" charset="0"/>
+                <a:ea typeface="Arial" pitchFamily="34" charset="-122"/>
+                <a:cs typeface="Arial" pitchFamily="34" charset="-120"/>
+              </a:rPr>
+              <a:t>PR</a:t>
+            </a:r>
+            <a:endParaRPr lang="en-US" sz="1000" dirty="0"/>
           </a:p>
         </p:txBody>
       </p:sp>
@@ -5607,8 +6066,8 @@
         </p:nvSpPr>
         <p:spPr>
           <a:xfrm>
-            <a:off x="507950" y="507950"/>
-            <a:ext cx="8290661" cy="371475"/>
+            <a:off x="507950" y="457200"/>
+            <a:ext cx="8290661" cy="352425"/>
           </a:xfrm>
           <a:prstGeom prst="rect">
             <a:avLst/>
@@ -5622,7 +6081,7 @@
           <a:p>
             <a:pPr algn="l" indent="0" marL="0">
               <a:spcBef>
-                <a:spcPts val="4000"/>
+                <a:spcPts val="3600"/>
               </a:spcBef>
               <a:spcAft>
                 <a:spcPts val="2000"/>
@@ -5630,7 +6089,7 @@
               <a:buNone/>
             </a:pPr>
             <a:r>
-              <a:rPr lang="en-US" sz="2600" b="1" dirty="0">
+              <a:rPr lang="en-US" sz="2400" b="1" dirty="0">
                 <a:solidFill>
                   <a:srgbClr val="1C2833"/>
                 </a:solidFill>
@@ -5638,9 +6097,9 @@
                 <a:ea typeface="Arial" pitchFamily="34" charset="-122"/>
                 <a:cs typeface="Arial" pitchFamily="34" charset="-120"/>
               </a:rPr>
-              <a:t>Scope Discipline &amp; Escalation</a:t>
-            </a:r>
-            <a:endParaRPr lang="en-US" sz="2600" dirty="0"/>
+              <a:t>Two Automated Review Loops</a:t>
+            </a:r>
+            <a:endParaRPr lang="en-US" sz="2400" dirty="0"/>
           </a:p>
         </p:txBody>
       </p:sp>
@@ -5652,28 +6111,125 @@
         </p:nvSpPr>
         <p:spPr>
           <a:xfrm>
-            <a:off x="507950" y="1133326"/>
-            <a:ext cx="8128099" cy="1600200"/>
-          </a:xfrm>
-          <a:prstGeom prst="rect">
-            <a:avLst/>
-          </a:prstGeom>
-          <a:noFill/>
-          <a:ln/>
-        </p:spPr>
-        <p:txBody>
-          <a:bodyPr wrap="square" lIns="152400" tIns="0" rIns="0" bIns="0" rtlCol="0" anchor="t"/>
-          <a:lstStyle/>
-          <a:p>
-            <a:pPr algn="l" marL="152400" indent="-152400">
+            <a:off x="507950" y="1063526"/>
+            <a:ext cx="3911650" cy="2965698"/>
+          </a:xfrm>
+          <a:prstGeom prst="roundRect">
+            <a:avLst>
+              <a:gd name="adj" fmla="val 2569"/>
+            </a:avLst>
+          </a:prstGeom>
+          <a:solidFill>
+            <a:srgbClr val="FFFFFF"/>
+          </a:solidFill>
+          <a:ln/>
+        </p:spPr>
+        <p:txBody>
+          <a:bodyPr wrap="square" rtlCol="0" anchor="ctr"/>
+          <a:lstStyle/>
+          <a:p>
+            <a:pPr indent="0" marL="0">
+              <a:buNone/>
+            </a:pPr>
+            <a:endParaRPr lang="en-US" dirty="0"/>
+          </a:p>
+        </p:txBody>
+      </p:sp>
+      <p:sp>
+        <p:nvSpPr>
+          <p:cNvPr id="4" name="Shape 2"/>
+          <p:cNvSpPr/>
+          <p:nvPr/>
+        </p:nvSpPr>
+        <p:spPr>
+          <a:xfrm>
+            <a:off x="507950" y="1087338"/>
+            <a:ext cx="3911650" cy="0"/>
+          </a:xfrm>
+          <a:prstGeom prst="line">
+            <a:avLst/>
+          </a:prstGeom>
+          <a:noFill/>
+          <a:ln w="47625">
+            <a:solidFill>
+              <a:srgbClr val="277884"/>
+            </a:solidFill>
+            <a:prstDash val="solid"/>
+          </a:ln>
+        </p:spPr>
+      </p:sp>
+      <p:sp>
+        <p:nvSpPr>
+          <p:cNvPr id="5" name="Text 3"/>
+          <p:cNvSpPr/>
+          <p:nvPr/>
+        </p:nvSpPr>
+        <p:spPr>
+          <a:xfrm>
+            <a:off x="711101" y="1314301"/>
+            <a:ext cx="3575456" cy="238125"/>
+          </a:xfrm>
+          <a:prstGeom prst="rect">
+            <a:avLst/>
+          </a:prstGeom>
+          <a:noFill/>
+          <a:ln/>
+        </p:spPr>
+        <p:txBody>
+          <a:bodyPr wrap="square" lIns="0" tIns="0" rIns="0" bIns="0" rtlCol="0" anchor="t"/>
+          <a:lstStyle/>
+          <a:p>
+            <a:pPr algn="l" indent="0" marL="0">
+              <a:spcAft>
+                <a:spcPts val="1200"/>
+              </a:spcAft>
+              <a:buNone/>
+            </a:pPr>
+            <a:r>
+              <a:rPr lang="en-US" sz="1600" b="1" dirty="0">
+                <a:solidFill>
+                  <a:srgbClr val="277884"/>
+                </a:solidFill>
+                <a:latin typeface="Arial" pitchFamily="34" charset="0"/>
+                <a:ea typeface="Arial" pitchFamily="34" charset="-122"/>
+                <a:cs typeface="Arial" pitchFamily="34" charset="-120"/>
+              </a:rPr>
+              <a:t>Design Review</a:t>
+            </a:r>
+            <a:endParaRPr lang="en-US" sz="1600" dirty="0"/>
+          </a:p>
+        </p:txBody>
+      </p:sp>
+      <p:sp>
+        <p:nvSpPr>
+          <p:cNvPr id="6" name="Text 4"/>
+          <p:cNvSpPr/>
+          <p:nvPr/>
+        </p:nvSpPr>
+        <p:spPr>
+          <a:xfrm>
+            <a:off x="711101" y="1704826"/>
+            <a:ext cx="3505349" cy="940743"/>
+          </a:xfrm>
+          <a:prstGeom prst="rect">
+            <a:avLst/>
+          </a:prstGeom>
+          <a:noFill/>
+          <a:ln/>
+        </p:spPr>
+        <p:txBody>
+          <a:bodyPr wrap="square" lIns="114300" tIns="0" rIns="0" bIns="0" rtlCol="0" anchor="t"/>
+          <a:lstStyle/>
+          <a:p>
+            <a:pPr algn="l" marL="114300" indent="-114300">
               <a:lnSpc>
-                <a:spcPts val="3150"/>
+                <a:spcPts val="2470"/>
               </a:lnSpc>
               <a:buSzPct val="100000"/>
               <a:buChar char="•"/>
             </a:pPr>
             <a:r>
-              <a:rPr lang="en-US" sz="1500" dirty="0">
+              <a:rPr lang="en-US" sz="1300" dirty="0">
                 <a:solidFill>
                   <a:srgbClr val="2C3E50"/>
                 </a:solidFill>
@@ -5681,20 +6237,20 @@
                 <a:ea typeface="Arial" pitchFamily="34" charset="-122"/>
                 <a:cs typeface="Arial" pitchFamily="34" charset="-120"/>
               </a:rPr>
-              <a:t>Agents know when to stop and ask</a:t>
-            </a:r>
-            <a:endParaRPr lang="en-US" sz="1500" dirty="0"/>
-          </a:p>
-          <a:p>
-            <a:pPr algn="l" marL="152400" indent="-152400">
+              <a:t>Design agent ↔ Fresh opus instance</a:t>
+            </a:r>
+            <a:endParaRPr lang="en-US" sz="1300" dirty="0"/>
+          </a:p>
+          <a:p>
+            <a:pPr algn="l" marL="114300" indent="-114300">
               <a:lnSpc>
-                <a:spcPts val="3150"/>
+                <a:spcPts val="2470"/>
               </a:lnSpc>
               <a:buSzPct val="100000"/>
               <a:buChar char="•"/>
             </a:pPr>
             <a:r>
-              <a:rPr lang="en-US" sz="1500" dirty="0">
+              <a:rPr lang="en-US" sz="1300" dirty="0">
                 <a:solidFill>
                   <a:srgbClr val="2C3E50"/>
                 </a:solidFill>
@@ -5702,20 +6258,20 @@
                 <a:ea typeface="Arial" pitchFamily="34" charset="-122"/>
                 <a:cs typeface="Arial" pitchFamily="34" charset="-120"/>
               </a:rPr>
-              <a:t>Never guess — use AskUserQuestion</a:t>
-            </a:r>
-            <a:endParaRPr lang="en-US" sz="1500" dirty="0"/>
-          </a:p>
-          <a:p>
-            <a:pPr algn="l" marL="152400" indent="-152400">
+              <a:t>Adversarial prompt</a:t>
+            </a:r>
+            <a:endParaRPr lang="en-US" sz="1300" dirty="0"/>
+          </a:p>
+          <a:p>
+            <a:pPr algn="l" marL="114300" indent="-114300">
               <a:lnSpc>
-                <a:spcPts val="3150"/>
+                <a:spcPts val="2470"/>
               </a:lnSpc>
               <a:buSzPct val="100000"/>
               <a:buChar char="•"/>
             </a:pPr>
             <a:r>
-              <a:rPr lang="en-US" sz="1500" dirty="0">
+              <a:rPr lang="en-US" sz="1300" dirty="0">
                 <a:solidFill>
                   <a:srgbClr val="2C3E50"/>
                 </a:solidFill>
@@ -5723,20 +6279,139 @@
                 <a:ea typeface="Arial" pitchFamily="34" charset="-122"/>
                 <a:cs typeface="Arial" pitchFamily="34" charset="-120"/>
               </a:rPr>
-              <a:t>Prevents the #1 time waster: agents going off-script</a:t>
-            </a:r>
-            <a:endParaRPr lang="en-US" sz="1500" dirty="0"/>
-          </a:p>
-          <a:p>
-            <a:pPr algn="l" marL="152400" indent="-152400">
+              <a:t>Cycles until convergence</a:t>
+            </a:r>
+            <a:endParaRPr lang="en-US" sz="1300" dirty="0"/>
+          </a:p>
+        </p:txBody>
+      </p:sp>
+      <p:sp>
+        <p:nvSpPr>
+          <p:cNvPr id="7" name="Text 5"/>
+          <p:cNvSpPr/>
+          <p:nvPr/>
+        </p:nvSpPr>
+        <p:spPr>
+          <a:xfrm>
+            <a:off x="4724400" y="1063526"/>
+            <a:ext cx="3911650" cy="2965698"/>
+          </a:xfrm>
+          <a:prstGeom prst="roundRect">
+            <a:avLst>
+              <a:gd name="adj" fmla="val 2569"/>
+            </a:avLst>
+          </a:prstGeom>
+          <a:solidFill>
+            <a:srgbClr val="FFFFFF"/>
+          </a:solidFill>
+          <a:ln/>
+        </p:spPr>
+        <p:txBody>
+          <a:bodyPr wrap="square" rtlCol="0" anchor="ctr"/>
+          <a:lstStyle/>
+          <a:p>
+            <a:pPr indent="0" marL="0">
+              <a:buNone/>
+            </a:pPr>
+            <a:endParaRPr lang="en-US" dirty="0"/>
+          </a:p>
+        </p:txBody>
+      </p:sp>
+      <p:sp>
+        <p:nvSpPr>
+          <p:cNvPr id="8" name="Shape 6"/>
+          <p:cNvSpPr/>
+          <p:nvPr/>
+        </p:nvSpPr>
+        <p:spPr>
+          <a:xfrm>
+            <a:off x="4724400" y="1087338"/>
+            <a:ext cx="3911650" cy="0"/>
+          </a:xfrm>
+          <a:prstGeom prst="line">
+            <a:avLst/>
+          </a:prstGeom>
+          <a:noFill/>
+          <a:ln w="47625">
+            <a:solidFill>
+              <a:srgbClr val="277884"/>
+            </a:solidFill>
+            <a:prstDash val="solid"/>
+          </a:ln>
+        </p:spPr>
+      </p:sp>
+      <p:sp>
+        <p:nvSpPr>
+          <p:cNvPr id="9" name="Text 7"/>
+          <p:cNvSpPr/>
+          <p:nvPr/>
+        </p:nvSpPr>
+        <p:spPr>
+          <a:xfrm>
+            <a:off x="4927550" y="1314301"/>
+            <a:ext cx="3575456" cy="238125"/>
+          </a:xfrm>
+          <a:prstGeom prst="rect">
+            <a:avLst/>
+          </a:prstGeom>
+          <a:noFill/>
+          <a:ln/>
+        </p:spPr>
+        <p:txBody>
+          <a:bodyPr wrap="square" lIns="0" tIns="0" rIns="0" bIns="0" rtlCol="0" anchor="t"/>
+          <a:lstStyle/>
+          <a:p>
+            <a:pPr algn="l" indent="0" marL="0">
+              <a:spcAft>
+                <a:spcPts val="1200"/>
+              </a:spcAft>
+              <a:buNone/>
+            </a:pPr>
+            <a:r>
+              <a:rPr lang="en-US" sz="1600" b="1" dirty="0">
+                <a:solidFill>
+                  <a:srgbClr val="277884"/>
+                </a:solidFill>
+                <a:latin typeface="Arial" pitchFamily="34" charset="0"/>
+                <a:ea typeface="Arial" pitchFamily="34" charset="-122"/>
+                <a:cs typeface="Arial" pitchFamily="34" charset="-120"/>
+              </a:rPr>
+              <a:t>Code Review</a:t>
+            </a:r>
+            <a:endParaRPr lang="en-US" sz="1600" dirty="0"/>
+          </a:p>
+        </p:txBody>
+      </p:sp>
+      <p:sp>
+        <p:nvSpPr>
+          <p:cNvPr id="10" name="Text 8"/>
+          <p:cNvSpPr/>
+          <p:nvPr/>
+        </p:nvSpPr>
+        <p:spPr>
+          <a:xfrm>
+            <a:off x="4927550" y="1704826"/>
+            <a:ext cx="3505349" cy="940743"/>
+          </a:xfrm>
+          <a:prstGeom prst="rect">
+            <a:avLst/>
+          </a:prstGeom>
+          <a:noFill/>
+          <a:ln/>
+        </p:spPr>
+        <p:txBody>
+          <a:bodyPr wrap="square" lIns="114300" tIns="0" rIns="0" bIns="0" rtlCol="0" anchor="t"/>
+          <a:lstStyle/>
+          <a:p>
+            <a:pPr algn="l" marL="114300" indent="-114300">
               <a:lnSpc>
-                <a:spcPts val="3150"/>
+                <a:spcPts val="2470"/>
               </a:lnSpc>
               <a:buSzPct val="100000"/>
               <a:buChar char="•"/>
             </a:pPr>
             <a:r>
-              <a:rPr lang="en-US" sz="1500" dirty="0">
+              <a:rPr lang="en-US" sz="1300" dirty="0">
                 <a:solidFill>
                   <a:srgbClr val="2C3E50"/>
                 </a:solidFill>
@@ -5744,9 +6419,113 @@
                 <a:ea typeface="Arial" pitchFamily="34" charset="-122"/>
                 <a:cs typeface="Arial" pitchFamily="34" charset="-120"/>
               </a:rPr>
-              <a:t>Non-negotiables list as guardrails</a:t>
-            </a:r>
-            <a:endParaRPr lang="en-US" sz="1500" dirty="0"/>
+              <a:t>Developer agent ↔ Fresh opus instance</a:t>
+            </a:r>
+            <a:endParaRPr lang="en-US" sz="1300" dirty="0"/>
+          </a:p>
+          <a:p>
+            <a:pPr algn="l" marL="114300" indent="-114300">
+              <a:lnSpc>
+                <a:spcPts val="2470"/>
+              </a:lnSpc>
+              <a:buSzPct val="100000"/>
+              <a:buChar char="•"/>
+            </a:pPr>
+            <a:r>
+              <a:rPr lang="en-US" sz="1300" dirty="0">
+                <a:solidFill>
+                  <a:srgbClr val="2C3E50"/>
+                </a:solidFill>
+                <a:latin typeface="Arial" pitchFamily="34" charset="0"/>
+                <a:ea typeface="Arial" pitchFamily="34" charset="-122"/>
+                <a:cs typeface="Arial" pitchFamily="34" charset="-120"/>
+              </a:rPr>
+              <a:t>Adversarial prompt</a:t>
+            </a:r>
+            <a:endParaRPr lang="en-US" sz="1300" dirty="0"/>
+          </a:p>
+          <a:p>
+            <a:pPr algn="l" marL="114300" indent="-114300">
+              <a:lnSpc>
+                <a:spcPts val="2470"/>
+              </a:lnSpc>
+              <a:buSzPct val="100000"/>
+              <a:buChar char="•"/>
+            </a:pPr>
+            <a:r>
+              <a:rPr lang="en-US" sz="1300" dirty="0">
+                <a:solidFill>
+                  <a:srgbClr val="2C3E50"/>
+                </a:solidFill>
+                <a:latin typeface="Arial" pitchFamily="34" charset="0"/>
+                <a:ea typeface="Arial" pitchFamily="34" charset="-122"/>
+                <a:cs typeface="Arial" pitchFamily="34" charset="-120"/>
+              </a:rPr>
+              <a:t>Cycles until convergence</a:t>
+            </a:r>
+            <a:endParaRPr lang="en-US" sz="1300" dirty="0"/>
+          </a:p>
+        </p:txBody>
+      </p:sp>
+      <p:sp>
+        <p:nvSpPr>
+          <p:cNvPr id="11" name="Shape 9"/>
+          <p:cNvSpPr/>
+          <p:nvPr/>
+        </p:nvSpPr>
+        <p:spPr>
+          <a:xfrm>
+            <a:off x="546050" y="4232374"/>
+            <a:ext cx="0" cy="453926"/>
+          </a:xfrm>
+          <a:prstGeom prst="line">
+            <a:avLst/>
+          </a:prstGeom>
+          <a:noFill/>
+          <a:ln w="76200">
+            <a:solidFill>
+              <a:srgbClr val="277884"/>
+            </a:solidFill>
+            <a:prstDash val="solid"/>
+          </a:ln>
+        </p:spPr>
+      </p:sp>
+      <p:sp>
+        <p:nvSpPr>
+          <p:cNvPr id="12" name="Text 10"/>
+          <p:cNvSpPr/>
+          <p:nvPr/>
+        </p:nvSpPr>
+        <p:spPr>
+          <a:xfrm>
+            <a:off x="787301" y="4359325"/>
+            <a:ext cx="7798510" cy="200025"/>
+          </a:xfrm>
+          <a:prstGeom prst="rect">
+            <a:avLst/>
+          </a:prstGeom>
+          <a:noFill/>
+          <a:ln/>
+        </p:spPr>
+        <p:txBody>
+          <a:bodyPr wrap="square" lIns="0" tIns="0" rIns="0" bIns="0" rtlCol="0" anchor="t"/>
+          <a:lstStyle/>
+          <a:p>
+            <a:pPr algn="l" indent="0" marL="0">
+              <a:buNone/>
+            </a:pPr>
+            <a:r>
+              <a:rPr lang="en-US" sz="1300" b="1" dirty="0">
+                <a:solidFill>
+                  <a:srgbClr val="2C3E50"/>
+                </a:solidFill>
+                <a:latin typeface="Arial" pitchFamily="34" charset="0"/>
+                <a:ea typeface="Arial" pitchFamily="34" charset="-122"/>
+                <a:cs typeface="Arial" pitchFamily="34" charset="-120"/>
+              </a:rPr>
+              <a:t>Human only reviews AFTER automated convergence</a:t>
+            </a:r>
+            <a:endParaRPr lang="en-US" sz="1300" dirty="0"/>
           </a:p>
         </p:txBody>
       </p:sp>
@@ -5763,16 +6542,9 @@
   <p:cSld name="Slide 16">
     <p:bg>
       <p:bgPr>
-        <a:blipFill dpi="0" rotWithShape="1">
-          <a:blip r:embed="rId1">
-            <a:lum/>
-          </a:blip>
-          <a:srcRect/>
-          <a:stretch>
-            <a:fillRect/>
-          </a:stretch>
-        </a:blipFill>
-        <a:effectLst/>
+        <a:solidFill>
+          <a:srgbClr val="F4F6F6"/>
+        </a:solidFill>
       </p:bgPr>
     </p:bg>
     <p:spTree>
@@ -5797,8 +6569,8 @@
         </p:nvSpPr>
         <p:spPr>
           <a:xfrm>
-            <a:off x="3224582" y="1909911"/>
-            <a:ext cx="2694837" cy="466725"/>
+            <a:off x="507950" y="507950"/>
+            <a:ext cx="8290661" cy="409575"/>
           </a:xfrm>
           <a:prstGeom prst="rect">
             <a:avLst/>
@@ -5810,24 +6582,27 @@
           <a:bodyPr wrap="square" lIns="0" tIns="0" rIns="0" bIns="0" rtlCol="0" anchor="t"/>
           <a:lstStyle/>
           <a:p>
-            <a:pPr algn="ctr" indent="0" marL="0">
+            <a:pPr algn="l" indent="0" marL="0">
+              <a:spcBef>
+                <a:spcPts val="4000"/>
+              </a:spcBef>
               <a:spcAft>
-                <a:spcPts val="1400"/>
+                <a:spcPts val="2000"/>
               </a:spcAft>
               <a:buNone/>
             </a:pPr>
             <a:r>
-              <a:rPr lang="en-US" sz="3200" b="1" dirty="0">
-                <a:solidFill>
-                  <a:srgbClr val="FFFFFF"/>
-                </a:solidFill>
-                <a:latin typeface="Arial" pitchFamily="34" charset="0"/>
-                <a:ea typeface="Arial" pitchFamily="34" charset="-122"/>
-                <a:cs typeface="Arial" pitchFamily="34" charset="-120"/>
-              </a:rPr>
-              <a:t>The 10% Rule</a:t>
-            </a:r>
-            <a:endParaRPr lang="en-US" sz="3200" dirty="0"/>
+              <a:rPr lang="en-US" sz="2800" b="1" dirty="0">
+                <a:solidFill>
+                  <a:srgbClr val="1C2833"/>
+                </a:solidFill>
+                <a:latin typeface="Arial" pitchFamily="34" charset="0"/>
+                <a:ea typeface="Arial" pitchFamily="34" charset="-122"/>
+                <a:cs typeface="Arial" pitchFamily="34" charset="-120"/>
+              </a:rPr>
+              <a:t>TDD as a Forcing Function</a:t>
+            </a:r>
+            <a:endParaRPr lang="en-US" sz="2800" dirty="0"/>
           </a:p>
         </p:txBody>
       </p:sp>
@@ -5839,79 +6614,122 @@
         </p:nvSpPr>
         <p:spPr>
           <a:xfrm>
-            <a:off x="2155878" y="2554337"/>
-            <a:ext cx="4832095" cy="238125"/>
-          </a:xfrm>
-          <a:prstGeom prst="rect">
-            <a:avLst/>
-          </a:prstGeom>
-          <a:noFill/>
-          <a:ln/>
-        </p:spPr>
-        <p:txBody>
-          <a:bodyPr wrap="square" lIns="0" tIns="0" rIns="0" bIns="0" rtlCol="0" anchor="t"/>
-          <a:lstStyle/>
-          <a:p>
-            <a:pPr algn="ctr" indent="0" marL="0">
-              <a:spcAft>
-                <a:spcPts val="800"/>
-              </a:spcAft>
-              <a:buNone/>
-            </a:pPr>
-            <a:r>
-              <a:rPr lang="en-US" sz="1600" dirty="0">
-                <a:solidFill>
-                  <a:srgbClr val="D5D8DC"/>
-                </a:solidFill>
-                <a:latin typeface="Arial" pitchFamily="34" charset="0"/>
-                <a:ea typeface="Arial" pitchFamily="34" charset="-122"/>
-                <a:cs typeface="Arial" pitchFamily="34" charset="-120"/>
-              </a:rPr>
-              <a:t>Invest ~10% of project time improving your AI tooling</a:t>
-            </a:r>
-            <a:endParaRPr lang="en-US" sz="1600" dirty="0"/>
-          </a:p>
-        </p:txBody>
-      </p:sp>
-      <p:sp>
-        <p:nvSpPr>
-          <p:cNvPr id="4" name="Text 2"/>
-          <p:cNvSpPr/>
-          <p:nvPr/>
-        </p:nvSpPr>
-        <p:spPr>
-          <a:xfrm>
-            <a:off x="2594137" y="2893963"/>
-            <a:ext cx="3955727" cy="238125"/>
-          </a:xfrm>
-          <a:prstGeom prst="rect">
-            <a:avLst/>
-          </a:prstGeom>
-          <a:noFill/>
-          <a:ln/>
-        </p:spPr>
-        <p:txBody>
-          <a:bodyPr wrap="square" lIns="0" tIns="0" rIns="0" bIns="0" rtlCol="0" anchor="t"/>
-          <a:lstStyle/>
-          <a:p>
-            <a:pPr algn="ctr" indent="0" marL="0">
-              <a:spcAft>
-                <a:spcPts val="800"/>
-              </a:spcAft>
-              <a:buNone/>
-            </a:pPr>
-            <a:r>
-              <a:rPr lang="en-US" sz="1600" dirty="0">
-                <a:solidFill>
-                  <a:srgbClr val="D5D8DC"/>
-                </a:solidFill>
-                <a:latin typeface="Arial" pitchFamily="34" charset="0"/>
-                <a:ea typeface="Arial" pitchFamily="34" charset="-122"/>
-                <a:cs typeface="Arial" pitchFamily="34" charset="-120"/>
-              </a:rPr>
-              <a:t>You develop tooling alongside your product</a:t>
-            </a:r>
-            <a:endParaRPr lang="en-US" sz="1600" dirty="0"/>
+            <a:off x="507950" y="1171426"/>
+            <a:ext cx="8128099" cy="1905000"/>
+          </a:xfrm>
+          <a:prstGeom prst="rect">
+            <a:avLst/>
+          </a:prstGeom>
+          <a:noFill/>
+          <a:ln/>
+        </p:spPr>
+        <p:txBody>
+          <a:bodyPr wrap="square" lIns="152400" tIns="0" rIns="0" bIns="0" rtlCol="0" anchor="t"/>
+          <a:lstStyle/>
+          <a:p>
+            <a:pPr algn="l" marL="152400" indent="-152400">
+              <a:lnSpc>
+                <a:spcPts val="3000"/>
+              </a:lnSpc>
+              <a:buSzPct val="100000"/>
+              <a:buChar char="•"/>
+            </a:pPr>
+            <a:r>
+              <a:rPr lang="en-US" sz="1500" dirty="0">
+                <a:solidFill>
+                  <a:srgbClr val="2C3E50"/>
+                </a:solidFill>
+                <a:latin typeface="Arial" pitchFamily="34" charset="0"/>
+                <a:ea typeface="Arial" pitchFamily="34" charset="-122"/>
+                <a:cs typeface="Arial" pitchFamily="34" charset="-120"/>
+              </a:rPr>
+              <a:t>Every acceptance criterion → a test</a:t>
+            </a:r>
+            <a:endParaRPr lang="en-US" sz="1500" dirty="0"/>
+          </a:p>
+          <a:p>
+            <a:pPr algn="l" marL="152400" indent="-152400">
+              <a:lnSpc>
+                <a:spcPts val="3000"/>
+              </a:lnSpc>
+              <a:buSzPct val="100000"/>
+              <a:buChar char="•"/>
+            </a:pPr>
+            <a:r>
+              <a:rPr lang="en-US" sz="1500" dirty="0">
+                <a:solidFill>
+                  <a:srgbClr val="2C3E50"/>
+                </a:solidFill>
+                <a:latin typeface="Arial" pitchFamily="34" charset="0"/>
+                <a:ea typeface="Arial" pitchFamily="34" charset="-122"/>
+                <a:cs typeface="Arial" pitchFamily="34" charset="-120"/>
+              </a:rPr>
+              <a:t>Tests written FIRST, implementation second</a:t>
+            </a:r>
+            <a:endParaRPr lang="en-US" sz="1500" dirty="0"/>
+          </a:p>
+          <a:p>
+            <a:pPr algn="l" marL="152400" indent="-152400">
+              <a:lnSpc>
+                <a:spcPts val="3000"/>
+              </a:lnSpc>
+              <a:buSzPct val="100000"/>
+              <a:buChar char="•"/>
+            </a:pPr>
+            <a:r>
+              <a:rPr lang="en-US" sz="1500" dirty="0">
+                <a:solidFill>
+                  <a:srgbClr val="2C3E50"/>
+                </a:solidFill>
+                <a:latin typeface="Arial" pitchFamily="34" charset="0"/>
+                <a:ea typeface="Arial" pitchFamily="34" charset="-122"/>
+                <a:cs typeface="Arial" pitchFamily="34" charset="-120"/>
+              </a:rPr>
+              <a:t>85% coverage minimum</a:t>
+            </a:r>
+            <a:endParaRPr lang="en-US" sz="1500" dirty="0"/>
+          </a:p>
+          <a:p>
+            <a:pPr algn="l" marL="152400" indent="-152400">
+              <a:lnSpc>
+                <a:spcPts val="3000"/>
+              </a:lnSpc>
+              <a:buSzPct val="100000"/>
+              <a:buChar char="•"/>
+            </a:pPr>
+            <a:r>
+              <a:rPr lang="en-US" sz="1500" dirty="0">
+                <a:solidFill>
+                  <a:srgbClr val="2C3E50"/>
+                </a:solidFill>
+                <a:latin typeface="Arial" pitchFamily="34" charset="0"/>
+                <a:ea typeface="Arial" pitchFamily="34" charset="-122"/>
+                <a:cs typeface="Arial" pitchFamily="34" charset="-120"/>
+              </a:rPr>
+              <a:t>Forces clarity of requirements</a:t>
+            </a:r>
+            <a:endParaRPr lang="en-US" sz="1500" dirty="0"/>
+          </a:p>
+          <a:p>
+            <a:pPr algn="l" marL="152400" indent="-152400">
+              <a:lnSpc>
+                <a:spcPts val="3000"/>
+              </a:lnSpc>
+              <a:buSzPct val="100000"/>
+              <a:buChar char="•"/>
+            </a:pPr>
+            <a:r>
+              <a:rPr lang="en-US" sz="1500" dirty="0">
+                <a:solidFill>
+                  <a:srgbClr val="2C3E50"/>
+                </a:solidFill>
+                <a:latin typeface="Arial" pitchFamily="34" charset="0"/>
+                <a:ea typeface="Arial" pitchFamily="34" charset="-122"/>
+                <a:cs typeface="Arial" pitchFamily="34" charset="-120"/>
+              </a:rPr>
+              <a:t>Catches regressions automatically</a:t>
+            </a:r>
+            <a:endParaRPr lang="en-US" sz="1500" dirty="0"/>
           </a:p>
         </p:txBody>
       </p:sp>
@@ -5955,8 +6773,8 @@
         </p:nvSpPr>
         <p:spPr>
           <a:xfrm>
-            <a:off x="507950" y="381000"/>
-            <a:ext cx="8290661" cy="352425"/>
+            <a:off x="507950" y="507950"/>
+            <a:ext cx="8290661" cy="371475"/>
           </a:xfrm>
           <a:prstGeom prst="rect">
             <a:avLst/>
@@ -5970,15 +6788,15 @@
           <a:p>
             <a:pPr algn="l" indent="0" marL="0">
               <a:spcBef>
-                <a:spcPts val="3000"/>
+                <a:spcPts val="4000"/>
               </a:spcBef>
               <a:spcAft>
-                <a:spcPts val="1600"/>
+                <a:spcPts val="2000"/>
               </a:spcAft>
               <a:buNone/>
             </a:pPr>
             <a:r>
-              <a:rPr lang="en-US" sz="2400" b="1" dirty="0">
+              <a:rPr lang="en-US" sz="2600" b="1" dirty="0">
                 <a:solidFill>
                   <a:srgbClr val="1C2833"/>
                 </a:solidFill>
@@ -5986,9 +6804,9 @@
                 <a:ea typeface="Arial" pitchFamily="34" charset="-122"/>
                 <a:cs typeface="Arial" pitchFamily="34" charset="-120"/>
               </a:rPr>
-              <a:t>Deming Cycle for AI Tooling</a:t>
-            </a:r>
-            <a:endParaRPr lang="en-US" sz="2400" dirty="0"/>
+              <a:t>Scope Discipline &amp; Escalation</a:t>
+            </a:r>
+            <a:endParaRPr lang="en-US" sz="2600" dirty="0"/>
           </a:p>
         </p:txBody>
       </p:sp>
@@ -6000,311 +6818,28 @@
         </p:nvSpPr>
         <p:spPr>
           <a:xfrm>
-            <a:off x="2336750" y="936575"/>
-            <a:ext cx="2158901" cy="888950"/>
-          </a:xfrm>
-          <a:prstGeom prst="roundRect">
-            <a:avLst>
-              <a:gd name="adj" fmla="val 8572"/>
-            </a:avLst>
-          </a:prstGeom>
-          <a:solidFill>
-            <a:srgbClr val="277884"/>
-          </a:solidFill>
-          <a:ln/>
-        </p:spPr>
-        <p:txBody>
-          <a:bodyPr wrap="square" rtlCol="0" anchor="ctr"/>
-          <a:lstStyle/>
-          <a:p>
-            <a:pPr indent="0" marL="0">
-              <a:buNone/>
-            </a:pPr>
-            <a:endParaRPr lang="en-US" dirty="0"/>
-          </a:p>
-        </p:txBody>
-      </p:sp>
-      <p:sp>
-        <p:nvSpPr>
-          <p:cNvPr id="4" name="Text 2"/>
-          <p:cNvSpPr/>
-          <p:nvPr/>
-        </p:nvSpPr>
-        <p:spPr>
-          <a:xfrm>
-            <a:off x="3174802" y="1247626"/>
-            <a:ext cx="492454" cy="266700"/>
-          </a:xfrm>
-          <a:prstGeom prst="rect">
-            <a:avLst/>
-          </a:prstGeom>
-          <a:noFill/>
-          <a:ln/>
-        </p:spPr>
-        <p:txBody>
-          <a:bodyPr wrap="square" lIns="0" tIns="0" rIns="0" bIns="0" rtlCol="0" anchor="t"/>
-          <a:lstStyle/>
-          <a:p>
-            <a:pPr algn="l" indent="0" marL="0">
-              <a:buNone/>
-            </a:pPr>
-            <a:r>
-              <a:rPr lang="en-US" sz="1800" b="1" dirty="0">
-                <a:solidFill>
-                  <a:srgbClr val="FFFFFF"/>
-                </a:solidFill>
-                <a:latin typeface="Arial" pitchFamily="34" charset="0"/>
-                <a:ea typeface="Arial" pitchFamily="34" charset="-122"/>
-                <a:cs typeface="Arial" pitchFamily="34" charset="-120"/>
-              </a:rPr>
-              <a:t>Plan</a:t>
-            </a:r>
-            <a:endParaRPr lang="en-US" sz="1800" dirty="0"/>
-          </a:p>
-        </p:txBody>
-      </p:sp>
-      <p:sp>
-        <p:nvSpPr>
-          <p:cNvPr id="5" name="Text 3"/>
-          <p:cNvSpPr/>
-          <p:nvPr/>
-        </p:nvSpPr>
-        <p:spPr>
-          <a:xfrm>
-            <a:off x="4648051" y="936575"/>
-            <a:ext cx="2158901" cy="888950"/>
-          </a:xfrm>
-          <a:prstGeom prst="roundRect">
-            <a:avLst>
-              <a:gd name="adj" fmla="val 8572"/>
-            </a:avLst>
-          </a:prstGeom>
-          <a:solidFill>
-            <a:srgbClr val="277884"/>
-          </a:solidFill>
-          <a:ln/>
-        </p:spPr>
-        <p:txBody>
-          <a:bodyPr wrap="square" rtlCol="0" anchor="ctr"/>
-          <a:lstStyle/>
-          <a:p>
-            <a:pPr indent="0" marL="0">
-              <a:buNone/>
-            </a:pPr>
-            <a:endParaRPr lang="en-US" dirty="0"/>
-          </a:p>
-        </p:txBody>
-      </p:sp>
-      <p:sp>
-        <p:nvSpPr>
-          <p:cNvPr id="6" name="Text 4"/>
-          <p:cNvSpPr/>
-          <p:nvPr/>
-        </p:nvSpPr>
-        <p:spPr>
-          <a:xfrm>
-            <a:off x="5575102" y="1247626"/>
-            <a:ext cx="310896" cy="266700"/>
-          </a:xfrm>
-          <a:prstGeom prst="rect">
-            <a:avLst/>
-          </a:prstGeom>
-          <a:noFill/>
-          <a:ln/>
-        </p:spPr>
-        <p:txBody>
-          <a:bodyPr wrap="square" lIns="0" tIns="0" rIns="0" bIns="0" rtlCol="0" anchor="t"/>
-          <a:lstStyle/>
-          <a:p>
-            <a:pPr algn="l" indent="0" marL="0">
-              <a:buNone/>
-            </a:pPr>
-            <a:r>
-              <a:rPr lang="en-US" sz="1800" b="1" dirty="0">
-                <a:solidFill>
-                  <a:srgbClr val="FFFFFF"/>
-                </a:solidFill>
-                <a:latin typeface="Arial" pitchFamily="34" charset="0"/>
-                <a:ea typeface="Arial" pitchFamily="34" charset="-122"/>
-                <a:cs typeface="Arial" pitchFamily="34" charset="-120"/>
-              </a:rPr>
-              <a:t>Do</a:t>
-            </a:r>
-            <a:endParaRPr lang="en-US" sz="1800" dirty="0"/>
-          </a:p>
-        </p:txBody>
-      </p:sp>
-      <p:sp>
-        <p:nvSpPr>
-          <p:cNvPr id="7" name="Text 5"/>
-          <p:cNvSpPr/>
-          <p:nvPr/>
-        </p:nvSpPr>
-        <p:spPr>
-          <a:xfrm>
-            <a:off x="2336750" y="1977926"/>
-            <a:ext cx="2158901" cy="888950"/>
-          </a:xfrm>
-          <a:prstGeom prst="roundRect">
-            <a:avLst>
-              <a:gd name="adj" fmla="val 8572"/>
-            </a:avLst>
-          </a:prstGeom>
-          <a:solidFill>
-            <a:srgbClr val="277884"/>
-          </a:solidFill>
-          <a:ln/>
-        </p:spPr>
-        <p:txBody>
-          <a:bodyPr wrap="square" rtlCol="0" anchor="ctr"/>
-          <a:lstStyle/>
-          <a:p>
-            <a:pPr indent="0" marL="0">
-              <a:buNone/>
-            </a:pPr>
-            <a:endParaRPr lang="en-US" dirty="0"/>
-          </a:p>
-        </p:txBody>
-      </p:sp>
-      <p:sp>
-        <p:nvSpPr>
-          <p:cNvPr id="8" name="Text 6"/>
-          <p:cNvSpPr/>
-          <p:nvPr/>
-        </p:nvSpPr>
-        <p:spPr>
-          <a:xfrm>
-            <a:off x="3073003" y="2288977"/>
-            <a:ext cx="699971" cy="266700"/>
-          </a:xfrm>
-          <a:prstGeom prst="rect">
-            <a:avLst/>
-          </a:prstGeom>
-          <a:noFill/>
-          <a:ln/>
-        </p:spPr>
-        <p:txBody>
-          <a:bodyPr wrap="square" lIns="0" tIns="0" rIns="0" bIns="0" rtlCol="0" anchor="t"/>
-          <a:lstStyle/>
-          <a:p>
-            <a:pPr algn="l" indent="0" marL="0">
-              <a:buNone/>
-            </a:pPr>
-            <a:r>
-              <a:rPr lang="en-US" sz="1800" b="1" dirty="0">
-                <a:solidFill>
-                  <a:srgbClr val="FFFFFF"/>
-                </a:solidFill>
-                <a:latin typeface="Arial" pitchFamily="34" charset="0"/>
-                <a:ea typeface="Arial" pitchFamily="34" charset="-122"/>
-                <a:cs typeface="Arial" pitchFamily="34" charset="-120"/>
-              </a:rPr>
-              <a:t>Check</a:t>
-            </a:r>
-            <a:endParaRPr lang="en-US" sz="1800" dirty="0"/>
-          </a:p>
-        </p:txBody>
-      </p:sp>
-      <p:sp>
-        <p:nvSpPr>
-          <p:cNvPr id="9" name="Text 7"/>
-          <p:cNvSpPr/>
-          <p:nvPr/>
-        </p:nvSpPr>
-        <p:spPr>
-          <a:xfrm>
-            <a:off x="4648051" y="1977926"/>
-            <a:ext cx="2158901" cy="888950"/>
-          </a:xfrm>
-          <a:prstGeom prst="roundRect">
-            <a:avLst>
-              <a:gd name="adj" fmla="val 8572"/>
-            </a:avLst>
-          </a:prstGeom>
-          <a:solidFill>
-            <a:srgbClr val="277884"/>
-          </a:solidFill>
-          <a:ln/>
-        </p:spPr>
-        <p:txBody>
-          <a:bodyPr wrap="square" rtlCol="0" anchor="ctr"/>
-          <a:lstStyle/>
-          <a:p>
-            <a:pPr indent="0" marL="0">
-              <a:buNone/>
-            </a:pPr>
-            <a:endParaRPr lang="en-US" dirty="0"/>
-          </a:p>
-        </p:txBody>
-      </p:sp>
-      <p:sp>
-        <p:nvSpPr>
-          <p:cNvPr id="10" name="Text 8"/>
-          <p:cNvSpPr/>
-          <p:nvPr/>
-        </p:nvSpPr>
-        <p:spPr>
-          <a:xfrm>
-            <a:off x="5543252" y="2288977"/>
-            <a:ext cx="375717" cy="266700"/>
-          </a:xfrm>
-          <a:prstGeom prst="rect">
-            <a:avLst/>
-          </a:prstGeom>
-          <a:noFill/>
-          <a:ln/>
-        </p:spPr>
-        <p:txBody>
-          <a:bodyPr wrap="square" lIns="0" tIns="0" rIns="0" bIns="0" rtlCol="0" anchor="t"/>
-          <a:lstStyle/>
-          <a:p>
-            <a:pPr algn="l" indent="0" marL="0">
-              <a:buNone/>
-            </a:pPr>
-            <a:r>
-              <a:rPr lang="en-US" sz="1800" b="1" dirty="0">
-                <a:solidFill>
-                  <a:srgbClr val="FFFFFF"/>
-                </a:solidFill>
-                <a:latin typeface="Arial" pitchFamily="34" charset="0"/>
-                <a:ea typeface="Arial" pitchFamily="34" charset="-122"/>
-                <a:cs typeface="Arial" pitchFamily="34" charset="-120"/>
-              </a:rPr>
-              <a:t>Act</a:t>
-            </a:r>
-            <a:endParaRPr lang="en-US" sz="1800" dirty="0"/>
-          </a:p>
-        </p:txBody>
-      </p:sp>
-      <p:sp>
-        <p:nvSpPr>
-          <p:cNvPr id="11" name="Text 9"/>
-          <p:cNvSpPr/>
-          <p:nvPr/>
-        </p:nvSpPr>
-        <p:spPr>
-          <a:xfrm>
-            <a:off x="426669" y="3120777"/>
-            <a:ext cx="8290661" cy="200025"/>
-          </a:xfrm>
-          <a:prstGeom prst="rect">
-            <a:avLst/>
-          </a:prstGeom>
-          <a:noFill/>
-          <a:ln/>
-        </p:spPr>
-        <p:txBody>
-          <a:bodyPr wrap="square" lIns="0" tIns="0" rIns="0" bIns="0" rtlCol="0" anchor="t"/>
-          <a:lstStyle/>
-          <a:p>
-            <a:pPr algn="ctr" indent="0" marL="0">
-              <a:spcAft>
-                <a:spcPts val="400"/>
-              </a:spcAft>
-              <a:buNone/>
-            </a:pPr>
-            <a:r>
-              <a:rPr lang="en-US" sz="1300" dirty="0">
+            <a:off x="507950" y="1133326"/>
+            <a:ext cx="8128099" cy="1600200"/>
+          </a:xfrm>
+          <a:prstGeom prst="rect">
+            <a:avLst/>
+          </a:prstGeom>
+          <a:noFill/>
+          <a:ln/>
+        </p:spPr>
+        <p:txBody>
+          <a:bodyPr wrap="square" lIns="152400" tIns="0" rIns="0" bIns="0" rtlCol="0" anchor="t"/>
+          <a:lstStyle/>
+          <a:p>
+            <a:pPr algn="l" marL="152400" indent="-152400">
+              <a:lnSpc>
+                <a:spcPts val="3150"/>
+              </a:lnSpc>
+              <a:buSzPct val="100000"/>
+              <a:buChar char="•"/>
+            </a:pPr>
+            <a:r>
+              <a:rPr lang="en-US" sz="1500" dirty="0">
                 <a:solidFill>
                   <a:srgbClr val="2C3E50"/>
                 </a:solidFill>
@@ -6312,41 +6847,20 @@
                 <a:ea typeface="Arial" pitchFamily="34" charset="-122"/>
                 <a:cs typeface="Arial" pitchFamily="34" charset="-120"/>
               </a:rPr>
-              <a:t>What works today may not work next month</a:t>
-            </a:r>
-            <a:endParaRPr lang="en-US" sz="1300" dirty="0"/>
-          </a:p>
-        </p:txBody>
-      </p:sp>
-      <p:sp>
-        <p:nvSpPr>
-          <p:cNvPr id="12" name="Text 10"/>
-          <p:cNvSpPr/>
-          <p:nvPr/>
-        </p:nvSpPr>
-        <p:spPr>
-          <a:xfrm>
-            <a:off x="426669" y="3371552"/>
-            <a:ext cx="8290661" cy="200025"/>
-          </a:xfrm>
-          <a:prstGeom prst="rect">
-            <a:avLst/>
-          </a:prstGeom>
-          <a:noFill/>
-          <a:ln/>
-        </p:spPr>
-        <p:txBody>
-          <a:bodyPr wrap="square" lIns="0" tIns="0" rIns="0" bIns="0" rtlCol="0" anchor="t"/>
-          <a:lstStyle/>
-          <a:p>
-            <a:pPr algn="ctr" indent="0" marL="0">
-              <a:spcAft>
-                <a:spcPts val="400"/>
-              </a:spcAft>
-              <a:buNone/>
-            </a:pPr>
-            <a:r>
-              <a:rPr lang="en-US" sz="1300" dirty="0">
+              <a:t>Agents know when to stop and ask</a:t>
+            </a:r>
+            <a:endParaRPr lang="en-US" sz="1500" dirty="0"/>
+          </a:p>
+          <a:p>
+            <a:pPr algn="l" marL="152400" indent="-152400">
+              <a:lnSpc>
+                <a:spcPts val="3150"/>
+              </a:lnSpc>
+              <a:buSzPct val="100000"/>
+              <a:buChar char="•"/>
+            </a:pPr>
+            <a:r>
+              <a:rPr lang="en-US" sz="1500" dirty="0">
                 <a:solidFill>
                   <a:srgbClr val="2C3E50"/>
                 </a:solidFill>
@@ -6354,9 +6868,51 @@
                 <a:ea typeface="Arial" pitchFamily="34" charset="-122"/>
                 <a:cs typeface="Arial" pitchFamily="34" charset="-120"/>
               </a:rPr>
-              <a:t>What failed before may work now (models improve!)</a:t>
-            </a:r>
-            <a:endParaRPr lang="en-US" sz="1300" dirty="0"/>
+              <a:t>Never guess — use AskUserQuestion</a:t>
+            </a:r>
+            <a:endParaRPr lang="en-US" sz="1500" dirty="0"/>
+          </a:p>
+          <a:p>
+            <a:pPr algn="l" marL="152400" indent="-152400">
+              <a:lnSpc>
+                <a:spcPts val="3150"/>
+              </a:lnSpc>
+              <a:buSzPct val="100000"/>
+              <a:buChar char="•"/>
+            </a:pPr>
+            <a:r>
+              <a:rPr lang="en-US" sz="1500" dirty="0">
+                <a:solidFill>
+                  <a:srgbClr val="2C3E50"/>
+                </a:solidFill>
+                <a:latin typeface="Arial" pitchFamily="34" charset="0"/>
+                <a:ea typeface="Arial" pitchFamily="34" charset="-122"/>
+                <a:cs typeface="Arial" pitchFamily="34" charset="-120"/>
+              </a:rPr>
+              <a:t>Prevents the #1 time waster: agents going off-script</a:t>
+            </a:r>
+            <a:endParaRPr lang="en-US" sz="1500" dirty="0"/>
+          </a:p>
+          <a:p>
+            <a:pPr algn="l" marL="152400" indent="-152400">
+              <a:lnSpc>
+                <a:spcPts val="3150"/>
+              </a:lnSpc>
+              <a:buSzPct val="100000"/>
+              <a:buChar char="•"/>
+            </a:pPr>
+            <a:r>
+              <a:rPr lang="en-US" sz="1500" dirty="0">
+                <a:solidFill>
+                  <a:srgbClr val="2C3E50"/>
+                </a:solidFill>
+                <a:latin typeface="Arial" pitchFamily="34" charset="0"/>
+                <a:ea typeface="Arial" pitchFamily="34" charset="-122"/>
+                <a:cs typeface="Arial" pitchFamily="34" charset="-120"/>
+              </a:rPr>
+              <a:t>Non-negotiables list as guardrails</a:t>
+            </a:r>
+            <a:endParaRPr lang="en-US" sz="1500" dirty="0"/>
           </a:p>
         </p:txBody>
       </p:sp>
@@ -6400,8 +6956,8 @@
         </p:nvSpPr>
         <p:spPr>
           <a:xfrm>
-            <a:off x="507950" y="381000"/>
-            <a:ext cx="8290661" cy="352425"/>
+            <a:off x="507950" y="406301"/>
+            <a:ext cx="8290661" cy="371475"/>
           </a:xfrm>
           <a:prstGeom prst="rect">
             <a:avLst/>
@@ -6415,15 +6971,15 @@
           <a:p>
             <a:pPr algn="l" indent="0" marL="0">
               <a:spcBef>
-                <a:spcPts val="3000"/>
+                <a:spcPts val="3200"/>
               </a:spcBef>
               <a:spcAft>
-                <a:spcPts val="1600"/>
+                <a:spcPts val="400"/>
               </a:spcAft>
               <a:buNone/>
             </a:pPr>
             <a:r>
-              <a:rPr lang="en-US" sz="2400" b="1" dirty="0">
+              <a:rPr lang="en-US" sz="2600" b="1" dirty="0">
                 <a:solidFill>
                   <a:srgbClr val="1C2833"/>
                 </a:solidFill>
@@ -6431,9 +6987,9 @@
                 <a:ea typeface="Arial" pitchFamily="34" charset="-122"/>
                 <a:cs typeface="Arial" pitchFamily="34" charset="-120"/>
               </a:rPr>
-              <a:t>Evolution: Agent Consolidation</a:t>
-            </a:r>
-            <a:endParaRPr lang="en-US" sz="2400" dirty="0"/>
+              <a:t>Git Worktrees: Parallel Work</a:t>
+            </a:r>
+            <a:endParaRPr lang="en-US" sz="2600" dirty="0"/>
           </a:p>
         </p:txBody>
       </p:sp>
@@ -6445,13 +7001,95 @@
         </p:nvSpPr>
         <p:spPr>
           <a:xfrm>
-            <a:off x="507950" y="936575"/>
-            <a:ext cx="3937099" cy="1211163"/>
-          </a:xfrm>
-          <a:prstGeom prst="roundRect">
-            <a:avLst>
-              <a:gd name="adj" fmla="val 6291"/>
-            </a:avLst>
+            <a:off x="507950" y="828526"/>
+            <a:ext cx="8290661" cy="238125"/>
+          </a:xfrm>
+          <a:prstGeom prst="rect">
+            <a:avLst/>
+          </a:prstGeom>
+          <a:noFill/>
+          <a:ln/>
+        </p:spPr>
+        <p:txBody>
+          <a:bodyPr wrap="square" lIns="0" tIns="0" rIns="0" bIns="0" rtlCol="0" anchor="t"/>
+          <a:lstStyle/>
+          <a:p>
+            <a:pPr algn="l" indent="0" marL="0">
+              <a:spcAft>
+                <a:spcPts val="1200"/>
+              </a:spcAft>
+              <a:buNone/>
+            </a:pPr>
+            <a:r>
+              <a:rPr lang="en-US" sz="1600" dirty="0">
+                <a:solidFill>
+                  <a:srgbClr val="277884"/>
+                </a:solidFill>
+                <a:latin typeface="Arial" pitchFamily="34" charset="0"/>
+                <a:ea typeface="Arial" pitchFamily="34" charset="-122"/>
+                <a:cs typeface="Arial" pitchFamily="34" charset="-120"/>
+              </a:rPr>
+              <a:t>Multiple branches, simultaneously</a:t>
+            </a:r>
+            <a:endParaRPr lang="en-US" sz="1600" dirty="0"/>
+          </a:p>
+        </p:txBody>
+      </p:sp>
+      <p:sp>
+        <p:nvSpPr>
+          <p:cNvPr id="4" name="Text 2"/>
+          <p:cNvSpPr/>
+          <p:nvPr/>
+        </p:nvSpPr>
+        <p:spPr>
+          <a:xfrm>
+            <a:off x="507950" y="1219051"/>
+            <a:ext cx="8290661" cy="528042"/>
+          </a:xfrm>
+          <a:prstGeom prst="rect">
+            <a:avLst/>
+          </a:prstGeom>
+          <a:noFill/>
+          <a:ln/>
+        </p:spPr>
+        <p:txBody>
+          <a:bodyPr wrap="square" lIns="0" tIns="0" rIns="0" bIns="0" rtlCol="0" anchor="t"/>
+          <a:lstStyle/>
+          <a:p>
+            <a:pPr algn="l" indent="0" marL="0">
+              <a:lnSpc>
+                <a:spcPts val="2080"/>
+              </a:lnSpc>
+              <a:buNone/>
+            </a:pPr>
+            <a:r>
+              <a:rPr lang="en-US" sz="1300" dirty="0">
+                <a:solidFill>
+                  <a:srgbClr val="2C3E50"/>
+                </a:solidFill>
+                <a:latin typeface="Arial" pitchFamily="34" charset="0"/>
+                <a:ea typeface="Arial" pitchFamily="34" charset="-122"/>
+                <a:cs typeface="Arial" pitchFamily="34" charset="-120"/>
+              </a:rPr>
+              <a:t>Git worktrees let you work on multiple branches at the same time without stashing or switching. Each worktree is an independent checkout.</a:t>
+            </a:r>
+            <a:endParaRPr lang="en-US" sz="1300" dirty="0"/>
+          </a:p>
+        </p:txBody>
+      </p:sp>
+      <p:sp>
+        <p:nvSpPr>
+          <p:cNvPr id="5" name="Text 3"/>
+          <p:cNvSpPr/>
+          <p:nvPr/>
+        </p:nvSpPr>
+        <p:spPr>
+          <a:xfrm>
+            <a:off x="507950" y="1924794"/>
+            <a:ext cx="8128099" cy="403027"/>
+          </a:xfrm>
+          <a:prstGeom prst="rect">
+            <a:avLst/>
           </a:prstGeom>
           <a:solidFill>
             <a:srgbClr val="FFFFFF"/>
@@ -6471,20 +7109,20 @@
       </p:sp>
       <p:sp>
         <p:nvSpPr>
-          <p:cNvPr id="4" name="Shape 2"/>
-          <p:cNvSpPr/>
-          <p:nvPr/>
-        </p:nvSpPr>
-        <p:spPr>
-          <a:xfrm>
-            <a:off x="507950" y="960388"/>
-            <a:ext cx="3937099" cy="0"/>
+          <p:cNvPr id="6" name="Shape 4"/>
+          <p:cNvSpPr/>
+          <p:nvPr/>
+        </p:nvSpPr>
+        <p:spPr>
+          <a:xfrm>
+            <a:off x="536525" y="1924794"/>
+            <a:ext cx="0" cy="403027"/>
           </a:xfrm>
           <a:prstGeom prst="line">
             <a:avLst/>
           </a:prstGeom>
           <a:noFill/>
-          <a:ln w="47625">
+          <a:ln w="57150">
             <a:solidFill>
               <a:srgbClr val="277884"/>
             </a:solidFill>
@@ -6494,14 +7132,14 @@
       </p:sp>
       <p:sp>
         <p:nvSpPr>
-          <p:cNvPr id="5" name="Text 3"/>
-          <p:cNvSpPr/>
-          <p:nvPr/>
-        </p:nvSpPr>
-        <p:spPr>
-          <a:xfrm>
-            <a:off x="685651" y="1161901"/>
-            <a:ext cx="3653332" cy="219075"/>
+          <p:cNvPr id="7" name="Text 5"/>
+          <p:cNvSpPr/>
+          <p:nvPr/>
+        </p:nvSpPr>
+        <p:spPr>
+          <a:xfrm>
+            <a:off x="742801" y="2026295"/>
+            <a:ext cx="7869859" cy="200025"/>
           </a:xfrm>
           <a:prstGeom prst="rect">
             <a:avLst/>
@@ -6514,13 +7152,10 @@
           <a:lstStyle/>
           <a:p>
             <a:pPr algn="l" indent="0" marL="0">
-              <a:spcAft>
-                <a:spcPts val="800"/>
-              </a:spcAft>
-              <a:buNone/>
-            </a:pPr>
-            <a:r>
-              <a:rPr lang="en-US" sz="1500" b="1" dirty="0">
+              <a:buNone/>
+            </a:pPr>
+            <a:r>
+              <a:rPr lang="en-US" sz="1300" b="1" dirty="0">
                 <a:solidFill>
                   <a:srgbClr val="277884"/>
                 </a:solidFill>
@@ -6528,41 +7163,13 @@
                 <a:ea typeface="Arial" pitchFamily="34" charset="-122"/>
                 <a:cs typeface="Arial" pitchFamily="34" charset="-120"/>
               </a:rPr>
-              <a:t>Before</a:t>
-            </a:r>
-            <a:endParaRPr lang="en-US" sz="1500" dirty="0"/>
-          </a:p>
-        </p:txBody>
-      </p:sp>
-      <p:sp>
-        <p:nvSpPr>
-          <p:cNvPr id="6" name="Text 4"/>
-          <p:cNvSpPr/>
-          <p:nvPr/>
-        </p:nvSpPr>
-        <p:spPr>
-          <a:xfrm>
-            <a:off x="685651" y="1482477"/>
-            <a:ext cx="3653332" cy="487561"/>
-          </a:xfrm>
-          <a:prstGeom prst="rect">
-            <a:avLst/>
-          </a:prstGeom>
-          <a:noFill/>
-          <a:ln/>
-        </p:spPr>
-        <p:txBody>
-          <a:bodyPr wrap="square" lIns="0" tIns="0" rIns="0" bIns="0" rtlCol="0" anchor="t"/>
-          <a:lstStyle/>
-          <a:p>
+              <a:t>main worktree</a:t>
+            </a:r>
             <a:pPr algn="l" indent="0" marL="0">
-              <a:lnSpc>
-                <a:spcPts val="1920"/>
-              </a:lnSpc>
-              <a:buNone/>
-            </a:pPr>
-            <a:r>
-              <a:rPr lang="en-US" sz="1200" dirty="0">
+              <a:buNone/>
+            </a:pPr>
+            <a:r>
+              <a:rPr lang="en-US" sz="1300" dirty="0">
                 <a:solidFill>
                   <a:srgbClr val="2C3E50"/>
                 </a:solidFill>
@@ -6570,27 +7177,25 @@
                 <a:ea typeface="Arial" pitchFamily="34" charset="-122"/>
                 <a:cs typeface="Arial" pitchFamily="34" charset="-120"/>
               </a:rPr>
-              <a:t>3 agents per technology: Architect + Developer + Reviewer</a:t>
-            </a:r>
-            <a:endParaRPr lang="en-US" sz="1200" dirty="0"/>
-          </a:p>
-        </p:txBody>
-      </p:sp>
-      <p:sp>
-        <p:nvSpPr>
-          <p:cNvPr id="7" name="Text 5"/>
-          <p:cNvSpPr/>
-          <p:nvPr/>
-        </p:nvSpPr>
-        <p:spPr>
-          <a:xfrm>
-            <a:off x="4698950" y="936575"/>
-            <a:ext cx="3937099" cy="1211163"/>
-          </a:xfrm>
-          <a:prstGeom prst="roundRect">
-            <a:avLst>
-              <a:gd name="adj" fmla="val 6291"/>
-            </a:avLst>
+              <a:t> → feature/1-metric-A (agent working)</a:t>
+            </a:r>
+            <a:endParaRPr lang="en-US" sz="1300" dirty="0"/>
+          </a:p>
+        </p:txBody>
+      </p:sp>
+      <p:sp>
+        <p:nvSpPr>
+          <p:cNvPr id="8" name="Text 6"/>
+          <p:cNvSpPr/>
+          <p:nvPr/>
+        </p:nvSpPr>
+        <p:spPr>
+          <a:xfrm>
+            <a:off x="507950" y="2429321"/>
+            <a:ext cx="8128099" cy="403027"/>
+          </a:xfrm>
+          <a:prstGeom prst="rect">
+            <a:avLst/>
           </a:prstGeom>
           <a:solidFill>
             <a:srgbClr val="FFFFFF"/>
@@ -6610,20 +7215,20 @@
       </p:sp>
       <p:sp>
         <p:nvSpPr>
-          <p:cNvPr id="8" name="Shape 6"/>
-          <p:cNvSpPr/>
-          <p:nvPr/>
-        </p:nvSpPr>
-        <p:spPr>
-          <a:xfrm>
-            <a:off x="4698950" y="960388"/>
-            <a:ext cx="3937099" cy="0"/>
+          <p:cNvPr id="9" name="Shape 7"/>
+          <p:cNvSpPr/>
+          <p:nvPr/>
+        </p:nvSpPr>
+        <p:spPr>
+          <a:xfrm>
+            <a:off x="536525" y="2429321"/>
+            <a:ext cx="0" cy="403027"/>
           </a:xfrm>
           <a:prstGeom prst="line">
             <a:avLst/>
           </a:prstGeom>
           <a:noFill/>
-          <a:ln w="47625">
+          <a:ln w="57150">
             <a:solidFill>
               <a:srgbClr val="277884"/>
             </a:solidFill>
@@ -6633,14 +7238,14 @@
       </p:sp>
       <p:sp>
         <p:nvSpPr>
-          <p:cNvPr id="9" name="Text 7"/>
-          <p:cNvSpPr/>
-          <p:nvPr/>
-        </p:nvSpPr>
-        <p:spPr>
-          <a:xfrm>
-            <a:off x="4876651" y="1161901"/>
-            <a:ext cx="3653332" cy="219075"/>
+          <p:cNvPr id="10" name="Text 8"/>
+          <p:cNvSpPr/>
+          <p:nvPr/>
+        </p:nvSpPr>
+        <p:spPr>
+          <a:xfrm>
+            <a:off x="742801" y="2530822"/>
+            <a:ext cx="7869859" cy="200025"/>
           </a:xfrm>
           <a:prstGeom prst="rect">
             <a:avLst/>
@@ -6653,13 +7258,10 @@
           <a:lstStyle/>
           <a:p>
             <a:pPr algn="l" indent="0" marL="0">
-              <a:spcAft>
-                <a:spcPts val="800"/>
-              </a:spcAft>
-              <a:buNone/>
-            </a:pPr>
-            <a:r>
-              <a:rPr lang="en-US" sz="1500" b="1" dirty="0">
+              <a:buNone/>
+            </a:pPr>
+            <a:r>
+              <a:rPr lang="en-US" sz="1300" b="1" dirty="0">
                 <a:solidFill>
                   <a:srgbClr val="277884"/>
                 </a:solidFill>
@@ -6667,22 +7269,89 @@
                 <a:ea typeface="Arial" pitchFamily="34" charset="-122"/>
                 <a:cs typeface="Arial" pitchFamily="34" charset="-120"/>
               </a:rPr>
-              <a:t>After</a:t>
-            </a:r>
-            <a:endParaRPr lang="en-US" sz="1500" dirty="0"/>
-          </a:p>
-        </p:txBody>
-      </p:sp>
-      <p:sp>
-        <p:nvSpPr>
-          <p:cNvPr id="10" name="Text 8"/>
-          <p:cNvSpPr/>
-          <p:nvPr/>
-        </p:nvSpPr>
-        <p:spPr>
-          <a:xfrm>
-            <a:off x="4876651" y="1482477"/>
-            <a:ext cx="3653332" cy="243780"/>
+              <a:t>worktree 2</a:t>
+            </a:r>
+            <a:pPr algn="l" indent="0" marL="0">
+              <a:buNone/>
+            </a:pPr>
+            <a:r>
+              <a:rPr lang="en-US" sz="1300" dirty="0">
+                <a:solidFill>
+                  <a:srgbClr val="2C3E50"/>
+                </a:solidFill>
+                <a:latin typeface="Arial" pitchFamily="34" charset="0"/>
+                <a:ea typeface="Arial" pitchFamily="34" charset="-122"/>
+                <a:cs typeface="Arial" pitchFamily="34" charset="-120"/>
+              </a:rPr>
+              <a:t> → feature/2-metric-B (agent working)</a:t>
+            </a:r>
+            <a:endParaRPr lang="en-US" sz="1300" dirty="0"/>
+          </a:p>
+        </p:txBody>
+      </p:sp>
+      <p:sp>
+        <p:nvSpPr>
+          <p:cNvPr id="11" name="Text 9"/>
+          <p:cNvSpPr/>
+          <p:nvPr/>
+        </p:nvSpPr>
+        <p:spPr>
+          <a:xfrm>
+            <a:off x="507950" y="2933849"/>
+            <a:ext cx="8128099" cy="403027"/>
+          </a:xfrm>
+          <a:prstGeom prst="rect">
+            <a:avLst/>
+          </a:prstGeom>
+          <a:solidFill>
+            <a:srgbClr val="FFFFFF"/>
+          </a:solidFill>
+          <a:ln/>
+        </p:spPr>
+        <p:txBody>
+          <a:bodyPr wrap="square" rtlCol="0" anchor="ctr"/>
+          <a:lstStyle/>
+          <a:p>
+            <a:pPr indent="0" marL="0">
+              <a:buNone/>
+            </a:pPr>
+            <a:endParaRPr lang="en-US" dirty="0"/>
+          </a:p>
+        </p:txBody>
+      </p:sp>
+      <p:sp>
+        <p:nvSpPr>
+          <p:cNvPr id="12" name="Shape 10"/>
+          <p:cNvSpPr/>
+          <p:nvPr/>
+        </p:nvSpPr>
+        <p:spPr>
+          <a:xfrm>
+            <a:off x="536525" y="2933849"/>
+            <a:ext cx="0" cy="403027"/>
+          </a:xfrm>
+          <a:prstGeom prst="line">
+            <a:avLst/>
+          </a:prstGeom>
+          <a:noFill/>
+          <a:ln w="57150">
+            <a:solidFill>
+              <a:srgbClr val="277884"/>
+            </a:solidFill>
+            <a:prstDash val="solid"/>
+          </a:ln>
+        </p:spPr>
+      </p:sp>
+      <p:sp>
+        <p:nvSpPr>
+          <p:cNvPr id="13" name="Text 11"/>
+          <p:cNvSpPr/>
+          <p:nvPr/>
+        </p:nvSpPr>
+        <p:spPr>
+          <a:xfrm>
+            <a:off x="742801" y="3035350"/>
+            <a:ext cx="7869859" cy="200025"/>
           </a:xfrm>
           <a:prstGeom prst="rect">
             <a:avLst/>
@@ -6695,13 +7364,24 @@
           <a:lstStyle/>
           <a:p>
             <a:pPr algn="l" indent="0" marL="0">
-              <a:lnSpc>
-                <a:spcPts val="1920"/>
-              </a:lnSpc>
-              <a:buNone/>
-            </a:pPr>
-            <a:r>
-              <a:rPr lang="en-US" sz="1200" dirty="0">
+              <a:buNone/>
+            </a:pPr>
+            <a:r>
+              <a:rPr lang="en-US" sz="1300" b="1" dirty="0">
+                <a:solidFill>
+                  <a:srgbClr val="277884"/>
+                </a:solidFill>
+                <a:latin typeface="Arial" pitchFamily="34" charset="0"/>
+                <a:ea typeface="Arial" pitchFamily="34" charset="-122"/>
+                <a:cs typeface="Arial" pitchFamily="34" charset="-120"/>
+              </a:rPr>
+              <a:t>worktree 3</a:t>
+            </a:r>
+            <a:pPr algn="l" indent="0" marL="0">
+              <a:buNone/>
+            </a:pPr>
+            <a:r>
+              <a:rPr lang="en-US" sz="1300" dirty="0">
                 <a:solidFill>
                   <a:srgbClr val="2C3E50"/>
                 </a:solidFill>
@@ -6709,49 +7389,7 @@
                 <a:ea typeface="Arial" pitchFamily="34" charset="-122"/>
                 <a:cs typeface="Arial" pitchFamily="34" charset="-120"/>
               </a:rPr>
-              <a:t>Combined developer agent (designs + implements)</a:t>
-            </a:r>
-            <a:endParaRPr lang="en-US" sz="1200" dirty="0"/>
-          </a:p>
-        </p:txBody>
-      </p:sp>
-      <p:sp>
-        <p:nvSpPr>
-          <p:cNvPr id="11" name="Text 9"/>
-          <p:cNvSpPr/>
-          <p:nvPr/>
-        </p:nvSpPr>
-        <p:spPr>
-          <a:xfrm>
-            <a:off x="507950" y="2325439"/>
-            <a:ext cx="8290661" cy="200025"/>
-          </a:xfrm>
-          <a:prstGeom prst="rect">
-            <a:avLst/>
-          </a:prstGeom>
-          <a:noFill/>
-          <a:ln/>
-        </p:spPr>
-        <p:txBody>
-          <a:bodyPr wrap="square" lIns="0" tIns="0" rIns="0" bIns="0" rtlCol="0" anchor="t"/>
-          <a:lstStyle/>
-          <a:p>
-            <a:pPr algn="l" indent="0" marL="0">
-              <a:spcAft>
-                <a:spcPts val="1000"/>
-              </a:spcAft>
-              <a:buNone/>
-            </a:pPr>
-            <a:r>
-              <a:rPr lang="en-US" sz="1300" dirty="0">
-                <a:solidFill>
-                  <a:srgbClr val="2C3E50"/>
-                </a:solidFill>
-                <a:latin typeface="Arial" pitchFamily="34" charset="0"/>
-                <a:ea typeface="Arial" pitchFamily="34" charset="-122"/>
-                <a:cs typeface="Arial" pitchFamily="34" charset="-120"/>
-              </a:rPr>
-              <a:t>Problem: Overlap, wasted tokens, context lost in handoffs</a:t>
+              <a:t> → feature/3-cli-update (agent working)</a:t>
             </a:r>
             <a:endParaRPr lang="en-US" sz="1300" dirty="0"/>
           </a:p>
@@ -6759,14 +7397,14 @@
       </p:sp>
       <p:sp>
         <p:nvSpPr>
-          <p:cNvPr id="12" name="Shape 10"/>
-          <p:cNvSpPr/>
-          <p:nvPr/>
-        </p:nvSpPr>
-        <p:spPr>
-          <a:xfrm>
-            <a:off x="546050" y="2652415"/>
-            <a:ext cx="0" cy="453926"/>
+          <p:cNvPr id="14" name="Shape 12"/>
+          <p:cNvSpPr/>
+          <p:nvPr/>
+        </p:nvSpPr>
+        <p:spPr>
+          <a:xfrm>
+            <a:off x="546050" y="3514576"/>
+            <a:ext cx="0" cy="463451"/>
           </a:xfrm>
           <a:prstGeom prst="line">
             <a:avLst/>
@@ -6782,14 +7420,14 @@
       </p:sp>
       <p:sp>
         <p:nvSpPr>
-          <p:cNvPr id="13" name="Text 11"/>
-          <p:cNvSpPr/>
-          <p:nvPr/>
-        </p:nvSpPr>
-        <p:spPr>
-          <a:xfrm>
-            <a:off x="787301" y="2779365"/>
-            <a:ext cx="7798510" cy="200025"/>
+          <p:cNvPr id="15" name="Text 13"/>
+          <p:cNvSpPr/>
+          <p:nvPr/>
+        </p:nvSpPr>
+        <p:spPr>
+          <a:xfrm>
+            <a:off x="787301" y="3641527"/>
+            <a:ext cx="7798510" cy="209550"/>
           </a:xfrm>
           <a:prstGeom prst="rect">
             <a:avLst/>
@@ -6805,7 +7443,7 @@
               <a:buNone/>
             </a:pPr>
             <a:r>
-              <a:rPr lang="en-US" sz="1300" b="1" dirty="0">
+              <a:rPr lang="en-US" sz="1400" b="1" dirty="0">
                 <a:solidFill>
                   <a:srgbClr val="2C3E50"/>
                 </a:solidFill>
@@ -6813,9 +7451,9 @@
                 <a:ea typeface="Arial" pitchFamily="34" charset="-122"/>
                 <a:cs typeface="Arial" pitchFamily="34" charset="-120"/>
               </a:rPr>
-              <a:t>Lesson: Fewer, more capable agents beat many narrow ones</a:t>
-            </a:r>
-            <a:endParaRPr lang="en-US" sz="1300" dirty="0"/>
+              <a:t>Result: 3x throughput — agents work in parallel on independent features</a:t>
+            </a:r>
+            <a:endParaRPr lang="en-US" sz="1400" dirty="0"/>
           </a:p>
         </p:txBody>
       </p:sp>
@@ -6832,9 +7470,16 @@
   <p:cSld name="Slide 19">
     <p:bg>
       <p:bgPr>
-        <a:solidFill>
-          <a:srgbClr val="F4F6F6"/>
-        </a:solidFill>
+        <a:blipFill dpi="0" rotWithShape="1">
+          <a:blip r:embed="rId1">
+            <a:lum/>
+          </a:blip>
+          <a:srcRect/>
+          <a:stretch>
+            <a:fillRect/>
+          </a:stretch>
+        </a:blipFill>
+        <a:effectLst/>
       </p:bgPr>
     </p:bg>
     <p:spTree>
@@ -6859,8 +7504,8 @@
         </p:nvSpPr>
         <p:spPr>
           <a:xfrm>
-            <a:off x="507950" y="381000"/>
-            <a:ext cx="8290661" cy="352425"/>
+            <a:off x="3224582" y="1909911"/>
+            <a:ext cx="2694837" cy="466725"/>
           </a:xfrm>
           <a:prstGeom prst="rect">
             <a:avLst/>
@@ -6872,27 +7517,24 @@
           <a:bodyPr wrap="square" lIns="0" tIns="0" rIns="0" bIns="0" rtlCol="0" anchor="t"/>
           <a:lstStyle/>
           <a:p>
-            <a:pPr algn="l" indent="0" marL="0">
-              <a:spcBef>
-                <a:spcPts val="3000"/>
-              </a:spcBef>
+            <a:pPr algn="ctr" indent="0" marL="0">
               <a:spcAft>
-                <a:spcPts val="1600"/>
+                <a:spcPts val="1400"/>
               </a:spcAft>
               <a:buNone/>
             </a:pPr>
             <a:r>
-              <a:rPr lang="en-US" sz="2400" b="1" dirty="0">
-                <a:solidFill>
-                  <a:srgbClr val="1C2833"/>
-                </a:solidFill>
-                <a:latin typeface="Arial" pitchFamily="34" charset="0"/>
-                <a:ea typeface="Arial" pitchFamily="34" charset="-122"/>
-                <a:cs typeface="Arial" pitchFamily="34" charset="-120"/>
-              </a:rPr>
-              <a:t>Evolution: The Reviewer Problem</a:t>
-            </a:r>
-            <a:endParaRPr lang="en-US" sz="2400" dirty="0"/>
+              <a:rPr lang="en-US" sz="3200" b="1" dirty="0">
+                <a:solidFill>
+                  <a:srgbClr val="FFFFFF"/>
+                </a:solidFill>
+                <a:latin typeface="Arial" pitchFamily="34" charset="0"/>
+                <a:ea typeface="Arial" pitchFamily="34" charset="-122"/>
+                <a:cs typeface="Arial" pitchFamily="34" charset="-120"/>
+              </a:rPr>
+              <a:t>The 10% Rule</a:t>
+            </a:r>
+            <a:endParaRPr lang="en-US" sz="3200" dirty="0"/>
           </a:p>
         </p:txBody>
       </p:sp>
@@ -6904,63 +7546,8 @@
         </p:nvSpPr>
         <p:spPr>
           <a:xfrm>
-            <a:off x="507950" y="936575"/>
-            <a:ext cx="3937099" cy="1211163"/>
-          </a:xfrm>
-          <a:prstGeom prst="roundRect">
-            <a:avLst>
-              <a:gd name="adj" fmla="val 6291"/>
-            </a:avLst>
-          </a:prstGeom>
-          <a:solidFill>
-            <a:srgbClr val="FFFFFF"/>
-          </a:solidFill>
-          <a:ln/>
-        </p:spPr>
-        <p:txBody>
-          <a:bodyPr wrap="square" rtlCol="0" anchor="ctr"/>
-          <a:lstStyle/>
-          <a:p>
-            <a:pPr indent="0" marL="0">
-              <a:buNone/>
-            </a:pPr>
-            <a:endParaRPr lang="en-US" dirty="0"/>
-          </a:p>
-        </p:txBody>
-      </p:sp>
-      <p:sp>
-        <p:nvSpPr>
-          <p:cNvPr id="4" name="Shape 2"/>
-          <p:cNvSpPr/>
-          <p:nvPr/>
-        </p:nvSpPr>
-        <p:spPr>
-          <a:xfrm>
-            <a:off x="507950" y="960388"/>
-            <a:ext cx="3937099" cy="0"/>
-          </a:xfrm>
-          <a:prstGeom prst="line">
-            <a:avLst/>
-          </a:prstGeom>
-          <a:noFill/>
-          <a:ln w="47625">
-            <a:solidFill>
-              <a:srgbClr val="277884"/>
-            </a:solidFill>
-            <a:prstDash val="solid"/>
-          </a:ln>
-        </p:spPr>
-      </p:sp>
-      <p:sp>
-        <p:nvSpPr>
-          <p:cNvPr id="5" name="Text 3"/>
-          <p:cNvSpPr/>
-          <p:nvPr/>
-        </p:nvSpPr>
-        <p:spPr>
-          <a:xfrm>
-            <a:off x="685651" y="1161901"/>
-            <a:ext cx="3653332" cy="219075"/>
+            <a:off x="2155878" y="2554337"/>
+            <a:ext cx="4832095" cy="238125"/>
           </a:xfrm>
           <a:prstGeom prst="rect">
             <a:avLst/>
@@ -6972,37 +7559,37 @@
           <a:bodyPr wrap="square" lIns="0" tIns="0" rIns="0" bIns="0" rtlCol="0" anchor="t"/>
           <a:lstStyle/>
           <a:p>
-            <a:pPr algn="l" indent="0" marL="0">
+            <a:pPr algn="ctr" indent="0" marL="0">
               <a:spcAft>
                 <a:spcPts val="800"/>
               </a:spcAft>
               <a:buNone/>
             </a:pPr>
             <a:r>
-              <a:rPr lang="en-US" sz="1500" b="1" dirty="0">
-                <a:solidFill>
-                  <a:srgbClr val="277884"/>
-                </a:solidFill>
-                <a:latin typeface="Arial" pitchFamily="34" charset="0"/>
-                <a:ea typeface="Arial" pitchFamily="34" charset="-122"/>
-                <a:cs typeface="Arial" pitchFamily="34" charset="-120"/>
-              </a:rPr>
-              <a:t>Before</a:t>
-            </a:r>
-            <a:endParaRPr lang="en-US" sz="1500" dirty="0"/>
-          </a:p>
-        </p:txBody>
-      </p:sp>
-      <p:sp>
-        <p:nvSpPr>
-          <p:cNvPr id="6" name="Text 4"/>
-          <p:cNvSpPr/>
-          <p:nvPr/>
-        </p:nvSpPr>
-        <p:spPr>
-          <a:xfrm>
-            <a:off x="685651" y="1482477"/>
-            <a:ext cx="3653332" cy="243780"/>
+              <a:rPr lang="en-US" sz="1600" dirty="0">
+                <a:solidFill>
+                  <a:srgbClr val="D5D8DC"/>
+                </a:solidFill>
+                <a:latin typeface="Arial" pitchFamily="34" charset="0"/>
+                <a:ea typeface="Arial" pitchFamily="34" charset="-122"/>
+                <a:cs typeface="Arial" pitchFamily="34" charset="-120"/>
+              </a:rPr>
+              <a:t>Invest ~10% of project time improving your AI tooling</a:t>
+            </a:r>
+            <a:endParaRPr lang="en-US" sz="1600" dirty="0"/>
+          </a:p>
+        </p:txBody>
+      </p:sp>
+      <p:sp>
+        <p:nvSpPr>
+          <p:cNvPr id="4" name="Text 2"/>
+          <p:cNvSpPr/>
+          <p:nvPr/>
+        </p:nvSpPr>
+        <p:spPr>
+          <a:xfrm>
+            <a:off x="2594137" y="2893963"/>
+            <a:ext cx="3955727" cy="238125"/>
           </a:xfrm>
           <a:prstGeom prst="rect">
             <a:avLst/>
@@ -7014,270 +7601,24 @@
           <a:bodyPr wrap="square" lIns="0" tIns="0" rIns="0" bIns="0" rtlCol="0" anchor="t"/>
           <a:lstStyle/>
           <a:p>
-            <a:pPr algn="l" indent="0" marL="0">
-              <a:lnSpc>
-                <a:spcPts val="1920"/>
-              </a:lnSpc>
-              <a:buNone/>
-            </a:pPr>
-            <a:r>
-              <a:rPr lang="en-US" sz="1200" dirty="0">
-                <a:solidFill>
-                  <a:srgbClr val="2C3E50"/>
-                </a:solidFill>
-                <a:latin typeface="Arial" pitchFamily="34" charset="0"/>
-                <a:ea typeface="Arial" pitchFamily="34" charset="-122"/>
-                <a:cs typeface="Arial" pitchFamily="34" charset="-120"/>
-              </a:rPr>
-              <a:t>Dedicated haiku reviewer — cheap, fast</a:t>
-            </a:r>
-            <a:endParaRPr lang="en-US" sz="1200" dirty="0"/>
-          </a:p>
-        </p:txBody>
-      </p:sp>
-      <p:sp>
-        <p:nvSpPr>
-          <p:cNvPr id="7" name="Text 5"/>
-          <p:cNvSpPr/>
-          <p:nvPr/>
-        </p:nvSpPr>
-        <p:spPr>
-          <a:xfrm>
-            <a:off x="4698950" y="936575"/>
-            <a:ext cx="3937099" cy="1211163"/>
-          </a:xfrm>
-          <a:prstGeom prst="roundRect">
-            <a:avLst>
-              <a:gd name="adj" fmla="val 6291"/>
-            </a:avLst>
-          </a:prstGeom>
-          <a:solidFill>
-            <a:srgbClr val="FFFFFF"/>
-          </a:solidFill>
-          <a:ln/>
-        </p:spPr>
-        <p:txBody>
-          <a:bodyPr wrap="square" rtlCol="0" anchor="ctr"/>
-          <a:lstStyle/>
-          <a:p>
-            <a:pPr indent="0" marL="0">
-              <a:buNone/>
-            </a:pPr>
-            <a:endParaRPr lang="en-US" dirty="0"/>
-          </a:p>
-        </p:txBody>
-      </p:sp>
-      <p:sp>
-        <p:nvSpPr>
-          <p:cNvPr id="8" name="Shape 6"/>
-          <p:cNvSpPr/>
-          <p:nvPr/>
-        </p:nvSpPr>
-        <p:spPr>
-          <a:xfrm>
-            <a:off x="4698950" y="960388"/>
-            <a:ext cx="3937099" cy="0"/>
-          </a:xfrm>
-          <a:prstGeom prst="line">
-            <a:avLst/>
-          </a:prstGeom>
-          <a:noFill/>
-          <a:ln w="47625">
-            <a:solidFill>
-              <a:srgbClr val="277884"/>
-            </a:solidFill>
-            <a:prstDash val="solid"/>
-          </a:ln>
-        </p:spPr>
-      </p:sp>
-      <p:sp>
-        <p:nvSpPr>
-          <p:cNvPr id="9" name="Text 7"/>
-          <p:cNvSpPr/>
-          <p:nvPr/>
-        </p:nvSpPr>
-        <p:spPr>
-          <a:xfrm>
-            <a:off x="4876651" y="1161901"/>
-            <a:ext cx="3653332" cy="219075"/>
-          </a:xfrm>
-          <a:prstGeom prst="rect">
-            <a:avLst/>
-          </a:prstGeom>
-          <a:noFill/>
-          <a:ln/>
-        </p:spPr>
-        <p:txBody>
-          <a:bodyPr wrap="square" lIns="0" tIns="0" rIns="0" bIns="0" rtlCol="0" anchor="t"/>
-          <a:lstStyle/>
-          <a:p>
-            <a:pPr algn="l" indent="0" marL="0">
+            <a:pPr algn="ctr" indent="0" marL="0">
               <a:spcAft>
                 <a:spcPts val="800"/>
               </a:spcAft>
               <a:buNone/>
             </a:pPr>
             <a:r>
-              <a:rPr lang="en-US" sz="1500" b="1" dirty="0">
-                <a:solidFill>
-                  <a:srgbClr val="277884"/>
-                </a:solidFill>
-                <a:latin typeface="Arial" pitchFamily="34" charset="0"/>
-                <a:ea typeface="Arial" pitchFamily="34" charset="-122"/>
-                <a:cs typeface="Arial" pitchFamily="34" charset="-120"/>
-              </a:rPr>
-              <a:t>After</a:t>
-            </a:r>
-            <a:endParaRPr lang="en-US" sz="1500" dirty="0"/>
-          </a:p>
-        </p:txBody>
-      </p:sp>
-      <p:sp>
-        <p:nvSpPr>
-          <p:cNvPr id="10" name="Text 8"/>
-          <p:cNvSpPr/>
-          <p:nvPr/>
-        </p:nvSpPr>
-        <p:spPr>
-          <a:xfrm>
-            <a:off x="4876651" y="1482477"/>
-            <a:ext cx="3653332" cy="487561"/>
-          </a:xfrm>
-          <a:prstGeom prst="rect">
-            <a:avLst/>
-          </a:prstGeom>
-          <a:noFill/>
-          <a:ln/>
-        </p:spPr>
-        <p:txBody>
-          <a:bodyPr wrap="square" lIns="0" tIns="0" rIns="0" bIns="0" rtlCol="0" anchor="t"/>
-          <a:lstStyle/>
-          <a:p>
-            <a:pPr algn="l" indent="0" marL="0">
-              <a:lnSpc>
-                <a:spcPts val="1920"/>
-              </a:lnSpc>
-              <a:buNone/>
-            </a:pPr>
-            <a:r>
-              <a:rPr lang="en-US" sz="1200" dirty="0">
-                <a:solidFill>
-                  <a:srgbClr val="2C3E50"/>
-                </a:solidFill>
-                <a:latin typeface="Arial" pitchFamily="34" charset="0"/>
-                <a:ea typeface="Arial" pitchFamily="34" charset="-122"/>
-                <a:cs typeface="Arial" pitchFamily="34" charset="-120"/>
-              </a:rPr>
-              <a:t>Fresh opus instance, adversarial prompt, automated loop</a:t>
-            </a:r>
-            <a:endParaRPr lang="en-US" sz="1200" dirty="0"/>
-          </a:p>
-        </p:txBody>
-      </p:sp>
-      <p:sp>
-        <p:nvSpPr>
-          <p:cNvPr id="11" name="Text 9"/>
-          <p:cNvSpPr/>
-          <p:nvPr/>
-        </p:nvSpPr>
-        <p:spPr>
-          <a:xfrm>
-            <a:off x="507950" y="2325439"/>
-            <a:ext cx="8290661" cy="200025"/>
-          </a:xfrm>
-          <a:prstGeom prst="rect">
-            <a:avLst/>
-          </a:prstGeom>
-          <a:noFill/>
-          <a:ln/>
-        </p:spPr>
-        <p:txBody>
-          <a:bodyPr wrap="square" lIns="0" tIns="0" rIns="0" bIns="0" rtlCol="0" anchor="t"/>
-          <a:lstStyle/>
-          <a:p>
-            <a:pPr algn="l" indent="0" marL="0">
-              <a:spcAft>
-                <a:spcPts val="1000"/>
-              </a:spcAft>
-              <a:buNone/>
-            </a:pPr>
-            <a:r>
-              <a:rPr lang="en-US" sz="1300" dirty="0">
-                <a:solidFill>
-                  <a:srgbClr val="2C3E50"/>
-                </a:solidFill>
-                <a:latin typeface="Arial" pitchFamily="34" charset="0"/>
-                <a:ea typeface="Arial" pitchFamily="34" charset="-122"/>
-                <a:cs typeface="Arial" pitchFamily="34" charset="-120"/>
-              </a:rPr>
-              <a:t>Problem: Only 'checkbox' reviews, no real quality insight</a:t>
-            </a:r>
-            <a:endParaRPr lang="en-US" sz="1300" dirty="0"/>
-          </a:p>
-        </p:txBody>
-      </p:sp>
-      <p:sp>
-        <p:nvSpPr>
-          <p:cNvPr id="12" name="Shape 10"/>
-          <p:cNvSpPr/>
-          <p:nvPr/>
-        </p:nvSpPr>
-        <p:spPr>
-          <a:xfrm>
-            <a:off x="546050" y="2652415"/>
-            <a:ext cx="0" cy="482501"/>
-          </a:xfrm>
-          <a:prstGeom prst="line">
-            <a:avLst/>
-          </a:prstGeom>
-          <a:noFill/>
-          <a:ln w="76200">
-            <a:solidFill>
-              <a:srgbClr val="277884"/>
-            </a:solidFill>
-            <a:prstDash val="solid"/>
-          </a:ln>
-        </p:spPr>
-      </p:sp>
-      <p:sp>
-        <p:nvSpPr>
-          <p:cNvPr id="13" name="Text 11"/>
-          <p:cNvSpPr/>
-          <p:nvPr/>
-        </p:nvSpPr>
-        <p:spPr>
-          <a:xfrm>
-            <a:off x="787301" y="2779365"/>
-            <a:ext cx="7798510" cy="228600"/>
-          </a:xfrm>
-          <a:prstGeom prst="rect">
-            <a:avLst/>
-          </a:prstGeom>
-          <a:noFill/>
-          <a:ln/>
-        </p:spPr>
-        <p:txBody>
-          <a:bodyPr wrap="square" lIns="0" tIns="0" rIns="0" bIns="0" rtlCol="0" anchor="t"/>
-          <a:lstStyle/>
-          <a:p>
-            <a:pPr algn="l" indent="0" marL="0">
-              <a:lnSpc>
-                <a:spcPts val="1800"/>
-              </a:lnSpc>
-              <a:buNone/>
-            </a:pPr>
-            <a:r>
-              <a:rPr lang="en-US" sz="1200" b="1" dirty="0">
-                <a:solidFill>
-                  <a:srgbClr val="2C3E50"/>
-                </a:solidFill>
-                <a:latin typeface="Arial" pitchFamily="34" charset="0"/>
-                <a:ea typeface="Arial" pitchFamily="34" charset="-122"/>
-                <a:cs typeface="Arial" pitchFamily="34" charset="-120"/>
-              </a:rPr>
-              <a:t>Reviewers need: (a) fresh eyes (b) cognitive depth (c) automated iteration</a:t>
-            </a:r>
-            <a:endParaRPr lang="en-US" sz="1200" dirty="0"/>
+              <a:rPr lang="en-US" sz="1600" dirty="0">
+                <a:solidFill>
+                  <a:srgbClr val="D5D8DC"/>
+                </a:solidFill>
+                <a:latin typeface="Arial" pitchFamily="34" charset="0"/>
+                <a:ea typeface="Arial" pitchFamily="34" charset="-122"/>
+                <a:cs typeface="Arial" pitchFamily="34" charset="-120"/>
+              </a:rPr>
+              <a:t>You develop tooling alongside your product</a:t>
+            </a:r>
+            <a:endParaRPr lang="en-US" sz="1600" dirty="0"/>
           </a:p>
         </p:txBody>
       </p:sp>
@@ -7484,7 +7825,7 @@
         <p:spPr>
           <a:xfrm>
             <a:off x="507950" y="381000"/>
-            <a:ext cx="8290661" cy="323850"/>
+            <a:ext cx="8290661" cy="352425"/>
           </a:xfrm>
           <a:prstGeom prst="rect">
             <a:avLst/>
@@ -7506,7 +7847,7 @@
               <a:buNone/>
             </a:pPr>
             <a:r>
-              <a:rPr lang="en-US" sz="2200" b="1" dirty="0">
+              <a:rPr lang="en-US" sz="2400" b="1" dirty="0">
                 <a:solidFill>
                   <a:srgbClr val="1C2833"/>
                 </a:solidFill>
@@ -7514,9 +7855,9 @@
                 <a:ea typeface="Arial" pitchFamily="34" charset="-122"/>
                 <a:cs typeface="Arial" pitchFamily="34" charset="-120"/>
               </a:rPr>
-              <a:t>Evolution: Skills as the Scaling Lever</a:t>
-            </a:r>
-            <a:endParaRPr lang="en-US" sz="2200" dirty="0"/>
+              <a:t>Deming Cycle for AI Tooling</a:t>
+            </a:r>
+            <a:endParaRPr lang="en-US" sz="2400" dirty="0"/>
           </a:p>
         </p:txBody>
       </p:sp>
@@ -7528,16 +7869,16 @@
         </p:nvSpPr>
         <p:spPr>
           <a:xfrm>
-            <a:off x="507950" y="908000"/>
-            <a:ext cx="3937099" cy="1211163"/>
+            <a:off x="2336750" y="936575"/>
+            <a:ext cx="2158901" cy="888950"/>
           </a:xfrm>
           <a:prstGeom prst="roundRect">
             <a:avLst>
-              <a:gd name="adj" fmla="val 6291"/>
+              <a:gd name="adj" fmla="val 8572"/>
             </a:avLst>
           </a:prstGeom>
           <a:solidFill>
-            <a:srgbClr val="FFFFFF"/>
+            <a:srgbClr val="277884"/>
           </a:solidFill>
           <a:ln/>
         </p:spPr>
@@ -7554,26 +7895,42 @@
       </p:sp>
       <p:sp>
         <p:nvSpPr>
-          <p:cNvPr id="4" name="Shape 2"/>
-          <p:cNvSpPr/>
-          <p:nvPr/>
-        </p:nvSpPr>
-        <p:spPr>
-          <a:xfrm>
-            <a:off x="507950" y="931813"/>
-            <a:ext cx="3937099" cy="0"/>
-          </a:xfrm>
-          <a:prstGeom prst="line">
-            <a:avLst/>
-          </a:prstGeom>
-          <a:noFill/>
-          <a:ln w="47625">
-            <a:solidFill>
-              <a:srgbClr val="277884"/>
-            </a:solidFill>
-            <a:prstDash val="solid"/>
-          </a:ln>
-        </p:spPr>
+          <p:cNvPr id="4" name="Text 2"/>
+          <p:cNvSpPr/>
+          <p:nvPr/>
+        </p:nvSpPr>
+        <p:spPr>
+          <a:xfrm>
+            <a:off x="3174802" y="1247626"/>
+            <a:ext cx="492454" cy="266700"/>
+          </a:xfrm>
+          <a:prstGeom prst="rect">
+            <a:avLst/>
+          </a:prstGeom>
+          <a:noFill/>
+          <a:ln/>
+        </p:spPr>
+        <p:txBody>
+          <a:bodyPr wrap="square" lIns="0" tIns="0" rIns="0" bIns="0" rtlCol="0" anchor="t"/>
+          <a:lstStyle/>
+          <a:p>
+            <a:pPr algn="l" indent="0" marL="0">
+              <a:buNone/>
+            </a:pPr>
+            <a:r>
+              <a:rPr lang="en-US" sz="1800" b="1" dirty="0">
+                <a:solidFill>
+                  <a:srgbClr val="FFFFFF"/>
+                </a:solidFill>
+                <a:latin typeface="Arial" pitchFamily="34" charset="0"/>
+                <a:ea typeface="Arial" pitchFamily="34" charset="-122"/>
+                <a:cs typeface="Arial" pitchFamily="34" charset="-120"/>
+              </a:rPr>
+              <a:t>Plan</a:t>
+            </a:r>
+            <a:endParaRPr lang="en-US" sz="1800" dirty="0"/>
+          </a:p>
+        </p:txBody>
       </p:sp>
       <p:sp>
         <p:nvSpPr>
@@ -7583,100 +7940,16 @@
         </p:nvSpPr>
         <p:spPr>
           <a:xfrm>
-            <a:off x="685651" y="1133326"/>
-            <a:ext cx="3653332" cy="219075"/>
-          </a:xfrm>
-          <a:prstGeom prst="rect">
-            <a:avLst/>
-          </a:prstGeom>
-          <a:noFill/>
-          <a:ln/>
-        </p:spPr>
-        <p:txBody>
-          <a:bodyPr wrap="square" lIns="0" tIns="0" rIns="0" bIns="0" rtlCol="0" anchor="t"/>
-          <a:lstStyle/>
-          <a:p>
-            <a:pPr algn="l" indent="0" marL="0">
-              <a:spcAft>
-                <a:spcPts val="800"/>
-              </a:spcAft>
-              <a:buNone/>
-            </a:pPr>
-            <a:r>
-              <a:rPr lang="en-US" sz="1500" b="1" dirty="0">
-                <a:solidFill>
-                  <a:srgbClr val="277884"/>
-                </a:solidFill>
-                <a:latin typeface="Arial" pitchFamily="34" charset="0"/>
-                <a:ea typeface="Arial" pitchFamily="34" charset="-122"/>
-                <a:cs typeface="Arial" pitchFamily="34" charset="-120"/>
-              </a:rPr>
-              <a:t>Before</a:t>
-            </a:r>
-            <a:endParaRPr lang="en-US" sz="1500" dirty="0"/>
-          </a:p>
-        </p:txBody>
-      </p:sp>
-      <p:sp>
-        <p:nvSpPr>
-          <p:cNvPr id="6" name="Text 4"/>
-          <p:cNvSpPr/>
-          <p:nvPr/>
-        </p:nvSpPr>
-        <p:spPr>
-          <a:xfrm>
-            <a:off x="685651" y="1453902"/>
-            <a:ext cx="3653332" cy="487561"/>
-          </a:xfrm>
-          <a:prstGeom prst="rect">
-            <a:avLst/>
-          </a:prstGeom>
-          <a:noFill/>
-          <a:ln/>
-        </p:spPr>
-        <p:txBody>
-          <a:bodyPr wrap="square" lIns="0" tIns="0" rIns="0" bIns="0" rtlCol="0" anchor="t"/>
-          <a:lstStyle/>
-          <a:p>
-            <a:pPr algn="l" indent="0" marL="0">
-              <a:lnSpc>
-                <a:spcPts val="1920"/>
-              </a:lnSpc>
-              <a:buNone/>
-            </a:pPr>
-            <a:r>
-              <a:rPr lang="en-US" sz="1200" dirty="0">
-                <a:solidFill>
-                  <a:srgbClr val="2C3E50"/>
-                </a:solidFill>
-                <a:latin typeface="Arial" pitchFamily="34" charset="0"/>
-                <a:ea typeface="Arial" pitchFamily="34" charset="-122"/>
-                <a:cs typeface="Arial" pitchFamily="34" charset="-120"/>
-              </a:rPr>
-              <a:t>Everything in agent definitions (long, unwieldy prompts)</a:t>
-            </a:r>
-            <a:endParaRPr lang="en-US" sz="1200" dirty="0"/>
-          </a:p>
-        </p:txBody>
-      </p:sp>
-      <p:sp>
-        <p:nvSpPr>
-          <p:cNvPr id="7" name="Text 5"/>
-          <p:cNvSpPr/>
-          <p:nvPr/>
-        </p:nvSpPr>
-        <p:spPr>
-          <a:xfrm>
-            <a:off x="4698950" y="908000"/>
-            <a:ext cx="3937099" cy="1211163"/>
+            <a:off x="4648051" y="936575"/>
+            <a:ext cx="2158901" cy="888950"/>
           </a:xfrm>
           <a:prstGeom prst="roundRect">
             <a:avLst>
-              <a:gd name="adj" fmla="val 6291"/>
+              <a:gd name="adj" fmla="val 8572"/>
             </a:avLst>
           </a:prstGeom>
           <a:solidFill>
-            <a:srgbClr val="FFFFFF"/>
+            <a:srgbClr val="277884"/>
           </a:solidFill>
           <a:ln/>
         </p:spPr>
@@ -7693,26 +7966,113 @@
       </p:sp>
       <p:sp>
         <p:nvSpPr>
-          <p:cNvPr id="8" name="Shape 6"/>
-          <p:cNvSpPr/>
-          <p:nvPr/>
-        </p:nvSpPr>
-        <p:spPr>
-          <a:xfrm>
-            <a:off x="4698950" y="931813"/>
-            <a:ext cx="3937099" cy="0"/>
-          </a:xfrm>
-          <a:prstGeom prst="line">
-            <a:avLst/>
-          </a:prstGeom>
-          <a:noFill/>
-          <a:ln w="47625">
-            <a:solidFill>
-              <a:srgbClr val="277884"/>
-            </a:solidFill>
-            <a:prstDash val="solid"/>
-          </a:ln>
-        </p:spPr>
+          <p:cNvPr id="6" name="Text 4"/>
+          <p:cNvSpPr/>
+          <p:nvPr/>
+        </p:nvSpPr>
+        <p:spPr>
+          <a:xfrm>
+            <a:off x="5575102" y="1247626"/>
+            <a:ext cx="310896" cy="266700"/>
+          </a:xfrm>
+          <a:prstGeom prst="rect">
+            <a:avLst/>
+          </a:prstGeom>
+          <a:noFill/>
+          <a:ln/>
+        </p:spPr>
+        <p:txBody>
+          <a:bodyPr wrap="square" lIns="0" tIns="0" rIns="0" bIns="0" rtlCol="0" anchor="t"/>
+          <a:lstStyle/>
+          <a:p>
+            <a:pPr algn="l" indent="0" marL="0">
+              <a:buNone/>
+            </a:pPr>
+            <a:r>
+              <a:rPr lang="en-US" sz="1800" b="1" dirty="0">
+                <a:solidFill>
+                  <a:srgbClr val="FFFFFF"/>
+                </a:solidFill>
+                <a:latin typeface="Arial" pitchFamily="34" charset="0"/>
+                <a:ea typeface="Arial" pitchFamily="34" charset="-122"/>
+                <a:cs typeface="Arial" pitchFamily="34" charset="-120"/>
+              </a:rPr>
+              <a:t>Do</a:t>
+            </a:r>
+            <a:endParaRPr lang="en-US" sz="1800" dirty="0"/>
+          </a:p>
+        </p:txBody>
+      </p:sp>
+      <p:sp>
+        <p:nvSpPr>
+          <p:cNvPr id="7" name="Text 5"/>
+          <p:cNvSpPr/>
+          <p:nvPr/>
+        </p:nvSpPr>
+        <p:spPr>
+          <a:xfrm>
+            <a:off x="2336750" y="1977926"/>
+            <a:ext cx="2158901" cy="888950"/>
+          </a:xfrm>
+          <a:prstGeom prst="roundRect">
+            <a:avLst>
+              <a:gd name="adj" fmla="val 8572"/>
+            </a:avLst>
+          </a:prstGeom>
+          <a:solidFill>
+            <a:srgbClr val="277884"/>
+          </a:solidFill>
+          <a:ln/>
+        </p:spPr>
+        <p:txBody>
+          <a:bodyPr wrap="square" rtlCol="0" anchor="ctr"/>
+          <a:lstStyle/>
+          <a:p>
+            <a:pPr indent="0" marL="0">
+              <a:buNone/>
+            </a:pPr>
+            <a:endParaRPr lang="en-US" dirty="0"/>
+          </a:p>
+        </p:txBody>
+      </p:sp>
+      <p:sp>
+        <p:nvSpPr>
+          <p:cNvPr id="8" name="Text 6"/>
+          <p:cNvSpPr/>
+          <p:nvPr/>
+        </p:nvSpPr>
+        <p:spPr>
+          <a:xfrm>
+            <a:off x="3073003" y="2288977"/>
+            <a:ext cx="699971" cy="266700"/>
+          </a:xfrm>
+          <a:prstGeom prst="rect">
+            <a:avLst/>
+          </a:prstGeom>
+          <a:noFill/>
+          <a:ln/>
+        </p:spPr>
+        <p:txBody>
+          <a:bodyPr wrap="square" lIns="0" tIns="0" rIns="0" bIns="0" rtlCol="0" anchor="t"/>
+          <a:lstStyle/>
+          <a:p>
+            <a:pPr algn="l" indent="0" marL="0">
+              <a:buNone/>
+            </a:pPr>
+            <a:r>
+              <a:rPr lang="en-US" sz="1800" b="1" dirty="0">
+                <a:solidFill>
+                  <a:srgbClr val="FFFFFF"/>
+                </a:solidFill>
+                <a:latin typeface="Arial" pitchFamily="34" charset="0"/>
+                <a:ea typeface="Arial" pitchFamily="34" charset="-122"/>
+                <a:cs typeface="Arial" pitchFamily="34" charset="-120"/>
+              </a:rPr>
+              <a:t>Check</a:t>
+            </a:r>
+            <a:endParaRPr lang="en-US" sz="1800" dirty="0"/>
+          </a:p>
+        </p:txBody>
       </p:sp>
       <p:sp>
         <p:nvSpPr>
@@ -7722,8 +8082,40 @@
         </p:nvSpPr>
         <p:spPr>
           <a:xfrm>
-            <a:off x="4876651" y="1133326"/>
-            <a:ext cx="3653332" cy="219075"/>
+            <a:off x="4648051" y="1977926"/>
+            <a:ext cx="2158901" cy="888950"/>
+          </a:xfrm>
+          <a:prstGeom prst="roundRect">
+            <a:avLst>
+              <a:gd name="adj" fmla="val 8572"/>
+            </a:avLst>
+          </a:prstGeom>
+          <a:solidFill>
+            <a:srgbClr val="277884"/>
+          </a:solidFill>
+          <a:ln/>
+        </p:spPr>
+        <p:txBody>
+          <a:bodyPr wrap="square" rtlCol="0" anchor="ctr"/>
+          <a:lstStyle/>
+          <a:p>
+            <a:pPr indent="0" marL="0">
+              <a:buNone/>
+            </a:pPr>
+            <a:endParaRPr lang="en-US" dirty="0"/>
+          </a:p>
+        </p:txBody>
+      </p:sp>
+      <p:sp>
+        <p:nvSpPr>
+          <p:cNvPr id="10" name="Text 8"/>
+          <p:cNvSpPr/>
+          <p:nvPr/>
+        </p:nvSpPr>
+        <p:spPr>
+          <a:xfrm>
+            <a:off x="5543252" y="2288977"/>
+            <a:ext cx="375717" cy="266700"/>
           </a:xfrm>
           <a:prstGeom prst="rect">
             <a:avLst/>
@@ -7736,36 +8128,75 @@
           <a:lstStyle/>
           <a:p>
             <a:pPr algn="l" indent="0" marL="0">
+              <a:buNone/>
+            </a:pPr>
+            <a:r>
+              <a:rPr lang="en-US" sz="1800" b="1" dirty="0">
+                <a:solidFill>
+                  <a:srgbClr val="FFFFFF"/>
+                </a:solidFill>
+                <a:latin typeface="Arial" pitchFamily="34" charset="0"/>
+                <a:ea typeface="Arial" pitchFamily="34" charset="-122"/>
+                <a:cs typeface="Arial" pitchFamily="34" charset="-120"/>
+              </a:rPr>
+              <a:t>Act</a:t>
+            </a:r>
+            <a:endParaRPr lang="en-US" sz="1800" dirty="0"/>
+          </a:p>
+        </p:txBody>
+      </p:sp>
+      <p:sp>
+        <p:nvSpPr>
+          <p:cNvPr id="11" name="Text 9"/>
+          <p:cNvSpPr/>
+          <p:nvPr/>
+        </p:nvSpPr>
+        <p:spPr>
+          <a:xfrm>
+            <a:off x="426669" y="3120777"/>
+            <a:ext cx="8290661" cy="200025"/>
+          </a:xfrm>
+          <a:prstGeom prst="rect">
+            <a:avLst/>
+          </a:prstGeom>
+          <a:noFill/>
+          <a:ln/>
+        </p:spPr>
+        <p:txBody>
+          <a:bodyPr wrap="square" lIns="0" tIns="0" rIns="0" bIns="0" rtlCol="0" anchor="t"/>
+          <a:lstStyle/>
+          <a:p>
+            <a:pPr algn="ctr" indent="0" marL="0">
               <a:spcAft>
-                <a:spcPts val="800"/>
+                <a:spcPts val="400"/>
               </a:spcAft>
               <a:buNone/>
             </a:pPr>
             <a:r>
-              <a:rPr lang="en-US" sz="1500" b="1" dirty="0">
-                <a:solidFill>
-                  <a:srgbClr val="277884"/>
-                </a:solidFill>
-                <a:latin typeface="Arial" pitchFamily="34" charset="0"/>
-                <a:ea typeface="Arial" pitchFamily="34" charset="-122"/>
-                <a:cs typeface="Arial" pitchFamily="34" charset="-120"/>
-              </a:rPr>
-              <a:t>After</a:t>
-            </a:r>
-            <a:endParaRPr lang="en-US" sz="1500" dirty="0"/>
-          </a:p>
-        </p:txBody>
-      </p:sp>
-      <p:sp>
-        <p:nvSpPr>
-          <p:cNvPr id="10" name="Text 8"/>
-          <p:cNvSpPr/>
-          <p:nvPr/>
-        </p:nvSpPr>
-        <p:spPr>
-          <a:xfrm>
-            <a:off x="4876651" y="1453902"/>
-            <a:ext cx="3653332" cy="243780"/>
+              <a:rPr lang="en-US" sz="1300" dirty="0">
+                <a:solidFill>
+                  <a:srgbClr val="2C3E50"/>
+                </a:solidFill>
+                <a:latin typeface="Arial" pitchFamily="34" charset="0"/>
+                <a:ea typeface="Arial" pitchFamily="34" charset="-122"/>
+                <a:cs typeface="Arial" pitchFamily="34" charset="-120"/>
+              </a:rPr>
+              <a:t>What works today may not work next month</a:t>
+            </a:r>
+            <a:endParaRPr lang="en-US" sz="1300" dirty="0"/>
+          </a:p>
+        </p:txBody>
+      </p:sp>
+      <p:sp>
+        <p:nvSpPr>
+          <p:cNvPr id="12" name="Text 10"/>
+          <p:cNvSpPr/>
+          <p:nvPr/>
+        </p:nvSpPr>
+        <p:spPr>
+          <a:xfrm>
+            <a:off x="426669" y="3371552"/>
+            <a:ext cx="8290661" cy="200025"/>
           </a:xfrm>
           <a:prstGeom prst="rect">
             <a:avLst/>
@@ -7777,14 +8208,14 @@
           <a:bodyPr wrap="square" lIns="0" tIns="0" rIns="0" bIns="0" rtlCol="0" anchor="t"/>
           <a:lstStyle/>
           <a:p>
-            <a:pPr algn="l" indent="0" marL="0">
-              <a:lnSpc>
-                <a:spcPts val="1920"/>
-              </a:lnSpc>
-              <a:buNone/>
-            </a:pPr>
-            <a:r>
-              <a:rPr lang="en-US" sz="1200" dirty="0">
+            <a:pPr algn="ctr" indent="0" marL="0">
+              <a:spcAft>
+                <a:spcPts val="400"/>
+              </a:spcAft>
+              <a:buNone/>
+            </a:pPr>
+            <a:r>
+              <a:rPr lang="en-US" sz="1300" dirty="0">
                 <a:solidFill>
                   <a:srgbClr val="2C3E50"/>
                 </a:solidFill>
@@ -7792,111 +8223,7 @@
                 <a:ea typeface="Arial" pitchFamily="34" charset="-122"/>
                 <a:cs typeface="Arial" pitchFamily="34" charset="-120"/>
               </a:rPr>
-              <a:t>Lightweight agents + injectable domain expertise</a:t>
-            </a:r>
-            <a:endParaRPr lang="en-US" sz="1200" dirty="0"/>
-          </a:p>
-        </p:txBody>
-      </p:sp>
-      <p:sp>
-        <p:nvSpPr>
-          <p:cNvPr id="11" name="Text 9"/>
-          <p:cNvSpPr/>
-          <p:nvPr/>
-        </p:nvSpPr>
-        <p:spPr>
-          <a:xfrm>
-            <a:off x="507950" y="2296864"/>
-            <a:ext cx="8290661" cy="200025"/>
-          </a:xfrm>
-          <a:prstGeom prst="rect">
-            <a:avLst/>
-          </a:prstGeom>
-          <a:noFill/>
-          <a:ln/>
-        </p:spPr>
-        <p:txBody>
-          <a:bodyPr wrap="square" lIns="0" tIns="0" rIns="0" bIns="0" rtlCol="0" anchor="t"/>
-          <a:lstStyle/>
-          <a:p>
-            <a:pPr algn="l" indent="0" marL="0">
-              <a:spcAft>
-                <a:spcPts val="1000"/>
-              </a:spcAft>
-              <a:buNone/>
-            </a:pPr>
-            <a:r>
-              <a:rPr lang="en-US" sz="1300" dirty="0">
-                <a:solidFill>
-                  <a:srgbClr val="2C3E50"/>
-                </a:solidFill>
-                <a:latin typeface="Arial" pitchFamily="34" charset="0"/>
-                <a:ea typeface="Arial" pitchFamily="34" charset="-122"/>
-                <a:cs typeface="Arial" pitchFamily="34" charset="-120"/>
-              </a:rPr>
-              <a:t>Same skills reused across 3 projects</a:t>
-            </a:r>
-            <a:endParaRPr lang="en-US" sz="1300" dirty="0"/>
-          </a:p>
-        </p:txBody>
-      </p:sp>
-      <p:sp>
-        <p:nvSpPr>
-          <p:cNvPr id="12" name="Shape 10"/>
-          <p:cNvSpPr/>
-          <p:nvPr/>
-        </p:nvSpPr>
-        <p:spPr>
-          <a:xfrm>
-            <a:off x="546050" y="2623840"/>
-            <a:ext cx="0" cy="453926"/>
-          </a:xfrm>
-          <a:prstGeom prst="line">
-            <a:avLst/>
-          </a:prstGeom>
-          <a:noFill/>
-          <a:ln w="76200">
-            <a:solidFill>
-              <a:srgbClr val="277884"/>
-            </a:solidFill>
-            <a:prstDash val="solid"/>
-          </a:ln>
-        </p:spPr>
-      </p:sp>
-      <p:sp>
-        <p:nvSpPr>
-          <p:cNvPr id="13" name="Text 11"/>
-          <p:cNvSpPr/>
-          <p:nvPr/>
-        </p:nvSpPr>
-        <p:spPr>
-          <a:xfrm>
-            <a:off x="787301" y="2750790"/>
-            <a:ext cx="7798510" cy="200025"/>
-          </a:xfrm>
-          <a:prstGeom prst="rect">
-            <a:avLst/>
-          </a:prstGeom>
-          <a:noFill/>
-          <a:ln/>
-        </p:spPr>
-        <p:txBody>
-          <a:bodyPr wrap="square" lIns="0" tIns="0" rIns="0" bIns="0" rtlCol="0" anchor="t"/>
-          <a:lstStyle/>
-          <a:p>
-            <a:pPr algn="l" indent="0" marL="0">
-              <a:buNone/>
-            </a:pPr>
-            <a:r>
-              <a:rPr lang="en-US" sz="1300" b="1" dirty="0">
-                <a:solidFill>
-                  <a:srgbClr val="2C3E50"/>
-                </a:solidFill>
-                <a:latin typeface="Arial" pitchFamily="34" charset="0"/>
-                <a:ea typeface="Arial" pitchFamily="34" charset="-122"/>
-                <a:cs typeface="Arial" pitchFamily="34" charset="-120"/>
-              </a:rPr>
-              <a:t>New project bootstraps in hours, not days</a:t>
+              <a:t>What failed before may work now (models improve!)</a:t>
             </a:r>
             <a:endParaRPr lang="en-US" sz="1300" dirty="0"/>
           </a:p>
@@ -7942,8 +8269,8 @@
         </p:nvSpPr>
         <p:spPr>
           <a:xfrm>
-            <a:off x="507950" y="457200"/>
-            <a:ext cx="8290661" cy="409575"/>
+            <a:off x="507950" y="381000"/>
+            <a:ext cx="8290661" cy="352425"/>
           </a:xfrm>
           <a:prstGeom prst="rect">
             <a:avLst/>
@@ -7957,15 +8284,15 @@
           <a:p>
             <a:pPr algn="l" indent="0" marL="0">
               <a:spcBef>
-                <a:spcPts val="3600"/>
+                <a:spcPts val="3000"/>
               </a:spcBef>
               <a:spcAft>
-                <a:spcPts val="200"/>
+                <a:spcPts val="1600"/>
               </a:spcAft>
               <a:buNone/>
             </a:pPr>
             <a:r>
-              <a:rPr lang="en-US" sz="2800" b="1" dirty="0">
+              <a:rPr lang="en-US" sz="2400" b="1" dirty="0">
                 <a:solidFill>
                   <a:srgbClr val="1C2833"/>
                 </a:solidFill>
@@ -7973,9 +8300,9 @@
                 <a:ea typeface="Arial" pitchFamily="34" charset="-122"/>
                 <a:cs typeface="Arial" pitchFamily="34" charset="-120"/>
               </a:rPr>
-              <a:t>The Paradox</a:t>
-            </a:r>
-            <a:endParaRPr lang="en-US" sz="2800" dirty="0"/>
+              <a:t>Evolution: Agent Consolidation</a:t>
+            </a:r>
+            <a:endParaRPr lang="en-US" sz="2400" dirty="0"/>
           </a:p>
         </p:txBody>
       </p:sp>
@@ -7987,8 +8314,63 @@
         </p:nvSpPr>
         <p:spPr>
           <a:xfrm>
-            <a:off x="507950" y="892076"/>
-            <a:ext cx="8290661" cy="266700"/>
+            <a:off x="507950" y="936575"/>
+            <a:ext cx="3937099" cy="1211163"/>
+          </a:xfrm>
+          <a:prstGeom prst="roundRect">
+            <a:avLst>
+              <a:gd name="adj" fmla="val 6291"/>
+            </a:avLst>
+          </a:prstGeom>
+          <a:solidFill>
+            <a:srgbClr val="FFFFFF"/>
+          </a:solidFill>
+          <a:ln/>
+        </p:spPr>
+        <p:txBody>
+          <a:bodyPr wrap="square" rtlCol="0" anchor="ctr"/>
+          <a:lstStyle/>
+          <a:p>
+            <a:pPr indent="0" marL="0">
+              <a:buNone/>
+            </a:pPr>
+            <a:endParaRPr lang="en-US" dirty="0"/>
+          </a:p>
+        </p:txBody>
+      </p:sp>
+      <p:sp>
+        <p:nvSpPr>
+          <p:cNvPr id="4" name="Shape 2"/>
+          <p:cNvSpPr/>
+          <p:nvPr/>
+        </p:nvSpPr>
+        <p:spPr>
+          <a:xfrm>
+            <a:off x="507950" y="960388"/>
+            <a:ext cx="3937099" cy="0"/>
+          </a:xfrm>
+          <a:prstGeom prst="line">
+            <a:avLst/>
+          </a:prstGeom>
+          <a:noFill/>
+          <a:ln w="47625">
+            <a:solidFill>
+              <a:srgbClr val="277884"/>
+            </a:solidFill>
+            <a:prstDash val="solid"/>
+          </a:ln>
+        </p:spPr>
+      </p:sp>
+      <p:sp>
+        <p:nvSpPr>
+          <p:cNvPr id="5" name="Text 3"/>
+          <p:cNvSpPr/>
+          <p:nvPr/>
+        </p:nvSpPr>
+        <p:spPr>
+          <a:xfrm>
+            <a:off x="685651" y="1161901"/>
+            <a:ext cx="3653332" cy="219075"/>
           </a:xfrm>
           <a:prstGeom prst="rect">
             <a:avLst/>
@@ -8002,12 +8384,12 @@
           <a:p>
             <a:pPr algn="l" indent="0" marL="0">
               <a:spcAft>
-                <a:spcPts val="1800"/>
+                <a:spcPts val="800"/>
               </a:spcAft>
               <a:buNone/>
             </a:pPr>
             <a:r>
-              <a:rPr lang="en-US" sz="1800" dirty="0">
+              <a:rPr lang="en-US" sz="1500" b="1" dirty="0">
                 <a:solidFill>
                   <a:srgbClr val="277884"/>
                 </a:solidFill>
@@ -8015,42 +8397,41 @@
                 <a:ea typeface="Arial" pitchFamily="34" charset="-122"/>
                 <a:cs typeface="Arial" pitchFamily="34" charset="-120"/>
               </a:rPr>
-              <a:t>More Constraints = More Productivity</a:t>
-            </a:r>
-            <a:endParaRPr lang="en-US" sz="1800" dirty="0"/>
-          </a:p>
-        </p:txBody>
-      </p:sp>
-      <p:sp>
-        <p:nvSpPr>
-          <p:cNvPr id="4" name="Text 2"/>
-          <p:cNvSpPr/>
-          <p:nvPr/>
-        </p:nvSpPr>
-        <p:spPr>
-          <a:xfrm>
-            <a:off x="507950" y="1387376"/>
-            <a:ext cx="8128099" cy="1524000"/>
-          </a:xfrm>
-          <a:prstGeom prst="rect">
-            <a:avLst/>
-          </a:prstGeom>
-          <a:noFill/>
-          <a:ln/>
-        </p:spPr>
-        <p:txBody>
-          <a:bodyPr wrap="square" lIns="152400" tIns="0" rIns="0" bIns="0" rtlCol="0" anchor="t"/>
-          <a:lstStyle/>
-          <a:p>
-            <a:pPr algn="l" marL="152400" indent="-152400">
+              <a:t>Before</a:t>
+            </a:r>
+            <a:endParaRPr lang="en-US" sz="1500" dirty="0"/>
+          </a:p>
+        </p:txBody>
+      </p:sp>
+      <p:sp>
+        <p:nvSpPr>
+          <p:cNvPr id="6" name="Text 4"/>
+          <p:cNvSpPr/>
+          <p:nvPr/>
+        </p:nvSpPr>
+        <p:spPr>
+          <a:xfrm>
+            <a:off x="685651" y="1482477"/>
+            <a:ext cx="3653332" cy="487561"/>
+          </a:xfrm>
+          <a:prstGeom prst="rect">
+            <a:avLst/>
+          </a:prstGeom>
+          <a:noFill/>
+          <a:ln/>
+        </p:spPr>
+        <p:txBody>
+          <a:bodyPr wrap="square" lIns="0" tIns="0" rIns="0" bIns="0" rtlCol="0" anchor="t"/>
+          <a:lstStyle/>
+          <a:p>
+            <a:pPr algn="l" indent="0" marL="0">
               <a:lnSpc>
-                <a:spcPts val="3000"/>
+                <a:spcPts val="1920"/>
               </a:lnSpc>
-              <a:buSzPct val="100000"/>
-              <a:buChar char="•"/>
-            </a:pPr>
-            <a:r>
-              <a:rPr lang="en-US" sz="1500" dirty="0">
+              <a:buNone/>
+            </a:pPr>
+            <a:r>
+              <a:rPr lang="en-US" sz="1200" dirty="0">
                 <a:solidFill>
                   <a:srgbClr val="2C3E50"/>
                 </a:solidFill>
@@ -8058,20 +8439,138 @@
                 <a:ea typeface="Arial" pitchFamily="34" charset="-122"/>
                 <a:cs typeface="Arial" pitchFamily="34" charset="-120"/>
               </a:rPr>
-              <a:t>Non-negotiables list</a:t>
+              <a:t>3 agents per technology: Architect + Developer + Reviewer</a:t>
+            </a:r>
+            <a:endParaRPr lang="en-US" sz="1200" dirty="0"/>
+          </a:p>
+        </p:txBody>
+      </p:sp>
+      <p:sp>
+        <p:nvSpPr>
+          <p:cNvPr id="7" name="Text 5"/>
+          <p:cNvSpPr/>
+          <p:nvPr/>
+        </p:nvSpPr>
+        <p:spPr>
+          <a:xfrm>
+            <a:off x="4698950" y="936575"/>
+            <a:ext cx="3937099" cy="1211163"/>
+          </a:xfrm>
+          <a:prstGeom prst="roundRect">
+            <a:avLst>
+              <a:gd name="adj" fmla="val 6291"/>
+            </a:avLst>
+          </a:prstGeom>
+          <a:solidFill>
+            <a:srgbClr val="FFFFFF"/>
+          </a:solidFill>
+          <a:ln/>
+        </p:spPr>
+        <p:txBody>
+          <a:bodyPr wrap="square" rtlCol="0" anchor="ctr"/>
+          <a:lstStyle/>
+          <a:p>
+            <a:pPr indent="0" marL="0">
+              <a:buNone/>
+            </a:pPr>
+            <a:endParaRPr lang="en-US" dirty="0"/>
+          </a:p>
+        </p:txBody>
+      </p:sp>
+      <p:sp>
+        <p:nvSpPr>
+          <p:cNvPr id="8" name="Shape 6"/>
+          <p:cNvSpPr/>
+          <p:nvPr/>
+        </p:nvSpPr>
+        <p:spPr>
+          <a:xfrm>
+            <a:off x="4698950" y="960388"/>
+            <a:ext cx="3937099" cy="0"/>
+          </a:xfrm>
+          <a:prstGeom prst="line">
+            <a:avLst/>
+          </a:prstGeom>
+          <a:noFill/>
+          <a:ln w="47625">
+            <a:solidFill>
+              <a:srgbClr val="277884"/>
+            </a:solidFill>
+            <a:prstDash val="solid"/>
+          </a:ln>
+        </p:spPr>
+      </p:sp>
+      <p:sp>
+        <p:nvSpPr>
+          <p:cNvPr id="9" name="Text 7"/>
+          <p:cNvSpPr/>
+          <p:nvPr/>
+        </p:nvSpPr>
+        <p:spPr>
+          <a:xfrm>
+            <a:off x="4876651" y="1161901"/>
+            <a:ext cx="3653332" cy="219075"/>
+          </a:xfrm>
+          <a:prstGeom prst="rect">
+            <a:avLst/>
+          </a:prstGeom>
+          <a:noFill/>
+          <a:ln/>
+        </p:spPr>
+        <p:txBody>
+          <a:bodyPr wrap="square" lIns="0" tIns="0" rIns="0" bIns="0" rtlCol="0" anchor="t"/>
+          <a:lstStyle/>
+          <a:p>
+            <a:pPr algn="l" indent="0" marL="0">
+              <a:spcAft>
+                <a:spcPts val="800"/>
+              </a:spcAft>
+              <a:buNone/>
+            </a:pPr>
+            <a:r>
+              <a:rPr lang="en-US" sz="1500" b="1" dirty="0">
+                <a:solidFill>
+                  <a:srgbClr val="277884"/>
+                </a:solidFill>
+                <a:latin typeface="Arial" pitchFamily="34" charset="0"/>
+                <a:ea typeface="Arial" pitchFamily="34" charset="-122"/>
+                <a:cs typeface="Arial" pitchFamily="34" charset="-120"/>
+              </a:rPr>
+              <a:t>After</a:t>
             </a:r>
             <a:endParaRPr lang="en-US" sz="1500" dirty="0"/>
           </a:p>
-          <a:p>
-            <a:pPr algn="l" marL="152400" indent="-152400">
+        </p:txBody>
+      </p:sp>
+      <p:sp>
+        <p:nvSpPr>
+          <p:cNvPr id="10" name="Text 8"/>
+          <p:cNvSpPr/>
+          <p:nvPr/>
+        </p:nvSpPr>
+        <p:spPr>
+          <a:xfrm>
+            <a:off x="4876651" y="1482477"/>
+            <a:ext cx="3653332" cy="243780"/>
+          </a:xfrm>
+          <a:prstGeom prst="rect">
+            <a:avLst/>
+          </a:prstGeom>
+          <a:noFill/>
+          <a:ln/>
+        </p:spPr>
+        <p:txBody>
+          <a:bodyPr wrap="square" lIns="0" tIns="0" rIns="0" bIns="0" rtlCol="0" anchor="t"/>
+          <a:lstStyle/>
+          <a:p>
+            <a:pPr algn="l" indent="0" marL="0">
               <a:lnSpc>
-                <a:spcPts val="3000"/>
+                <a:spcPts val="1920"/>
               </a:lnSpc>
-              <a:buSzPct val="100000"/>
-              <a:buChar char="•"/>
-            </a:pPr>
-            <a:r>
-              <a:rPr lang="en-US" sz="1500" dirty="0">
+              <a:buNone/>
+            </a:pPr>
+            <a:r>
+              <a:rPr lang="en-US" sz="1200" dirty="0">
                 <a:solidFill>
                   <a:srgbClr val="2C3E50"/>
                 </a:solidFill>
@@ -8079,20 +8578,41 @@
                 <a:ea typeface="Arial" pitchFamily="34" charset="-122"/>
                 <a:cs typeface="Arial" pitchFamily="34" charset="-120"/>
               </a:rPr>
-              <a:t>Scope discipline rules</a:t>
-            </a:r>
-            <a:endParaRPr lang="en-US" sz="1500" dirty="0"/>
-          </a:p>
-          <a:p>
-            <a:pPr algn="l" marL="152400" indent="-152400">
-              <a:lnSpc>
-                <a:spcPts val="3000"/>
-              </a:lnSpc>
-              <a:buSzPct val="100000"/>
-              <a:buChar char="•"/>
-            </a:pPr>
-            <a:r>
-              <a:rPr lang="en-US" sz="1500" dirty="0">
+              <a:t>Combined developer agent (designs + implements)</a:t>
+            </a:r>
+            <a:endParaRPr lang="en-US" sz="1200" dirty="0"/>
+          </a:p>
+        </p:txBody>
+      </p:sp>
+      <p:sp>
+        <p:nvSpPr>
+          <p:cNvPr id="11" name="Text 9"/>
+          <p:cNvSpPr/>
+          <p:nvPr/>
+        </p:nvSpPr>
+        <p:spPr>
+          <a:xfrm>
+            <a:off x="507950" y="2325439"/>
+            <a:ext cx="8290661" cy="200025"/>
+          </a:xfrm>
+          <a:prstGeom prst="rect">
+            <a:avLst/>
+          </a:prstGeom>
+          <a:noFill/>
+          <a:ln/>
+        </p:spPr>
+        <p:txBody>
+          <a:bodyPr wrap="square" lIns="0" tIns="0" rIns="0" bIns="0" rtlCol="0" anchor="t"/>
+          <a:lstStyle/>
+          <a:p>
+            <a:pPr algn="l" indent="0" marL="0">
+              <a:spcAft>
+                <a:spcPts val="1000"/>
+              </a:spcAft>
+              <a:buNone/>
+            </a:pPr>
+            <a:r>
+              <a:rPr lang="en-US" sz="1300" dirty="0">
                 <a:solidFill>
                   <a:srgbClr val="2C3E50"/>
                 </a:solidFill>
@@ -8100,43 +8620,22 @@
                 <a:ea typeface="Arial" pitchFamily="34" charset="-122"/>
                 <a:cs typeface="Arial" pitchFamily="34" charset="-120"/>
               </a:rPr>
-              <a:t>Escalation rules</a:t>
-            </a:r>
-            <a:endParaRPr lang="en-US" sz="1500" dirty="0"/>
-          </a:p>
-          <a:p>
-            <a:pPr algn="l" marL="152400" indent="-152400">
-              <a:lnSpc>
-                <a:spcPts val="3000"/>
-              </a:lnSpc>
-              <a:buSzPct val="100000"/>
-              <a:buChar char="•"/>
-            </a:pPr>
-            <a:r>
-              <a:rPr lang="en-US" sz="1500" dirty="0">
-                <a:solidFill>
-                  <a:srgbClr val="2C3E50"/>
-                </a:solidFill>
-                <a:latin typeface="Arial" pitchFamily="34" charset="0"/>
-                <a:ea typeface="Arial" pitchFamily="34" charset="-122"/>
-                <a:cs typeface="Arial" pitchFamily="34" charset="-120"/>
-              </a:rPr>
-              <a:t>Primacy clause</a:t>
-            </a:r>
-            <a:endParaRPr lang="en-US" sz="1500" dirty="0"/>
-          </a:p>
-        </p:txBody>
-      </p:sp>
-      <p:sp>
-        <p:nvSpPr>
-          <p:cNvPr id="5" name="Shape 3"/>
-          <p:cNvSpPr/>
-          <p:nvPr/>
-        </p:nvSpPr>
-        <p:spPr>
-          <a:xfrm>
-            <a:off x="546050" y="3165277"/>
-            <a:ext cx="0" cy="463451"/>
+              <a:t>Problem: Overlap, wasted tokens, context lost in handoffs</a:t>
+            </a:r>
+            <a:endParaRPr lang="en-US" sz="1300" dirty="0"/>
+          </a:p>
+        </p:txBody>
+      </p:sp>
+      <p:sp>
+        <p:nvSpPr>
+          <p:cNvPr id="12" name="Shape 10"/>
+          <p:cNvSpPr/>
+          <p:nvPr/>
+        </p:nvSpPr>
+        <p:spPr>
+          <a:xfrm>
+            <a:off x="546050" y="2652415"/>
+            <a:ext cx="0" cy="453926"/>
           </a:xfrm>
           <a:prstGeom prst="line">
             <a:avLst/>
@@ -8152,14 +8651,14 @@
       </p:sp>
       <p:sp>
         <p:nvSpPr>
-          <p:cNvPr id="6" name="Text 4"/>
-          <p:cNvSpPr/>
-          <p:nvPr/>
-        </p:nvSpPr>
-        <p:spPr>
-          <a:xfrm>
-            <a:off x="787301" y="3292227"/>
-            <a:ext cx="7798510" cy="209550"/>
+          <p:cNvPr id="13" name="Text 11"/>
+          <p:cNvSpPr/>
+          <p:nvPr/>
+        </p:nvSpPr>
+        <p:spPr>
+          <a:xfrm>
+            <a:off x="787301" y="2779365"/>
+            <a:ext cx="7798510" cy="200025"/>
           </a:xfrm>
           <a:prstGeom prst="rect">
             <a:avLst/>
@@ -8175,7 +8674,7 @@
               <a:buNone/>
             </a:pPr>
             <a:r>
-              <a:rPr lang="en-US" sz="1400" b="1" dirty="0">
+              <a:rPr lang="en-US" sz="1300" b="1" dirty="0">
                 <a:solidFill>
                   <a:srgbClr val="2C3E50"/>
                 </a:solidFill>
@@ -8183,9 +8682,9 @@
                 <a:ea typeface="Arial" pitchFamily="34" charset="-122"/>
                 <a:cs typeface="Arial" pitchFamily="34" charset="-120"/>
               </a:rPr>
-              <a:t>The #1 time sink: fixing what the agent shouldn't have done</a:t>
-            </a:r>
-            <a:endParaRPr lang="en-US" sz="1400" dirty="0"/>
+              <a:t>Lesson: Fewer, more capable agents beat many narrow ones</a:t>
+            </a:r>
+            <a:endParaRPr lang="en-US" sz="1300" dirty="0"/>
           </a:p>
         </p:txBody>
       </p:sp>
@@ -8229,8 +8728,8 @@
         </p:nvSpPr>
         <p:spPr>
           <a:xfrm>
-            <a:off x="507950" y="457200"/>
-            <a:ext cx="8290661" cy="409575"/>
+            <a:off x="507950" y="381000"/>
+            <a:ext cx="8290661" cy="352425"/>
           </a:xfrm>
           <a:prstGeom prst="rect">
             <a:avLst/>
@@ -8244,15 +8743,15 @@
           <a:p>
             <a:pPr algn="l" indent="0" marL="0">
               <a:spcBef>
-                <a:spcPts val="3600"/>
+                <a:spcPts val="3000"/>
               </a:spcBef>
               <a:spcAft>
-                <a:spcPts val="2000"/>
+                <a:spcPts val="1600"/>
               </a:spcAft>
               <a:buNone/>
             </a:pPr>
             <a:r>
-              <a:rPr lang="en-US" sz="2800" b="1" dirty="0">
+              <a:rPr lang="en-US" sz="2400" b="1" dirty="0">
                 <a:solidFill>
                   <a:srgbClr val="1C2833"/>
                 </a:solidFill>
@@ -8260,9 +8759,9 @@
                 <a:ea typeface="Arial" pitchFamily="34" charset="-122"/>
                 <a:cs typeface="Arial" pitchFamily="34" charset="-120"/>
               </a:rPr>
-              <a:t>Two Forces of Change</a:t>
-            </a:r>
-            <a:endParaRPr lang="en-US" sz="2800" dirty="0"/>
+              <a:t>Evolution: The Reviewer Problem</a:t>
+            </a:r>
+            <a:endParaRPr lang="en-US" sz="2400" dirty="0"/>
           </a:p>
         </p:txBody>
       </p:sp>
@@ -8274,11 +8773,13 @@
         </p:nvSpPr>
         <p:spPr>
           <a:xfrm>
-            <a:off x="507950" y="1120676"/>
-            <a:ext cx="8128099" cy="850702"/>
-          </a:xfrm>
-          <a:prstGeom prst="rect">
-            <a:avLst/>
+            <a:off x="507950" y="936575"/>
+            <a:ext cx="3937099" cy="1211163"/>
+          </a:xfrm>
+          <a:prstGeom prst="roundRect">
+            <a:avLst>
+              <a:gd name="adj" fmla="val 6291"/>
+            </a:avLst>
           </a:prstGeom>
           <a:solidFill>
             <a:srgbClr val="FFFFFF"/>
@@ -8304,8 +8805,296 @@
         </p:nvSpPr>
         <p:spPr>
           <a:xfrm>
-            <a:off x="546050" y="1120676"/>
-            <a:ext cx="0" cy="850702"/>
+            <a:off x="507950" y="960388"/>
+            <a:ext cx="3937099" cy="0"/>
+          </a:xfrm>
+          <a:prstGeom prst="line">
+            <a:avLst/>
+          </a:prstGeom>
+          <a:noFill/>
+          <a:ln w="47625">
+            <a:solidFill>
+              <a:srgbClr val="277884"/>
+            </a:solidFill>
+            <a:prstDash val="solid"/>
+          </a:ln>
+        </p:spPr>
+      </p:sp>
+      <p:sp>
+        <p:nvSpPr>
+          <p:cNvPr id="5" name="Text 3"/>
+          <p:cNvSpPr/>
+          <p:nvPr/>
+        </p:nvSpPr>
+        <p:spPr>
+          <a:xfrm>
+            <a:off x="685651" y="1161901"/>
+            <a:ext cx="3653332" cy="219075"/>
+          </a:xfrm>
+          <a:prstGeom prst="rect">
+            <a:avLst/>
+          </a:prstGeom>
+          <a:noFill/>
+          <a:ln/>
+        </p:spPr>
+        <p:txBody>
+          <a:bodyPr wrap="square" lIns="0" tIns="0" rIns="0" bIns="0" rtlCol="0" anchor="t"/>
+          <a:lstStyle/>
+          <a:p>
+            <a:pPr algn="l" indent="0" marL="0">
+              <a:spcAft>
+                <a:spcPts val="800"/>
+              </a:spcAft>
+              <a:buNone/>
+            </a:pPr>
+            <a:r>
+              <a:rPr lang="en-US" sz="1500" b="1" dirty="0">
+                <a:solidFill>
+                  <a:srgbClr val="277884"/>
+                </a:solidFill>
+                <a:latin typeface="Arial" pitchFamily="34" charset="0"/>
+                <a:ea typeface="Arial" pitchFamily="34" charset="-122"/>
+                <a:cs typeface="Arial" pitchFamily="34" charset="-120"/>
+              </a:rPr>
+              <a:t>Before</a:t>
+            </a:r>
+            <a:endParaRPr lang="en-US" sz="1500" dirty="0"/>
+          </a:p>
+        </p:txBody>
+      </p:sp>
+      <p:sp>
+        <p:nvSpPr>
+          <p:cNvPr id="6" name="Text 4"/>
+          <p:cNvSpPr/>
+          <p:nvPr/>
+        </p:nvSpPr>
+        <p:spPr>
+          <a:xfrm>
+            <a:off x="685651" y="1482477"/>
+            <a:ext cx="3653332" cy="243780"/>
+          </a:xfrm>
+          <a:prstGeom prst="rect">
+            <a:avLst/>
+          </a:prstGeom>
+          <a:noFill/>
+          <a:ln/>
+        </p:spPr>
+        <p:txBody>
+          <a:bodyPr wrap="square" lIns="0" tIns="0" rIns="0" bIns="0" rtlCol="0" anchor="t"/>
+          <a:lstStyle/>
+          <a:p>
+            <a:pPr algn="l" indent="0" marL="0">
+              <a:lnSpc>
+                <a:spcPts val="1920"/>
+              </a:lnSpc>
+              <a:buNone/>
+            </a:pPr>
+            <a:r>
+              <a:rPr lang="en-US" sz="1200" dirty="0">
+                <a:solidFill>
+                  <a:srgbClr val="2C3E50"/>
+                </a:solidFill>
+                <a:latin typeface="Arial" pitchFamily="34" charset="0"/>
+                <a:ea typeface="Arial" pitchFamily="34" charset="-122"/>
+                <a:cs typeface="Arial" pitchFamily="34" charset="-120"/>
+              </a:rPr>
+              <a:t>Dedicated haiku reviewer — cheap, fast</a:t>
+            </a:r>
+            <a:endParaRPr lang="en-US" sz="1200" dirty="0"/>
+          </a:p>
+        </p:txBody>
+      </p:sp>
+      <p:sp>
+        <p:nvSpPr>
+          <p:cNvPr id="7" name="Text 5"/>
+          <p:cNvSpPr/>
+          <p:nvPr/>
+        </p:nvSpPr>
+        <p:spPr>
+          <a:xfrm>
+            <a:off x="4698950" y="936575"/>
+            <a:ext cx="3937099" cy="1211163"/>
+          </a:xfrm>
+          <a:prstGeom prst="roundRect">
+            <a:avLst>
+              <a:gd name="adj" fmla="val 6291"/>
+            </a:avLst>
+          </a:prstGeom>
+          <a:solidFill>
+            <a:srgbClr val="FFFFFF"/>
+          </a:solidFill>
+          <a:ln/>
+        </p:spPr>
+        <p:txBody>
+          <a:bodyPr wrap="square" rtlCol="0" anchor="ctr"/>
+          <a:lstStyle/>
+          <a:p>
+            <a:pPr indent="0" marL="0">
+              <a:buNone/>
+            </a:pPr>
+            <a:endParaRPr lang="en-US" dirty="0"/>
+          </a:p>
+        </p:txBody>
+      </p:sp>
+      <p:sp>
+        <p:nvSpPr>
+          <p:cNvPr id="8" name="Shape 6"/>
+          <p:cNvSpPr/>
+          <p:nvPr/>
+        </p:nvSpPr>
+        <p:spPr>
+          <a:xfrm>
+            <a:off x="4698950" y="960388"/>
+            <a:ext cx="3937099" cy="0"/>
+          </a:xfrm>
+          <a:prstGeom prst="line">
+            <a:avLst/>
+          </a:prstGeom>
+          <a:noFill/>
+          <a:ln w="47625">
+            <a:solidFill>
+              <a:srgbClr val="277884"/>
+            </a:solidFill>
+            <a:prstDash val="solid"/>
+          </a:ln>
+        </p:spPr>
+      </p:sp>
+      <p:sp>
+        <p:nvSpPr>
+          <p:cNvPr id="9" name="Text 7"/>
+          <p:cNvSpPr/>
+          <p:nvPr/>
+        </p:nvSpPr>
+        <p:spPr>
+          <a:xfrm>
+            <a:off x="4876651" y="1161901"/>
+            <a:ext cx="3653332" cy="219075"/>
+          </a:xfrm>
+          <a:prstGeom prst="rect">
+            <a:avLst/>
+          </a:prstGeom>
+          <a:noFill/>
+          <a:ln/>
+        </p:spPr>
+        <p:txBody>
+          <a:bodyPr wrap="square" lIns="0" tIns="0" rIns="0" bIns="0" rtlCol="0" anchor="t"/>
+          <a:lstStyle/>
+          <a:p>
+            <a:pPr algn="l" indent="0" marL="0">
+              <a:spcAft>
+                <a:spcPts val="800"/>
+              </a:spcAft>
+              <a:buNone/>
+            </a:pPr>
+            <a:r>
+              <a:rPr lang="en-US" sz="1500" b="1" dirty="0">
+                <a:solidFill>
+                  <a:srgbClr val="277884"/>
+                </a:solidFill>
+                <a:latin typeface="Arial" pitchFamily="34" charset="0"/>
+                <a:ea typeface="Arial" pitchFamily="34" charset="-122"/>
+                <a:cs typeface="Arial" pitchFamily="34" charset="-120"/>
+              </a:rPr>
+              <a:t>After</a:t>
+            </a:r>
+            <a:endParaRPr lang="en-US" sz="1500" dirty="0"/>
+          </a:p>
+        </p:txBody>
+      </p:sp>
+      <p:sp>
+        <p:nvSpPr>
+          <p:cNvPr id="10" name="Text 8"/>
+          <p:cNvSpPr/>
+          <p:nvPr/>
+        </p:nvSpPr>
+        <p:spPr>
+          <a:xfrm>
+            <a:off x="4876651" y="1482477"/>
+            <a:ext cx="3653332" cy="487561"/>
+          </a:xfrm>
+          <a:prstGeom prst="rect">
+            <a:avLst/>
+          </a:prstGeom>
+          <a:noFill/>
+          <a:ln/>
+        </p:spPr>
+        <p:txBody>
+          <a:bodyPr wrap="square" lIns="0" tIns="0" rIns="0" bIns="0" rtlCol="0" anchor="t"/>
+          <a:lstStyle/>
+          <a:p>
+            <a:pPr algn="l" indent="0" marL="0">
+              <a:lnSpc>
+                <a:spcPts val="1920"/>
+              </a:lnSpc>
+              <a:buNone/>
+            </a:pPr>
+            <a:r>
+              <a:rPr lang="en-US" sz="1200" dirty="0">
+                <a:solidFill>
+                  <a:srgbClr val="2C3E50"/>
+                </a:solidFill>
+                <a:latin typeface="Arial" pitchFamily="34" charset="0"/>
+                <a:ea typeface="Arial" pitchFamily="34" charset="-122"/>
+                <a:cs typeface="Arial" pitchFamily="34" charset="-120"/>
+              </a:rPr>
+              <a:t>Fresh opus instance, adversarial prompt, automated loop</a:t>
+            </a:r>
+            <a:endParaRPr lang="en-US" sz="1200" dirty="0"/>
+          </a:p>
+        </p:txBody>
+      </p:sp>
+      <p:sp>
+        <p:nvSpPr>
+          <p:cNvPr id="11" name="Text 9"/>
+          <p:cNvSpPr/>
+          <p:nvPr/>
+        </p:nvSpPr>
+        <p:spPr>
+          <a:xfrm>
+            <a:off x="507950" y="2325439"/>
+            <a:ext cx="8290661" cy="200025"/>
+          </a:xfrm>
+          <a:prstGeom prst="rect">
+            <a:avLst/>
+          </a:prstGeom>
+          <a:noFill/>
+          <a:ln/>
+        </p:spPr>
+        <p:txBody>
+          <a:bodyPr wrap="square" lIns="0" tIns="0" rIns="0" bIns="0" rtlCol="0" anchor="t"/>
+          <a:lstStyle/>
+          <a:p>
+            <a:pPr algn="l" indent="0" marL="0">
+              <a:spcAft>
+                <a:spcPts val="1000"/>
+              </a:spcAft>
+              <a:buNone/>
+            </a:pPr>
+            <a:r>
+              <a:rPr lang="en-US" sz="1300" dirty="0">
+                <a:solidFill>
+                  <a:srgbClr val="2C3E50"/>
+                </a:solidFill>
+                <a:latin typeface="Arial" pitchFamily="34" charset="0"/>
+                <a:ea typeface="Arial" pitchFamily="34" charset="-122"/>
+                <a:cs typeface="Arial" pitchFamily="34" charset="-120"/>
+              </a:rPr>
+              <a:t>Problem: Only 'checkbox' reviews, no real quality insight</a:t>
+            </a:r>
+            <a:endParaRPr lang="en-US" sz="1300" dirty="0"/>
+          </a:p>
+        </p:txBody>
+      </p:sp>
+      <p:sp>
+        <p:nvSpPr>
+          <p:cNvPr id="12" name="Shape 10"/>
+          <p:cNvSpPr/>
+          <p:nvPr/>
+        </p:nvSpPr>
+        <p:spPr>
+          <a:xfrm>
+            <a:off x="546050" y="2652415"/>
+            <a:ext cx="0" cy="482501"/>
           </a:xfrm>
           <a:prstGeom prst="line">
             <a:avLst/>
@@ -8321,14 +9110,14 @@
       </p:sp>
       <p:sp>
         <p:nvSpPr>
-          <p:cNvPr id="5" name="Text 3"/>
-          <p:cNvSpPr/>
-          <p:nvPr/>
-        </p:nvSpPr>
-        <p:spPr>
-          <a:xfrm>
-            <a:off x="812750" y="1298377"/>
-            <a:ext cx="7746593" cy="219075"/>
+          <p:cNvPr id="13" name="Text 11"/>
+          <p:cNvSpPr/>
+          <p:nvPr/>
+        </p:nvSpPr>
+        <p:spPr>
+          <a:xfrm>
+            <a:off x="787301" y="2779365"/>
+            <a:ext cx="7798510" cy="228600"/>
           </a:xfrm>
           <a:prstGeom prst="rect">
             <a:avLst/>
@@ -8341,52 +9130,13 @@
           <a:lstStyle/>
           <a:p>
             <a:pPr algn="l" indent="0" marL="0">
-              <a:spcAft>
-                <a:spcPts val="600"/>
-              </a:spcAft>
-              <a:buNone/>
-            </a:pPr>
-            <a:r>
-              <a:rPr lang="en-US" sz="1500" b="1" dirty="0">
-                <a:solidFill>
-                  <a:srgbClr val="277884"/>
-                </a:solidFill>
-                <a:latin typeface="Arial" pitchFamily="34" charset="0"/>
-                <a:ea typeface="Arial" pitchFamily="34" charset="-122"/>
-                <a:cs typeface="Arial" pitchFamily="34" charset="-120"/>
-              </a:rPr>
-              <a:t>Models improve → things that failed before now work</a:t>
-            </a:r>
-            <a:endParaRPr lang="en-US" sz="1500" dirty="0"/>
-          </a:p>
-        </p:txBody>
-      </p:sp>
-      <p:sp>
-        <p:nvSpPr>
-          <p:cNvPr id="6" name="Text 4"/>
-          <p:cNvSpPr/>
-          <p:nvPr/>
-        </p:nvSpPr>
-        <p:spPr>
-          <a:xfrm>
-            <a:off x="812750" y="1593652"/>
-            <a:ext cx="7746593" cy="200025"/>
-          </a:xfrm>
-          <a:prstGeom prst="rect">
-            <a:avLst/>
-          </a:prstGeom>
-          <a:noFill/>
-          <a:ln/>
-        </p:spPr>
-        <p:txBody>
-          <a:bodyPr wrap="square" lIns="0" tIns="0" rIns="0" bIns="0" rtlCol="0" anchor="t"/>
-          <a:lstStyle/>
-          <a:p>
-            <a:pPr algn="l" indent="0" marL="0">
-              <a:buNone/>
-            </a:pPr>
-            <a:r>
-              <a:rPr lang="en-US" sz="1300" dirty="0">
+              <a:lnSpc>
+                <a:spcPts val="1800"/>
+              </a:lnSpc>
+              <a:buNone/>
+            </a:pPr>
+            <a:r>
+              <a:rPr lang="en-US" sz="1200" b="1" dirty="0">
                 <a:solidFill>
                   <a:srgbClr val="2C3E50"/>
                 </a:solidFill>
@@ -8394,143 +9144,9 @@
                 <a:ea typeface="Arial" pitchFamily="34" charset="-122"/>
                 <a:cs typeface="Arial" pitchFamily="34" charset="-120"/>
               </a:rPr>
-              <a:t>Example: agent self-review improved dramatically with Sonnet 4</a:t>
-            </a:r>
-            <a:endParaRPr lang="en-US" sz="1300" dirty="0"/>
-          </a:p>
-        </p:txBody>
-      </p:sp>
-      <p:sp>
-        <p:nvSpPr>
-          <p:cNvPr id="7" name="Text 5"/>
-          <p:cNvSpPr/>
-          <p:nvPr/>
-        </p:nvSpPr>
-        <p:spPr>
-          <a:xfrm>
-            <a:off x="507950" y="2149078"/>
-            <a:ext cx="8128099" cy="850702"/>
-          </a:xfrm>
-          <a:prstGeom prst="rect">
-            <a:avLst/>
-          </a:prstGeom>
-          <a:solidFill>
-            <a:srgbClr val="FFFFFF"/>
-          </a:solidFill>
-          <a:ln/>
-        </p:spPr>
-        <p:txBody>
-          <a:bodyPr wrap="square" rtlCol="0" anchor="ctr"/>
-          <a:lstStyle/>
-          <a:p>
-            <a:pPr indent="0" marL="0">
-              <a:buNone/>
-            </a:pPr>
-            <a:endParaRPr lang="en-US" dirty="0"/>
-          </a:p>
-        </p:txBody>
-      </p:sp>
-      <p:sp>
-        <p:nvSpPr>
-          <p:cNvPr id="8" name="Shape 6"/>
-          <p:cNvSpPr/>
-          <p:nvPr/>
-        </p:nvSpPr>
-        <p:spPr>
-          <a:xfrm>
-            <a:off x="546050" y="2149078"/>
-            <a:ext cx="0" cy="850702"/>
-          </a:xfrm>
-          <a:prstGeom prst="line">
-            <a:avLst/>
-          </a:prstGeom>
-          <a:noFill/>
-          <a:ln w="76200">
-            <a:solidFill>
-              <a:srgbClr val="277884"/>
-            </a:solidFill>
-            <a:prstDash val="solid"/>
-          </a:ln>
-        </p:spPr>
-      </p:sp>
-      <p:sp>
-        <p:nvSpPr>
-          <p:cNvPr id="9" name="Text 7"/>
-          <p:cNvSpPr/>
-          <p:nvPr/>
-        </p:nvSpPr>
-        <p:spPr>
-          <a:xfrm>
-            <a:off x="812750" y="2326779"/>
-            <a:ext cx="7746593" cy="219075"/>
-          </a:xfrm>
-          <a:prstGeom prst="rect">
-            <a:avLst/>
-          </a:prstGeom>
-          <a:noFill/>
-          <a:ln/>
-        </p:spPr>
-        <p:txBody>
-          <a:bodyPr wrap="square" lIns="0" tIns="0" rIns="0" bIns="0" rtlCol="0" anchor="t"/>
-          <a:lstStyle/>
-          <a:p>
-            <a:pPr algn="l" indent="0" marL="0">
-              <a:spcAft>
-                <a:spcPts val="600"/>
-              </a:spcAft>
-              <a:buNone/>
-            </a:pPr>
-            <a:r>
-              <a:rPr lang="en-US" sz="1500" b="1" dirty="0">
-                <a:solidFill>
-                  <a:srgbClr val="277884"/>
-                </a:solidFill>
-                <a:latin typeface="Arial" pitchFamily="34" charset="0"/>
-                <a:ea typeface="Arial" pitchFamily="34" charset="-122"/>
-                <a:cs typeface="Arial" pitchFamily="34" charset="-120"/>
-              </a:rPr>
-              <a:t>You learn → spot patterns, eliminate waste, encode knowledge</a:t>
-            </a:r>
-            <a:endParaRPr lang="en-US" sz="1500" dirty="0"/>
-          </a:p>
-        </p:txBody>
-      </p:sp>
-      <p:sp>
-        <p:nvSpPr>
-          <p:cNvPr id="10" name="Text 8"/>
-          <p:cNvSpPr/>
-          <p:nvPr/>
-        </p:nvSpPr>
-        <p:spPr>
-          <a:xfrm>
-            <a:off x="812750" y="2622054"/>
-            <a:ext cx="7746593" cy="200025"/>
-          </a:xfrm>
-          <a:prstGeom prst="rect">
-            <a:avLst/>
-          </a:prstGeom>
-          <a:noFill/>
-          <a:ln/>
-        </p:spPr>
-        <p:txBody>
-          <a:bodyPr wrap="square" lIns="0" tIns="0" rIns="0" bIns="0" rtlCol="0" anchor="t"/>
-          <a:lstStyle/>
-          <a:p>
-            <a:pPr algn="l" indent="0" marL="0">
-              <a:buNone/>
-            </a:pPr>
-            <a:r>
-              <a:rPr lang="en-US" sz="1300" dirty="0">
-                <a:solidFill>
-                  <a:srgbClr val="2C3E50"/>
-                </a:solidFill>
-                <a:latin typeface="Arial" pitchFamily="34" charset="0"/>
-                <a:ea typeface="Arial" pitchFamily="34" charset="-122"/>
-                <a:cs typeface="Arial" pitchFamily="34" charset="-120"/>
-              </a:rPr>
-              <a:t>Each project makes the next one faster</a:t>
-            </a:r>
-            <a:endParaRPr lang="en-US" sz="1300" dirty="0"/>
+              <a:t>Reviewers need: (a) fresh eyes (b) cognitive depth (c) automated iteration</a:t>
+            </a:r>
+            <a:endParaRPr lang="en-US" sz="1200" dirty="0"/>
           </a:p>
         </p:txBody>
       </p:sp>
@@ -8574,8 +9190,8 @@
         </p:nvSpPr>
         <p:spPr>
           <a:xfrm>
-            <a:off x="507950" y="406301"/>
-            <a:ext cx="8290661" cy="371475"/>
+            <a:off x="507950" y="381000"/>
+            <a:ext cx="8290661" cy="323850"/>
           </a:xfrm>
           <a:prstGeom prst="rect">
             <a:avLst/>
@@ -8589,7 +9205,7 @@
           <a:p>
             <a:pPr algn="l" indent="0" marL="0">
               <a:spcBef>
-                <a:spcPts val="3200"/>
+                <a:spcPts val="3000"/>
               </a:spcBef>
               <a:spcAft>
                 <a:spcPts val="1600"/>
@@ -8597,7 +9213,7 @@
               <a:buNone/>
             </a:pPr>
             <a:r>
-              <a:rPr lang="en-US" sz="2600" b="1" dirty="0">
+              <a:rPr lang="en-US" sz="2200" b="1" dirty="0">
                 <a:solidFill>
                   <a:srgbClr val="1C2833"/>
                 </a:solidFill>
@@ -8605,9 +9221,9 @@
                 <a:ea typeface="Arial" pitchFamily="34" charset="-122"/>
                 <a:cs typeface="Arial" pitchFamily="34" charset="-120"/>
               </a:rPr>
-              <a:t>Key Takeaways</a:t>
-            </a:r>
-            <a:endParaRPr lang="en-US" sz="2600" dirty="0"/>
+              <a:t>Evolution: Skills as the Scaling Lever</a:t>
+            </a:r>
+            <a:endParaRPr lang="en-US" sz="2200" dirty="0"/>
           </a:p>
         </p:txBody>
       </p:sp>
@@ -8619,28 +9235,124 @@
         </p:nvSpPr>
         <p:spPr>
           <a:xfrm>
-            <a:off x="507950" y="980926"/>
-            <a:ext cx="8128099" cy="2364879"/>
-          </a:xfrm>
-          <a:prstGeom prst="rect">
-            <a:avLst/>
-          </a:prstGeom>
-          <a:noFill/>
-          <a:ln/>
-        </p:spPr>
-        <p:txBody>
-          <a:bodyPr wrap="square" lIns="152400" tIns="0" rIns="0" bIns="0" rtlCol="0" anchor="t"/>
-          <a:lstStyle/>
-          <a:p>
-            <a:pPr algn="l" marL="152400" indent="-152400">
+            <a:off x="507950" y="908000"/>
+            <a:ext cx="3937099" cy="1211163"/>
+          </a:xfrm>
+          <a:prstGeom prst="roundRect">
+            <a:avLst>
+              <a:gd name="adj" fmla="val 6291"/>
+            </a:avLst>
+          </a:prstGeom>
+          <a:solidFill>
+            <a:srgbClr val="FFFFFF"/>
+          </a:solidFill>
+          <a:ln/>
+        </p:spPr>
+        <p:txBody>
+          <a:bodyPr wrap="square" rtlCol="0" anchor="ctr"/>
+          <a:lstStyle/>
+          <a:p>
+            <a:pPr indent="0" marL="0">
+              <a:buNone/>
+            </a:pPr>
+            <a:endParaRPr lang="en-US" dirty="0"/>
+          </a:p>
+        </p:txBody>
+      </p:sp>
+      <p:sp>
+        <p:nvSpPr>
+          <p:cNvPr id="4" name="Shape 2"/>
+          <p:cNvSpPr/>
+          <p:nvPr/>
+        </p:nvSpPr>
+        <p:spPr>
+          <a:xfrm>
+            <a:off x="507950" y="931813"/>
+            <a:ext cx="3937099" cy="0"/>
+          </a:xfrm>
+          <a:prstGeom prst="line">
+            <a:avLst/>
+          </a:prstGeom>
+          <a:noFill/>
+          <a:ln w="47625">
+            <a:solidFill>
+              <a:srgbClr val="277884"/>
+            </a:solidFill>
+            <a:prstDash val="solid"/>
+          </a:ln>
+        </p:spPr>
+      </p:sp>
+      <p:sp>
+        <p:nvSpPr>
+          <p:cNvPr id="5" name="Text 3"/>
+          <p:cNvSpPr/>
+          <p:nvPr/>
+        </p:nvSpPr>
+        <p:spPr>
+          <a:xfrm>
+            <a:off x="685651" y="1133326"/>
+            <a:ext cx="3653332" cy="219075"/>
+          </a:xfrm>
+          <a:prstGeom prst="rect">
+            <a:avLst/>
+          </a:prstGeom>
+          <a:noFill/>
+          <a:ln/>
+        </p:spPr>
+        <p:txBody>
+          <a:bodyPr wrap="square" lIns="0" tIns="0" rIns="0" bIns="0" rtlCol="0" anchor="t"/>
+          <a:lstStyle/>
+          <a:p>
+            <a:pPr algn="l" indent="0" marL="0">
+              <a:spcAft>
+                <a:spcPts val="800"/>
+              </a:spcAft>
+              <a:buNone/>
+            </a:pPr>
+            <a:r>
+              <a:rPr lang="en-US" sz="1500" b="1" dirty="0">
+                <a:solidFill>
+                  <a:srgbClr val="277884"/>
+                </a:solidFill>
+                <a:latin typeface="Arial" pitchFamily="34" charset="0"/>
+                <a:ea typeface="Arial" pitchFamily="34" charset="-122"/>
+                <a:cs typeface="Arial" pitchFamily="34" charset="-120"/>
+              </a:rPr>
+              <a:t>Before</a:t>
+            </a:r>
+            <a:endParaRPr lang="en-US" sz="1500" dirty="0"/>
+          </a:p>
+        </p:txBody>
+      </p:sp>
+      <p:sp>
+        <p:nvSpPr>
+          <p:cNvPr id="6" name="Text 4"/>
+          <p:cNvSpPr/>
+          <p:nvPr/>
+        </p:nvSpPr>
+        <p:spPr>
+          <a:xfrm>
+            <a:off x="685651" y="1453902"/>
+            <a:ext cx="3653332" cy="487561"/>
+          </a:xfrm>
+          <a:prstGeom prst="rect">
+            <a:avLst/>
+          </a:prstGeom>
+          <a:noFill/>
+          <a:ln/>
+        </p:spPr>
+        <p:txBody>
+          <a:bodyPr wrap="square" lIns="0" tIns="0" rIns="0" bIns="0" rtlCol="0" anchor="t"/>
+          <a:lstStyle/>
+          <a:p>
+            <a:pPr algn="l" indent="0" marL="0">
               <a:lnSpc>
-                <a:spcPts val="2660"/>
+                <a:spcPts val="1920"/>
               </a:lnSpc>
-              <a:buSzPct val="100000"/>
-              <a:buChar char="•"/>
-            </a:pPr>
-            <a:r>
-              <a:rPr lang="en-US" sz="1400" dirty="0">
+              <a:buNone/>
+            </a:pPr>
+            <a:r>
+              <a:rPr lang="en-US" sz="1200" dirty="0">
                 <a:solidFill>
                   <a:srgbClr val="2C3E50"/>
                 </a:solidFill>
@@ -8648,20 +9360,138 @@
                 <a:ea typeface="Arial" pitchFamily="34" charset="-122"/>
                 <a:cs typeface="Arial" pitchFamily="34" charset="-120"/>
               </a:rPr>
-              <a:t>4-10x productivity increase — not a typo</a:t>
-            </a:r>
-            <a:endParaRPr lang="en-US" sz="1400" dirty="0"/>
-          </a:p>
-          <a:p>
-            <a:pPr algn="l" marL="152400" indent="-152400">
+              <a:t>Everything in agent definitions (long, unwieldy prompts)</a:t>
+            </a:r>
+            <a:endParaRPr lang="en-US" sz="1200" dirty="0"/>
+          </a:p>
+        </p:txBody>
+      </p:sp>
+      <p:sp>
+        <p:nvSpPr>
+          <p:cNvPr id="7" name="Text 5"/>
+          <p:cNvSpPr/>
+          <p:nvPr/>
+        </p:nvSpPr>
+        <p:spPr>
+          <a:xfrm>
+            <a:off x="4698950" y="908000"/>
+            <a:ext cx="3937099" cy="1211163"/>
+          </a:xfrm>
+          <a:prstGeom prst="roundRect">
+            <a:avLst>
+              <a:gd name="adj" fmla="val 6291"/>
+            </a:avLst>
+          </a:prstGeom>
+          <a:solidFill>
+            <a:srgbClr val="FFFFFF"/>
+          </a:solidFill>
+          <a:ln/>
+        </p:spPr>
+        <p:txBody>
+          <a:bodyPr wrap="square" rtlCol="0" anchor="ctr"/>
+          <a:lstStyle/>
+          <a:p>
+            <a:pPr indent="0" marL="0">
+              <a:buNone/>
+            </a:pPr>
+            <a:endParaRPr lang="en-US" dirty="0"/>
+          </a:p>
+        </p:txBody>
+      </p:sp>
+      <p:sp>
+        <p:nvSpPr>
+          <p:cNvPr id="8" name="Shape 6"/>
+          <p:cNvSpPr/>
+          <p:nvPr/>
+        </p:nvSpPr>
+        <p:spPr>
+          <a:xfrm>
+            <a:off x="4698950" y="931813"/>
+            <a:ext cx="3937099" cy="0"/>
+          </a:xfrm>
+          <a:prstGeom prst="line">
+            <a:avLst/>
+          </a:prstGeom>
+          <a:noFill/>
+          <a:ln w="47625">
+            <a:solidFill>
+              <a:srgbClr val="277884"/>
+            </a:solidFill>
+            <a:prstDash val="solid"/>
+          </a:ln>
+        </p:spPr>
+      </p:sp>
+      <p:sp>
+        <p:nvSpPr>
+          <p:cNvPr id="9" name="Text 7"/>
+          <p:cNvSpPr/>
+          <p:nvPr/>
+        </p:nvSpPr>
+        <p:spPr>
+          <a:xfrm>
+            <a:off x="4876651" y="1133326"/>
+            <a:ext cx="3653332" cy="219075"/>
+          </a:xfrm>
+          <a:prstGeom prst="rect">
+            <a:avLst/>
+          </a:prstGeom>
+          <a:noFill/>
+          <a:ln/>
+        </p:spPr>
+        <p:txBody>
+          <a:bodyPr wrap="square" lIns="0" tIns="0" rIns="0" bIns="0" rtlCol="0" anchor="t"/>
+          <a:lstStyle/>
+          <a:p>
+            <a:pPr algn="l" indent="0" marL="0">
+              <a:spcAft>
+                <a:spcPts val="800"/>
+              </a:spcAft>
+              <a:buNone/>
+            </a:pPr>
+            <a:r>
+              <a:rPr lang="en-US" sz="1500" b="1" dirty="0">
+                <a:solidFill>
+                  <a:srgbClr val="277884"/>
+                </a:solidFill>
+                <a:latin typeface="Arial" pitchFamily="34" charset="0"/>
+                <a:ea typeface="Arial" pitchFamily="34" charset="-122"/>
+                <a:cs typeface="Arial" pitchFamily="34" charset="-120"/>
+              </a:rPr>
+              <a:t>After</a:t>
+            </a:r>
+            <a:endParaRPr lang="en-US" sz="1500" dirty="0"/>
+          </a:p>
+        </p:txBody>
+      </p:sp>
+      <p:sp>
+        <p:nvSpPr>
+          <p:cNvPr id="10" name="Text 8"/>
+          <p:cNvSpPr/>
+          <p:nvPr/>
+        </p:nvSpPr>
+        <p:spPr>
+          <a:xfrm>
+            <a:off x="4876651" y="1453902"/>
+            <a:ext cx="3653332" cy="243780"/>
+          </a:xfrm>
+          <a:prstGeom prst="rect">
+            <a:avLst/>
+          </a:prstGeom>
+          <a:noFill/>
+          <a:ln/>
+        </p:spPr>
+        <p:txBody>
+          <a:bodyPr wrap="square" lIns="0" tIns="0" rIns="0" bIns="0" rtlCol="0" anchor="t"/>
+          <a:lstStyle/>
+          <a:p>
+            <a:pPr algn="l" indent="0" marL="0">
               <a:lnSpc>
-                <a:spcPts val="2660"/>
+                <a:spcPts val="1920"/>
               </a:lnSpc>
-              <a:buSzPct val="100000"/>
-              <a:buChar char="•"/>
-            </a:pPr>
-            <a:r>
-              <a:rPr lang="en-US" sz="1400" dirty="0">
+              <a:buNone/>
+            </a:pPr>
+            <a:r>
+              <a:rPr lang="en-US" sz="1200" dirty="0">
                 <a:solidFill>
                   <a:srgbClr val="2C3E50"/>
                 </a:solidFill>
@@ -8669,20 +9499,41 @@
                 <a:ea typeface="Arial" pitchFamily="34" charset="-122"/>
                 <a:cs typeface="Arial" pitchFamily="34" charset="-120"/>
               </a:rPr>
-              <a:t>Quality goes UP — rigorous automated review &gt; manual coding</a:t>
-            </a:r>
-            <a:endParaRPr lang="en-US" sz="1400" dirty="0"/>
-          </a:p>
-          <a:p>
-            <a:pPr algn="l" marL="152400" indent="-152400">
-              <a:lnSpc>
-                <a:spcPts val="2660"/>
-              </a:lnSpc>
-              <a:buSzPct val="100000"/>
-              <a:buChar char="•"/>
-            </a:pPr>
-            <a:r>
-              <a:rPr lang="en-US" sz="1400" dirty="0">
+              <a:t>Lightweight agents + injectable domain expertise</a:t>
+            </a:r>
+            <a:endParaRPr lang="en-US" sz="1200" dirty="0"/>
+          </a:p>
+        </p:txBody>
+      </p:sp>
+      <p:sp>
+        <p:nvSpPr>
+          <p:cNvPr id="11" name="Text 9"/>
+          <p:cNvSpPr/>
+          <p:nvPr/>
+        </p:nvSpPr>
+        <p:spPr>
+          <a:xfrm>
+            <a:off x="507950" y="2296864"/>
+            <a:ext cx="8290661" cy="200025"/>
+          </a:xfrm>
+          <a:prstGeom prst="rect">
+            <a:avLst/>
+          </a:prstGeom>
+          <a:noFill/>
+          <a:ln/>
+        </p:spPr>
+        <p:txBody>
+          <a:bodyPr wrap="square" lIns="0" tIns="0" rIns="0" bIns="0" rtlCol="0" anchor="t"/>
+          <a:lstStyle/>
+          <a:p>
+            <a:pPr algn="l" indent="0" marL="0">
+              <a:spcAft>
+                <a:spcPts val="1000"/>
+              </a:spcAft>
+              <a:buNone/>
+            </a:pPr>
+            <a:r>
+              <a:rPr lang="en-US" sz="1300" dirty="0">
                 <a:solidFill>
                   <a:srgbClr val="2C3E50"/>
                 </a:solidFill>
@@ -8690,20 +9541,61 @@
                 <a:ea typeface="Arial" pitchFamily="34" charset="-122"/>
                 <a:cs typeface="Arial" pitchFamily="34" charset="-120"/>
               </a:rPr>
-              <a:t>Claude Code = orchestrator, not code generator</a:t>
-            </a:r>
-            <a:endParaRPr lang="en-US" sz="1400" dirty="0"/>
-          </a:p>
-          <a:p>
-            <a:pPr algn="l" marL="152400" indent="-152400">
-              <a:lnSpc>
-                <a:spcPts val="2660"/>
-              </a:lnSpc>
-              <a:buSzPct val="100000"/>
-              <a:buChar char="•"/>
-            </a:pPr>
-            <a:r>
-              <a:rPr lang="en-US" sz="1400" dirty="0">
+              <a:t>Same skills reused across 3 projects</a:t>
+            </a:r>
+            <a:endParaRPr lang="en-US" sz="1300" dirty="0"/>
+          </a:p>
+        </p:txBody>
+      </p:sp>
+      <p:sp>
+        <p:nvSpPr>
+          <p:cNvPr id="12" name="Shape 10"/>
+          <p:cNvSpPr/>
+          <p:nvPr/>
+        </p:nvSpPr>
+        <p:spPr>
+          <a:xfrm>
+            <a:off x="546050" y="2623840"/>
+            <a:ext cx="0" cy="453926"/>
+          </a:xfrm>
+          <a:prstGeom prst="line">
+            <a:avLst/>
+          </a:prstGeom>
+          <a:noFill/>
+          <a:ln w="76200">
+            <a:solidFill>
+              <a:srgbClr val="277884"/>
+            </a:solidFill>
+            <a:prstDash val="solid"/>
+          </a:ln>
+        </p:spPr>
+      </p:sp>
+      <p:sp>
+        <p:nvSpPr>
+          <p:cNvPr id="13" name="Text 11"/>
+          <p:cNvSpPr/>
+          <p:nvPr/>
+        </p:nvSpPr>
+        <p:spPr>
+          <a:xfrm>
+            <a:off x="787301" y="2750790"/>
+            <a:ext cx="7798510" cy="200025"/>
+          </a:xfrm>
+          <a:prstGeom prst="rect">
+            <a:avLst/>
+          </a:prstGeom>
+          <a:noFill/>
+          <a:ln/>
+        </p:spPr>
+        <p:txBody>
+          <a:bodyPr wrap="square" lIns="0" tIns="0" rIns="0" bIns="0" rtlCol="0" anchor="t"/>
+          <a:lstStyle/>
+          <a:p>
+            <a:pPr algn="l" indent="0" marL="0">
+              <a:buNone/>
+            </a:pPr>
+            <a:r>
+              <a:rPr lang="en-US" sz="1300" b="1" dirty="0">
                 <a:solidFill>
                   <a:srgbClr val="2C3E50"/>
                 </a:solidFill>
@@ -8711,72 +9603,9 @@
                 <a:ea typeface="Arial" pitchFamily="34" charset="-122"/>
                 <a:cs typeface="Arial" pitchFamily="34" charset="-120"/>
               </a:rPr>
-              <a:t>Automated review loops save human time</a:t>
-            </a:r>
-            <a:endParaRPr lang="en-US" sz="1400" dirty="0"/>
-          </a:p>
-          <a:p>
-            <a:pPr algn="l" marL="152400" indent="-152400">
-              <a:lnSpc>
-                <a:spcPts val="2660"/>
-              </a:lnSpc>
-              <a:buSzPct val="100000"/>
-              <a:buChar char="•"/>
-            </a:pPr>
-            <a:r>
-              <a:rPr lang="en-US" sz="1400" dirty="0">
-                <a:solidFill>
-                  <a:srgbClr val="2C3E50"/>
-                </a:solidFill>
-                <a:latin typeface="Arial" pitchFamily="34" charset="0"/>
-                <a:ea typeface="Arial" pitchFamily="34" charset="-122"/>
-                <a:cs typeface="Arial" pitchFamily="34" charset="-120"/>
-              </a:rPr>
-              <a:t>Invest in skills (domain knowledge), not more agents</a:t>
-            </a:r>
-            <a:endParaRPr lang="en-US" sz="1400" dirty="0"/>
-          </a:p>
-          <a:p>
-            <a:pPr algn="l" marL="152400" indent="-152400">
-              <a:lnSpc>
-                <a:spcPts val="2660"/>
-              </a:lnSpc>
-              <a:buSzPct val="100000"/>
-              <a:buChar char="•"/>
-            </a:pPr>
-            <a:r>
-              <a:rPr lang="en-US" sz="1400" dirty="0">
-                <a:solidFill>
-                  <a:srgbClr val="2C3E50"/>
-                </a:solidFill>
-                <a:latin typeface="Arial" pitchFamily="34" charset="0"/>
-                <a:ea typeface="Arial" pitchFamily="34" charset="-122"/>
-                <a:cs typeface="Arial" pitchFamily="34" charset="-120"/>
-              </a:rPr>
-              <a:t>Budget 10% for tooling evolution</a:t>
-            </a:r>
-            <a:endParaRPr lang="en-US" sz="1400" dirty="0"/>
-          </a:p>
-          <a:p>
-            <a:pPr algn="l" marL="152400" indent="-152400">
-              <a:lnSpc>
-                <a:spcPts val="2660"/>
-              </a:lnSpc>
-              <a:buSzPct val="100000"/>
-              <a:buChar char="•"/>
-            </a:pPr>
-            <a:r>
-              <a:rPr lang="en-US" sz="1400" dirty="0">
-                <a:solidFill>
-                  <a:srgbClr val="2C3E50"/>
-                </a:solidFill>
-                <a:latin typeface="Arial" pitchFamily="34" charset="0"/>
-                <a:ea typeface="Arial" pitchFamily="34" charset="-122"/>
-                <a:cs typeface="Arial" pitchFamily="34" charset="-120"/>
-              </a:rPr>
-              <a:t>More constraints = more productivity</a:t>
-            </a:r>
-            <a:endParaRPr lang="en-US" sz="1400" dirty="0"/>
+              <a:t>New project bootstraps in hours, not days</a:t>
+            </a:r>
+            <a:endParaRPr lang="en-US" sz="1300" dirty="0"/>
           </a:p>
         </p:txBody>
       </p:sp>
@@ -8791,6 +9620,1312 @@
 <file path=ppt/slides/slide24.xml><?xml version="1.0" encoding="utf-8"?>
 <p:sld xmlns:a="http://schemas.openxmlformats.org/drawingml/2006/main" xmlns:r="http://schemas.openxmlformats.org/officeDocument/2006/relationships" xmlns:p="http://schemas.openxmlformats.org/presentationml/2006/main">
   <p:cSld name="Slide 24">
+    <p:bg>
+      <p:bgPr>
+        <a:solidFill>
+          <a:srgbClr val="F4F6F6"/>
+        </a:solidFill>
+      </p:bgPr>
+    </p:bg>
+    <p:spTree>
+      <p:nvGrpSpPr>
+        <p:cNvPr id="1" name=""/>
+        <p:cNvGrpSpPr/>
+        <p:nvPr/>
+      </p:nvGrpSpPr>
+      <p:grpSpPr>
+        <a:xfrm>
+          <a:off x="0" y="0"/>
+          <a:ext cx="0" cy="0"/>
+          <a:chOff x="0" y="0"/>
+          <a:chExt cx="0" cy="0"/>
+        </a:xfrm>
+      </p:grpSpPr>
+      <p:sp>
+        <p:nvSpPr>
+          <p:cNvPr id="2" name="Text 0"/>
+          <p:cNvSpPr/>
+          <p:nvPr/>
+        </p:nvSpPr>
+        <p:spPr>
+          <a:xfrm>
+            <a:off x="507950" y="457200"/>
+            <a:ext cx="8290661" cy="409575"/>
+          </a:xfrm>
+          <a:prstGeom prst="rect">
+            <a:avLst/>
+          </a:prstGeom>
+          <a:noFill/>
+          <a:ln/>
+        </p:spPr>
+        <p:txBody>
+          <a:bodyPr wrap="square" lIns="0" tIns="0" rIns="0" bIns="0" rtlCol="0" anchor="t"/>
+          <a:lstStyle/>
+          <a:p>
+            <a:pPr algn="l" indent="0" marL="0">
+              <a:spcBef>
+                <a:spcPts val="3600"/>
+              </a:spcBef>
+              <a:spcAft>
+                <a:spcPts val="200"/>
+              </a:spcAft>
+              <a:buNone/>
+            </a:pPr>
+            <a:r>
+              <a:rPr lang="en-US" sz="2800" b="1" dirty="0">
+                <a:solidFill>
+                  <a:srgbClr val="1C2833"/>
+                </a:solidFill>
+                <a:latin typeface="Arial" pitchFamily="34" charset="0"/>
+                <a:ea typeface="Arial" pitchFamily="34" charset="-122"/>
+                <a:cs typeface="Arial" pitchFamily="34" charset="-120"/>
+              </a:rPr>
+              <a:t>The Paradox</a:t>
+            </a:r>
+            <a:endParaRPr lang="en-US" sz="2800" dirty="0"/>
+          </a:p>
+        </p:txBody>
+      </p:sp>
+      <p:sp>
+        <p:nvSpPr>
+          <p:cNvPr id="3" name="Text 1"/>
+          <p:cNvSpPr/>
+          <p:nvPr/>
+        </p:nvSpPr>
+        <p:spPr>
+          <a:xfrm>
+            <a:off x="507950" y="892076"/>
+            <a:ext cx="8290661" cy="266700"/>
+          </a:xfrm>
+          <a:prstGeom prst="rect">
+            <a:avLst/>
+          </a:prstGeom>
+          <a:noFill/>
+          <a:ln/>
+        </p:spPr>
+        <p:txBody>
+          <a:bodyPr wrap="square" lIns="0" tIns="0" rIns="0" bIns="0" rtlCol="0" anchor="t"/>
+          <a:lstStyle/>
+          <a:p>
+            <a:pPr algn="l" indent="0" marL="0">
+              <a:spcAft>
+                <a:spcPts val="1800"/>
+              </a:spcAft>
+              <a:buNone/>
+            </a:pPr>
+            <a:r>
+              <a:rPr lang="en-US" sz="1800" dirty="0">
+                <a:solidFill>
+                  <a:srgbClr val="277884"/>
+                </a:solidFill>
+                <a:latin typeface="Arial" pitchFamily="34" charset="0"/>
+                <a:ea typeface="Arial" pitchFamily="34" charset="-122"/>
+                <a:cs typeface="Arial" pitchFamily="34" charset="-120"/>
+              </a:rPr>
+              <a:t>More Constraints = More Productivity</a:t>
+            </a:r>
+            <a:endParaRPr lang="en-US" sz="1800" dirty="0"/>
+          </a:p>
+        </p:txBody>
+      </p:sp>
+      <p:sp>
+        <p:nvSpPr>
+          <p:cNvPr id="4" name="Text 2"/>
+          <p:cNvSpPr/>
+          <p:nvPr/>
+        </p:nvSpPr>
+        <p:spPr>
+          <a:xfrm>
+            <a:off x="507950" y="1387376"/>
+            <a:ext cx="8128099" cy="1524000"/>
+          </a:xfrm>
+          <a:prstGeom prst="rect">
+            <a:avLst/>
+          </a:prstGeom>
+          <a:noFill/>
+          <a:ln/>
+        </p:spPr>
+        <p:txBody>
+          <a:bodyPr wrap="square" lIns="152400" tIns="0" rIns="0" bIns="0" rtlCol="0" anchor="t"/>
+          <a:lstStyle/>
+          <a:p>
+            <a:pPr algn="l" marL="152400" indent="-152400">
+              <a:lnSpc>
+                <a:spcPts val="3000"/>
+              </a:lnSpc>
+              <a:buSzPct val="100000"/>
+              <a:buChar char="•"/>
+            </a:pPr>
+            <a:r>
+              <a:rPr lang="en-US" sz="1500" dirty="0">
+                <a:solidFill>
+                  <a:srgbClr val="2C3E50"/>
+                </a:solidFill>
+                <a:latin typeface="Arial" pitchFamily="34" charset="0"/>
+                <a:ea typeface="Arial" pitchFamily="34" charset="-122"/>
+                <a:cs typeface="Arial" pitchFamily="34" charset="-120"/>
+              </a:rPr>
+              <a:t>Non-negotiables list</a:t>
+            </a:r>
+            <a:endParaRPr lang="en-US" sz="1500" dirty="0"/>
+          </a:p>
+          <a:p>
+            <a:pPr algn="l" marL="152400" indent="-152400">
+              <a:lnSpc>
+                <a:spcPts val="3000"/>
+              </a:lnSpc>
+              <a:buSzPct val="100000"/>
+              <a:buChar char="•"/>
+            </a:pPr>
+            <a:r>
+              <a:rPr lang="en-US" sz="1500" dirty="0">
+                <a:solidFill>
+                  <a:srgbClr val="2C3E50"/>
+                </a:solidFill>
+                <a:latin typeface="Arial" pitchFamily="34" charset="0"/>
+                <a:ea typeface="Arial" pitchFamily="34" charset="-122"/>
+                <a:cs typeface="Arial" pitchFamily="34" charset="-120"/>
+              </a:rPr>
+              <a:t>Scope discipline rules</a:t>
+            </a:r>
+            <a:endParaRPr lang="en-US" sz="1500" dirty="0"/>
+          </a:p>
+          <a:p>
+            <a:pPr algn="l" marL="152400" indent="-152400">
+              <a:lnSpc>
+                <a:spcPts val="3000"/>
+              </a:lnSpc>
+              <a:buSzPct val="100000"/>
+              <a:buChar char="•"/>
+            </a:pPr>
+            <a:r>
+              <a:rPr lang="en-US" sz="1500" dirty="0">
+                <a:solidFill>
+                  <a:srgbClr val="2C3E50"/>
+                </a:solidFill>
+                <a:latin typeface="Arial" pitchFamily="34" charset="0"/>
+                <a:ea typeface="Arial" pitchFamily="34" charset="-122"/>
+                <a:cs typeface="Arial" pitchFamily="34" charset="-120"/>
+              </a:rPr>
+              <a:t>Escalation rules</a:t>
+            </a:r>
+            <a:endParaRPr lang="en-US" sz="1500" dirty="0"/>
+          </a:p>
+          <a:p>
+            <a:pPr algn="l" marL="152400" indent="-152400">
+              <a:lnSpc>
+                <a:spcPts val="3000"/>
+              </a:lnSpc>
+              <a:buSzPct val="100000"/>
+              <a:buChar char="•"/>
+            </a:pPr>
+            <a:r>
+              <a:rPr lang="en-US" sz="1500" dirty="0">
+                <a:solidFill>
+                  <a:srgbClr val="2C3E50"/>
+                </a:solidFill>
+                <a:latin typeface="Arial" pitchFamily="34" charset="0"/>
+                <a:ea typeface="Arial" pitchFamily="34" charset="-122"/>
+                <a:cs typeface="Arial" pitchFamily="34" charset="-120"/>
+              </a:rPr>
+              <a:t>Primacy clause</a:t>
+            </a:r>
+            <a:endParaRPr lang="en-US" sz="1500" dirty="0"/>
+          </a:p>
+        </p:txBody>
+      </p:sp>
+      <p:sp>
+        <p:nvSpPr>
+          <p:cNvPr id="5" name="Shape 3"/>
+          <p:cNvSpPr/>
+          <p:nvPr/>
+        </p:nvSpPr>
+        <p:spPr>
+          <a:xfrm>
+            <a:off x="546050" y="3165277"/>
+            <a:ext cx="0" cy="463451"/>
+          </a:xfrm>
+          <a:prstGeom prst="line">
+            <a:avLst/>
+          </a:prstGeom>
+          <a:noFill/>
+          <a:ln w="76200">
+            <a:solidFill>
+              <a:srgbClr val="277884"/>
+            </a:solidFill>
+            <a:prstDash val="solid"/>
+          </a:ln>
+        </p:spPr>
+      </p:sp>
+      <p:sp>
+        <p:nvSpPr>
+          <p:cNvPr id="6" name="Text 4"/>
+          <p:cNvSpPr/>
+          <p:nvPr/>
+        </p:nvSpPr>
+        <p:spPr>
+          <a:xfrm>
+            <a:off x="787301" y="3292227"/>
+            <a:ext cx="7798510" cy="209550"/>
+          </a:xfrm>
+          <a:prstGeom prst="rect">
+            <a:avLst/>
+          </a:prstGeom>
+          <a:noFill/>
+          <a:ln/>
+        </p:spPr>
+        <p:txBody>
+          <a:bodyPr wrap="square" lIns="0" tIns="0" rIns="0" bIns="0" rtlCol="0" anchor="t"/>
+          <a:lstStyle/>
+          <a:p>
+            <a:pPr algn="l" indent="0" marL="0">
+              <a:buNone/>
+            </a:pPr>
+            <a:r>
+              <a:rPr lang="en-US" sz="1400" b="1" dirty="0">
+                <a:solidFill>
+                  <a:srgbClr val="2C3E50"/>
+                </a:solidFill>
+                <a:latin typeface="Arial" pitchFamily="34" charset="0"/>
+                <a:ea typeface="Arial" pitchFamily="34" charset="-122"/>
+                <a:cs typeface="Arial" pitchFamily="34" charset="-120"/>
+              </a:rPr>
+              <a:t>The #1 time sink: fixing what the agent shouldn't have done</a:t>
+            </a:r>
+            <a:endParaRPr lang="en-US" sz="1400" dirty="0"/>
+          </a:p>
+        </p:txBody>
+      </p:sp>
+    </p:spTree>
+  </p:cSld>
+  <p:clrMapOvr>
+    <a:masterClrMapping/>
+  </p:clrMapOvr>
+</p:sld>
+</file>
+
+<file path=ppt/slides/slide25.xml><?xml version="1.0" encoding="utf-8"?>
+<p:sld xmlns:a="http://schemas.openxmlformats.org/drawingml/2006/main" xmlns:r="http://schemas.openxmlformats.org/officeDocument/2006/relationships" xmlns:p="http://schemas.openxmlformats.org/presentationml/2006/main">
+  <p:cSld name="Slide 25">
+    <p:bg>
+      <p:bgPr>
+        <a:solidFill>
+          <a:srgbClr val="F4F6F6"/>
+        </a:solidFill>
+      </p:bgPr>
+    </p:bg>
+    <p:spTree>
+      <p:nvGrpSpPr>
+        <p:cNvPr id="1" name=""/>
+        <p:cNvGrpSpPr/>
+        <p:nvPr/>
+      </p:nvGrpSpPr>
+      <p:grpSpPr>
+        <a:xfrm>
+          <a:off x="0" y="0"/>
+          <a:ext cx="0" cy="0"/>
+          <a:chOff x="0" y="0"/>
+          <a:chExt cx="0" cy="0"/>
+        </a:xfrm>
+      </p:grpSpPr>
+      <p:sp>
+        <p:nvSpPr>
+          <p:cNvPr id="2" name="Text 0"/>
+          <p:cNvSpPr/>
+          <p:nvPr/>
+        </p:nvSpPr>
+        <p:spPr>
+          <a:xfrm>
+            <a:off x="507950" y="457200"/>
+            <a:ext cx="8290661" cy="409575"/>
+          </a:xfrm>
+          <a:prstGeom prst="rect">
+            <a:avLst/>
+          </a:prstGeom>
+          <a:noFill/>
+          <a:ln/>
+        </p:spPr>
+        <p:txBody>
+          <a:bodyPr wrap="square" lIns="0" tIns="0" rIns="0" bIns="0" rtlCol="0" anchor="t"/>
+          <a:lstStyle/>
+          <a:p>
+            <a:pPr algn="l" indent="0" marL="0">
+              <a:spcBef>
+                <a:spcPts val="3600"/>
+              </a:spcBef>
+              <a:spcAft>
+                <a:spcPts val="2000"/>
+              </a:spcAft>
+              <a:buNone/>
+            </a:pPr>
+            <a:r>
+              <a:rPr lang="en-US" sz="2800" b="1" dirty="0">
+                <a:solidFill>
+                  <a:srgbClr val="1C2833"/>
+                </a:solidFill>
+                <a:latin typeface="Arial" pitchFamily="34" charset="0"/>
+                <a:ea typeface="Arial" pitchFamily="34" charset="-122"/>
+                <a:cs typeface="Arial" pitchFamily="34" charset="-120"/>
+              </a:rPr>
+              <a:t>Two Forces of Change</a:t>
+            </a:r>
+            <a:endParaRPr lang="en-US" sz="2800" dirty="0"/>
+          </a:p>
+        </p:txBody>
+      </p:sp>
+      <p:sp>
+        <p:nvSpPr>
+          <p:cNvPr id="3" name="Text 1"/>
+          <p:cNvSpPr/>
+          <p:nvPr/>
+        </p:nvSpPr>
+        <p:spPr>
+          <a:xfrm>
+            <a:off x="507950" y="1120676"/>
+            <a:ext cx="8128099" cy="850702"/>
+          </a:xfrm>
+          <a:prstGeom prst="rect">
+            <a:avLst/>
+          </a:prstGeom>
+          <a:solidFill>
+            <a:srgbClr val="FFFFFF"/>
+          </a:solidFill>
+          <a:ln/>
+        </p:spPr>
+        <p:txBody>
+          <a:bodyPr wrap="square" rtlCol="0" anchor="ctr"/>
+          <a:lstStyle/>
+          <a:p>
+            <a:pPr indent="0" marL="0">
+              <a:buNone/>
+            </a:pPr>
+            <a:endParaRPr lang="en-US" dirty="0"/>
+          </a:p>
+        </p:txBody>
+      </p:sp>
+      <p:sp>
+        <p:nvSpPr>
+          <p:cNvPr id="4" name="Shape 2"/>
+          <p:cNvSpPr/>
+          <p:nvPr/>
+        </p:nvSpPr>
+        <p:spPr>
+          <a:xfrm>
+            <a:off x="546050" y="1120676"/>
+            <a:ext cx="0" cy="850702"/>
+          </a:xfrm>
+          <a:prstGeom prst="line">
+            <a:avLst/>
+          </a:prstGeom>
+          <a:noFill/>
+          <a:ln w="76200">
+            <a:solidFill>
+              <a:srgbClr val="277884"/>
+            </a:solidFill>
+            <a:prstDash val="solid"/>
+          </a:ln>
+        </p:spPr>
+      </p:sp>
+      <p:sp>
+        <p:nvSpPr>
+          <p:cNvPr id="5" name="Text 3"/>
+          <p:cNvSpPr/>
+          <p:nvPr/>
+        </p:nvSpPr>
+        <p:spPr>
+          <a:xfrm>
+            <a:off x="812750" y="1298377"/>
+            <a:ext cx="7746593" cy="219075"/>
+          </a:xfrm>
+          <a:prstGeom prst="rect">
+            <a:avLst/>
+          </a:prstGeom>
+          <a:noFill/>
+          <a:ln/>
+        </p:spPr>
+        <p:txBody>
+          <a:bodyPr wrap="square" lIns="0" tIns="0" rIns="0" bIns="0" rtlCol="0" anchor="t"/>
+          <a:lstStyle/>
+          <a:p>
+            <a:pPr algn="l" indent="0" marL="0">
+              <a:spcAft>
+                <a:spcPts val="600"/>
+              </a:spcAft>
+              <a:buNone/>
+            </a:pPr>
+            <a:r>
+              <a:rPr lang="en-US" sz="1500" b="1" dirty="0">
+                <a:solidFill>
+                  <a:srgbClr val="277884"/>
+                </a:solidFill>
+                <a:latin typeface="Arial" pitchFamily="34" charset="0"/>
+                <a:ea typeface="Arial" pitchFamily="34" charset="-122"/>
+                <a:cs typeface="Arial" pitchFamily="34" charset="-120"/>
+              </a:rPr>
+              <a:t>Models improve → things that failed before now work</a:t>
+            </a:r>
+            <a:endParaRPr lang="en-US" sz="1500" dirty="0"/>
+          </a:p>
+        </p:txBody>
+      </p:sp>
+      <p:sp>
+        <p:nvSpPr>
+          <p:cNvPr id="6" name="Text 4"/>
+          <p:cNvSpPr/>
+          <p:nvPr/>
+        </p:nvSpPr>
+        <p:spPr>
+          <a:xfrm>
+            <a:off x="812750" y="1593652"/>
+            <a:ext cx="7746593" cy="200025"/>
+          </a:xfrm>
+          <a:prstGeom prst="rect">
+            <a:avLst/>
+          </a:prstGeom>
+          <a:noFill/>
+          <a:ln/>
+        </p:spPr>
+        <p:txBody>
+          <a:bodyPr wrap="square" lIns="0" tIns="0" rIns="0" bIns="0" rtlCol="0" anchor="t"/>
+          <a:lstStyle/>
+          <a:p>
+            <a:pPr algn="l" indent="0" marL="0">
+              <a:buNone/>
+            </a:pPr>
+            <a:r>
+              <a:rPr lang="en-US" sz="1300" dirty="0">
+                <a:solidFill>
+                  <a:srgbClr val="2C3E50"/>
+                </a:solidFill>
+                <a:latin typeface="Arial" pitchFamily="34" charset="0"/>
+                <a:ea typeface="Arial" pitchFamily="34" charset="-122"/>
+                <a:cs typeface="Arial" pitchFamily="34" charset="-120"/>
+              </a:rPr>
+              <a:t>Example: agent self-review improved dramatically with Sonnet 4</a:t>
+            </a:r>
+            <a:endParaRPr lang="en-US" sz="1300" dirty="0"/>
+          </a:p>
+        </p:txBody>
+      </p:sp>
+      <p:sp>
+        <p:nvSpPr>
+          <p:cNvPr id="7" name="Text 5"/>
+          <p:cNvSpPr/>
+          <p:nvPr/>
+        </p:nvSpPr>
+        <p:spPr>
+          <a:xfrm>
+            <a:off x="507950" y="2149078"/>
+            <a:ext cx="8128099" cy="850702"/>
+          </a:xfrm>
+          <a:prstGeom prst="rect">
+            <a:avLst/>
+          </a:prstGeom>
+          <a:solidFill>
+            <a:srgbClr val="FFFFFF"/>
+          </a:solidFill>
+          <a:ln/>
+        </p:spPr>
+        <p:txBody>
+          <a:bodyPr wrap="square" rtlCol="0" anchor="ctr"/>
+          <a:lstStyle/>
+          <a:p>
+            <a:pPr indent="0" marL="0">
+              <a:buNone/>
+            </a:pPr>
+            <a:endParaRPr lang="en-US" dirty="0"/>
+          </a:p>
+        </p:txBody>
+      </p:sp>
+      <p:sp>
+        <p:nvSpPr>
+          <p:cNvPr id="8" name="Shape 6"/>
+          <p:cNvSpPr/>
+          <p:nvPr/>
+        </p:nvSpPr>
+        <p:spPr>
+          <a:xfrm>
+            <a:off x="546050" y="2149078"/>
+            <a:ext cx="0" cy="850702"/>
+          </a:xfrm>
+          <a:prstGeom prst="line">
+            <a:avLst/>
+          </a:prstGeom>
+          <a:noFill/>
+          <a:ln w="76200">
+            <a:solidFill>
+              <a:srgbClr val="277884"/>
+            </a:solidFill>
+            <a:prstDash val="solid"/>
+          </a:ln>
+        </p:spPr>
+      </p:sp>
+      <p:sp>
+        <p:nvSpPr>
+          <p:cNvPr id="9" name="Text 7"/>
+          <p:cNvSpPr/>
+          <p:nvPr/>
+        </p:nvSpPr>
+        <p:spPr>
+          <a:xfrm>
+            <a:off x="812750" y="2326779"/>
+            <a:ext cx="7746593" cy="219075"/>
+          </a:xfrm>
+          <a:prstGeom prst="rect">
+            <a:avLst/>
+          </a:prstGeom>
+          <a:noFill/>
+          <a:ln/>
+        </p:spPr>
+        <p:txBody>
+          <a:bodyPr wrap="square" lIns="0" tIns="0" rIns="0" bIns="0" rtlCol="0" anchor="t"/>
+          <a:lstStyle/>
+          <a:p>
+            <a:pPr algn="l" indent="0" marL="0">
+              <a:spcAft>
+                <a:spcPts val="600"/>
+              </a:spcAft>
+              <a:buNone/>
+            </a:pPr>
+            <a:r>
+              <a:rPr lang="en-US" sz="1500" b="1" dirty="0">
+                <a:solidFill>
+                  <a:srgbClr val="277884"/>
+                </a:solidFill>
+                <a:latin typeface="Arial" pitchFamily="34" charset="0"/>
+                <a:ea typeface="Arial" pitchFamily="34" charset="-122"/>
+                <a:cs typeface="Arial" pitchFamily="34" charset="-120"/>
+              </a:rPr>
+              <a:t>You learn → spot patterns, eliminate waste, encode knowledge</a:t>
+            </a:r>
+            <a:endParaRPr lang="en-US" sz="1500" dirty="0"/>
+          </a:p>
+        </p:txBody>
+      </p:sp>
+      <p:sp>
+        <p:nvSpPr>
+          <p:cNvPr id="10" name="Text 8"/>
+          <p:cNvSpPr/>
+          <p:nvPr/>
+        </p:nvSpPr>
+        <p:spPr>
+          <a:xfrm>
+            <a:off x="812750" y="2622054"/>
+            <a:ext cx="7746593" cy="200025"/>
+          </a:xfrm>
+          <a:prstGeom prst="rect">
+            <a:avLst/>
+          </a:prstGeom>
+          <a:noFill/>
+          <a:ln/>
+        </p:spPr>
+        <p:txBody>
+          <a:bodyPr wrap="square" lIns="0" tIns="0" rIns="0" bIns="0" rtlCol="0" anchor="t"/>
+          <a:lstStyle/>
+          <a:p>
+            <a:pPr algn="l" indent="0" marL="0">
+              <a:buNone/>
+            </a:pPr>
+            <a:r>
+              <a:rPr lang="en-US" sz="1300" dirty="0">
+                <a:solidFill>
+                  <a:srgbClr val="2C3E50"/>
+                </a:solidFill>
+                <a:latin typeface="Arial" pitchFamily="34" charset="0"/>
+                <a:ea typeface="Arial" pitchFamily="34" charset="-122"/>
+                <a:cs typeface="Arial" pitchFamily="34" charset="-120"/>
+              </a:rPr>
+              <a:t>Each project makes the next one faster</a:t>
+            </a:r>
+            <a:endParaRPr lang="en-US" sz="1300" dirty="0"/>
+          </a:p>
+        </p:txBody>
+      </p:sp>
+    </p:spTree>
+  </p:cSld>
+  <p:clrMapOvr>
+    <a:masterClrMapping/>
+  </p:clrMapOvr>
+</p:sld>
+</file>
+
+<file path=ppt/slides/slide26.xml><?xml version="1.0" encoding="utf-8"?>
+<p:sld xmlns:a="http://schemas.openxmlformats.org/drawingml/2006/main" xmlns:r="http://schemas.openxmlformats.org/officeDocument/2006/relationships" xmlns:p="http://schemas.openxmlformats.org/presentationml/2006/main">
+  <p:cSld name="Slide 26">
+    <p:bg>
+      <p:bgPr>
+        <a:solidFill>
+          <a:srgbClr val="F4F6F6"/>
+        </a:solidFill>
+      </p:bgPr>
+    </p:bg>
+    <p:spTree>
+      <p:nvGrpSpPr>
+        <p:cNvPr id="1" name=""/>
+        <p:cNvGrpSpPr/>
+        <p:nvPr/>
+      </p:nvGrpSpPr>
+      <p:grpSpPr>
+        <a:xfrm>
+          <a:off x="0" y="0"/>
+          <a:ext cx="0" cy="0"/>
+          <a:chOff x="0" y="0"/>
+          <a:chExt cx="0" cy="0"/>
+        </a:xfrm>
+      </p:grpSpPr>
+      <p:sp>
+        <p:nvSpPr>
+          <p:cNvPr id="2" name="Text 0"/>
+          <p:cNvSpPr/>
+          <p:nvPr/>
+        </p:nvSpPr>
+        <p:spPr>
+          <a:xfrm>
+            <a:off x="507950" y="406301"/>
+            <a:ext cx="8290661" cy="409575"/>
+          </a:xfrm>
+          <a:prstGeom prst="rect">
+            <a:avLst/>
+          </a:prstGeom>
+          <a:noFill/>
+          <a:ln/>
+        </p:spPr>
+        <p:txBody>
+          <a:bodyPr wrap="square" lIns="0" tIns="0" rIns="0" bIns="0" rtlCol="0" anchor="t"/>
+          <a:lstStyle/>
+          <a:p>
+            <a:pPr algn="l" indent="0" marL="0">
+              <a:spcBef>
+                <a:spcPts val="3200"/>
+              </a:spcBef>
+              <a:spcAft>
+                <a:spcPts val="400"/>
+              </a:spcAft>
+              <a:buNone/>
+            </a:pPr>
+            <a:r>
+              <a:rPr lang="en-US" sz="2800" b="1" dirty="0">
+                <a:solidFill>
+                  <a:srgbClr val="1C2833"/>
+                </a:solidFill>
+                <a:latin typeface="Arial" pitchFamily="34" charset="0"/>
+                <a:ea typeface="Arial" pitchFamily="34" charset="-122"/>
+                <a:cs typeface="Arial" pitchFamily="34" charset="-120"/>
+              </a:rPr>
+              <a:t>The Dark Side</a:t>
+            </a:r>
+            <a:endParaRPr lang="en-US" sz="2800" dirty="0"/>
+          </a:p>
+        </p:txBody>
+      </p:sp>
+      <p:sp>
+        <p:nvSpPr>
+          <p:cNvPr id="3" name="Text 1"/>
+          <p:cNvSpPr/>
+          <p:nvPr/>
+        </p:nvSpPr>
+        <p:spPr>
+          <a:xfrm>
+            <a:off x="507950" y="866626"/>
+            <a:ext cx="8290661" cy="238125"/>
+          </a:xfrm>
+          <a:prstGeom prst="rect">
+            <a:avLst/>
+          </a:prstGeom>
+          <a:noFill/>
+          <a:ln/>
+        </p:spPr>
+        <p:txBody>
+          <a:bodyPr wrap="square" lIns="0" tIns="0" rIns="0" bIns="0" rtlCol="0" anchor="t"/>
+          <a:lstStyle/>
+          <a:p>
+            <a:pPr algn="l" indent="0" marL="0">
+              <a:spcAft>
+                <a:spcPts val="600"/>
+              </a:spcAft>
+              <a:buNone/>
+            </a:pPr>
+            <a:r>
+              <a:rPr lang="en-US" sz="1600" dirty="0">
+                <a:solidFill>
+                  <a:srgbClr val="277884"/>
+                </a:solidFill>
+                <a:latin typeface="Arial" pitchFamily="34" charset="0"/>
+                <a:ea typeface="Arial" pitchFamily="34" charset="-122"/>
+                <a:cs typeface="Arial" pitchFamily="34" charset="-120"/>
+              </a:rPr>
+              <a:t>AI doesn’t reduce work — it intensifies it</a:t>
+            </a:r>
+            <a:endParaRPr lang="en-US" sz="1600" dirty="0"/>
+          </a:p>
+        </p:txBody>
+      </p:sp>
+      <p:sp>
+        <p:nvSpPr>
+          <p:cNvPr id="4" name="Text 2"/>
+          <p:cNvSpPr/>
+          <p:nvPr/>
+        </p:nvSpPr>
+        <p:spPr>
+          <a:xfrm>
+            <a:off x="507950" y="1180951"/>
+            <a:ext cx="8290661" cy="152400"/>
+          </a:xfrm>
+          <a:prstGeom prst="rect">
+            <a:avLst/>
+          </a:prstGeom>
+          <a:noFill/>
+          <a:ln/>
+        </p:spPr>
+        <p:txBody>
+          <a:bodyPr wrap="square" lIns="0" tIns="0" rIns="0" bIns="0" rtlCol="0" anchor="t"/>
+          <a:lstStyle/>
+          <a:p>
+            <a:pPr algn="l" indent="0" marL="0">
+              <a:buNone/>
+            </a:pPr>
+            <a:r>
+              <a:rPr lang="en-US" sz="1100" i="1" dirty="0">
+                <a:solidFill>
+                  <a:srgbClr val="5EA8A7"/>
+                </a:solidFill>
+                <a:latin typeface="Arial" pitchFamily="34" charset="0"/>
+                <a:ea typeface="Arial" pitchFamily="34" charset="-122"/>
+                <a:cs typeface="Arial" pitchFamily="34" charset="-120"/>
+              </a:rPr>
+              <a:t>HBR, Feb 2026</a:t>
+            </a:r>
+            <a:endParaRPr lang="en-US" sz="1100" dirty="0"/>
+          </a:p>
+        </p:txBody>
+      </p:sp>
+      <p:sp>
+        <p:nvSpPr>
+          <p:cNvPr id="5" name="Text 3"/>
+          <p:cNvSpPr/>
+          <p:nvPr/>
+        </p:nvSpPr>
+        <p:spPr>
+          <a:xfrm>
+            <a:off x="507950" y="1511052"/>
+            <a:ext cx="8128099" cy="1067098"/>
+          </a:xfrm>
+          <a:prstGeom prst="rect">
+            <a:avLst/>
+          </a:prstGeom>
+          <a:noFill/>
+          <a:ln/>
+        </p:spPr>
+        <p:txBody>
+          <a:bodyPr wrap="square" lIns="152400" tIns="0" rIns="0" bIns="0" rtlCol="0" anchor="t"/>
+          <a:lstStyle/>
+          <a:p>
+            <a:pPr algn="l" marL="152400" indent="-152400">
+              <a:lnSpc>
+                <a:spcPts val="2800"/>
+              </a:lnSpc>
+              <a:buSzPct val="100000"/>
+              <a:buChar char="•"/>
+            </a:pPr>
+            <a:r>
+              <a:rPr lang="en-US" sz="1400" b="1" dirty="0">
+                <a:solidFill>
+                  <a:srgbClr val="277884"/>
+                </a:solidFill>
+                <a:latin typeface="Arial" pitchFamily="34" charset="0"/>
+                <a:ea typeface="Arial" pitchFamily="34" charset="-122"/>
+                <a:cs typeface="Arial" pitchFamily="34" charset="-120"/>
+              </a:rPr>
+              <a:t>Task expansion:</a:t>
+            </a:r>
+            <a:pPr algn="l" indent="0" marL="0">
+              <a:lnSpc>
+                <a:spcPts val="2800"/>
+              </a:lnSpc>
+              <a:buNone/>
+            </a:pPr>
+            <a:r>
+              <a:rPr lang="en-US" sz="1400" dirty="0">
+                <a:solidFill>
+                  <a:srgbClr val="2C3E50"/>
+                </a:solidFill>
+                <a:latin typeface="Arial" pitchFamily="34" charset="0"/>
+                <a:ea typeface="Arial" pitchFamily="34" charset="-122"/>
+                <a:cs typeface="Arial" pitchFamily="34" charset="-120"/>
+              </a:rPr>
+              <a:t> you absorb work you used to delegate or skip</a:t>
+            </a:r>
+            <a:endParaRPr lang="en-US" sz="1400" dirty="0"/>
+          </a:p>
+          <a:p>
+            <a:pPr algn="l" marL="152400" indent="-152400">
+              <a:lnSpc>
+                <a:spcPts val="2800"/>
+              </a:lnSpc>
+              <a:buSzPct val="100000"/>
+              <a:buChar char="•"/>
+            </a:pPr>
+            <a:r>
+              <a:rPr lang="en-US" sz="1400" b="1" dirty="0">
+                <a:solidFill>
+                  <a:srgbClr val="277884"/>
+                </a:solidFill>
+                <a:latin typeface="Arial" pitchFamily="34" charset="0"/>
+                <a:ea typeface="Arial" pitchFamily="34" charset="-122"/>
+                <a:cs typeface="Arial" pitchFamily="34" charset="-120"/>
+              </a:rPr>
+              <a:t>Blurred boundaries:</a:t>
+            </a:r>
+            <a:pPr algn="l" indent="0" marL="0">
+              <a:lnSpc>
+                <a:spcPts val="2800"/>
+              </a:lnSpc>
+              <a:buNone/>
+            </a:pPr>
+            <a:r>
+              <a:rPr lang="en-US" sz="1400" dirty="0">
+                <a:solidFill>
+                  <a:srgbClr val="2C3E50"/>
+                </a:solidFill>
+                <a:latin typeface="Arial" pitchFamily="34" charset="0"/>
+                <a:ea typeface="Arial" pitchFamily="34" charset="-122"/>
+                <a:cs typeface="Arial" pitchFamily="34" charset="-120"/>
+              </a:rPr>
+              <a:t> prompting feels like chatting, work bleeds into evenings</a:t>
+            </a:r>
+            <a:endParaRPr lang="en-US" sz="1400" dirty="0"/>
+          </a:p>
+          <a:p>
+            <a:pPr algn="l" marL="152400" indent="-152400">
+              <a:lnSpc>
+                <a:spcPts val="2800"/>
+              </a:lnSpc>
+              <a:buSzPct val="100000"/>
+              <a:buChar char="•"/>
+            </a:pPr>
+            <a:r>
+              <a:rPr lang="en-US" sz="1400" b="1" dirty="0">
+                <a:solidFill>
+                  <a:srgbClr val="277884"/>
+                </a:solidFill>
+                <a:latin typeface="Arial" pitchFamily="34" charset="0"/>
+                <a:ea typeface="Arial" pitchFamily="34" charset="-122"/>
+                <a:cs typeface="Arial" pitchFamily="34" charset="-120"/>
+              </a:rPr>
+              <a:t>Cognitive overload:</a:t>
+            </a:r>
+            <a:pPr algn="l" indent="0" marL="0">
+              <a:lnSpc>
+                <a:spcPts val="2800"/>
+              </a:lnSpc>
+              <a:buNone/>
+            </a:pPr>
+            <a:r>
+              <a:rPr lang="en-US" sz="1400" dirty="0">
+                <a:solidFill>
+                  <a:srgbClr val="2C3E50"/>
+                </a:solidFill>
+                <a:latin typeface="Arial" pitchFamily="34" charset="0"/>
+                <a:ea typeface="Arial" pitchFamily="34" charset="-122"/>
+                <a:cs typeface="Arial" pitchFamily="34" charset="-120"/>
+              </a:rPr>
+              <a:t> more tasks in parallel, harder to stop</a:t>
+            </a:r>
+            <a:endParaRPr lang="en-US" sz="1400" dirty="0"/>
+          </a:p>
+        </p:txBody>
+      </p:sp>
+      <p:sp>
+        <p:nvSpPr>
+          <p:cNvPr id="6" name="Text 4"/>
+          <p:cNvSpPr/>
+          <p:nvPr/>
+        </p:nvSpPr>
+        <p:spPr>
+          <a:xfrm>
+            <a:off x="507950" y="2781300"/>
+            <a:ext cx="8128099" cy="781050"/>
+          </a:xfrm>
+          <a:prstGeom prst="rect">
+            <a:avLst/>
+          </a:prstGeom>
+          <a:solidFill>
+            <a:srgbClr val="FFFFFF"/>
+          </a:solidFill>
+          <a:ln/>
+        </p:spPr>
+        <p:txBody>
+          <a:bodyPr wrap="square" rtlCol="0" anchor="ctr"/>
+          <a:lstStyle/>
+          <a:p>
+            <a:pPr indent="0" marL="0">
+              <a:buNone/>
+            </a:pPr>
+            <a:endParaRPr lang="en-US" dirty="0"/>
+          </a:p>
+        </p:txBody>
+      </p:sp>
+      <p:sp>
+        <p:nvSpPr>
+          <p:cNvPr id="7" name="Shape 5"/>
+          <p:cNvSpPr/>
+          <p:nvPr/>
+        </p:nvSpPr>
+        <p:spPr>
+          <a:xfrm>
+            <a:off x="546050" y="2781300"/>
+            <a:ext cx="0" cy="781050"/>
+          </a:xfrm>
+          <a:prstGeom prst="line">
+            <a:avLst/>
+          </a:prstGeom>
+          <a:noFill/>
+          <a:ln w="76200">
+            <a:solidFill>
+              <a:srgbClr val="277884"/>
+            </a:solidFill>
+            <a:prstDash val="solid"/>
+          </a:ln>
+        </p:spPr>
+      </p:sp>
+      <p:sp>
+        <p:nvSpPr>
+          <p:cNvPr id="8" name="Text 6"/>
+          <p:cNvSpPr/>
+          <p:nvPr/>
+        </p:nvSpPr>
+        <p:spPr>
+          <a:xfrm>
+            <a:off x="787301" y="2933700"/>
+            <a:ext cx="7798510" cy="200025"/>
+          </a:xfrm>
+          <a:prstGeom prst="rect">
+            <a:avLst/>
+          </a:prstGeom>
+          <a:noFill/>
+          <a:ln/>
+        </p:spPr>
+        <p:txBody>
+          <a:bodyPr wrap="square" lIns="0" tIns="0" rIns="0" bIns="0" rtlCol="0" anchor="t"/>
+          <a:lstStyle/>
+          <a:p>
+            <a:pPr algn="l" indent="0" marL="0">
+              <a:spcAft>
+                <a:spcPts val="600"/>
+              </a:spcAft>
+              <a:buNone/>
+            </a:pPr>
+            <a:r>
+              <a:rPr lang="en-US" sz="1300" i="1" dirty="0">
+                <a:solidFill>
+                  <a:srgbClr val="2C3E50"/>
+                </a:solidFill>
+                <a:latin typeface="Arial" pitchFamily="34" charset="0"/>
+                <a:ea typeface="Arial" pitchFamily="34" charset="-122"/>
+                <a:cs typeface="Arial" pitchFamily="34" charset="-120"/>
+              </a:rPr>
+              <a:t>“Without intention, AI makes it easier to do more — but harder to stop”</a:t>
+            </a:r>
+            <a:endParaRPr lang="en-US" sz="1300" dirty="0"/>
+          </a:p>
+        </p:txBody>
+      </p:sp>
+      <p:sp>
+        <p:nvSpPr>
+          <p:cNvPr id="9" name="Text 7"/>
+          <p:cNvSpPr/>
+          <p:nvPr/>
+        </p:nvSpPr>
+        <p:spPr>
+          <a:xfrm>
+            <a:off x="787301" y="3209925"/>
+            <a:ext cx="7798510" cy="200025"/>
+          </a:xfrm>
+          <a:prstGeom prst="rect">
+            <a:avLst/>
+          </a:prstGeom>
+          <a:noFill/>
+          <a:ln/>
+        </p:spPr>
+        <p:txBody>
+          <a:bodyPr wrap="square" lIns="0" tIns="0" rIns="0" bIns="0" rtlCol="0" anchor="t"/>
+          <a:lstStyle/>
+          <a:p>
+            <a:pPr algn="l" indent="0" marL="0">
+              <a:buNone/>
+            </a:pPr>
+            <a:r>
+              <a:rPr lang="en-US" sz="1300" b="1" dirty="0">
+                <a:solidFill>
+                  <a:srgbClr val="2C3E50"/>
+                </a:solidFill>
+                <a:latin typeface="Arial" pitchFamily="34" charset="0"/>
+                <a:ea typeface="Arial" pitchFamily="34" charset="-122"/>
+                <a:cs typeface="Arial" pitchFamily="34" charset="-120"/>
+              </a:rPr>
+              <a:t>Build intentional pauses. Protect focus time. Stay grounded.</a:t>
+            </a:r>
+            <a:endParaRPr lang="en-US" sz="1300" dirty="0"/>
+          </a:p>
+        </p:txBody>
+      </p:sp>
+    </p:spTree>
+  </p:cSld>
+  <p:clrMapOvr>
+    <a:masterClrMapping/>
+  </p:clrMapOvr>
+</p:sld>
+</file>
+
+<file path=ppt/slides/slide27.xml><?xml version="1.0" encoding="utf-8"?>
+<p:sld xmlns:a="http://schemas.openxmlformats.org/drawingml/2006/main" xmlns:r="http://schemas.openxmlformats.org/officeDocument/2006/relationships" xmlns:p="http://schemas.openxmlformats.org/presentationml/2006/main">
+  <p:cSld name="Slide 27">
+    <p:bg>
+      <p:bgPr>
+        <a:solidFill>
+          <a:srgbClr val="F4F6F6"/>
+        </a:solidFill>
+      </p:bgPr>
+    </p:bg>
+    <p:spTree>
+      <p:nvGrpSpPr>
+        <p:cNvPr id="1" name=""/>
+        <p:cNvGrpSpPr/>
+        <p:nvPr/>
+      </p:nvGrpSpPr>
+      <p:grpSpPr>
+        <a:xfrm>
+          <a:off x="0" y="0"/>
+          <a:ext cx="0" cy="0"/>
+          <a:chOff x="0" y="0"/>
+          <a:chExt cx="0" cy="0"/>
+        </a:xfrm>
+      </p:grpSpPr>
+      <p:sp>
+        <p:nvSpPr>
+          <p:cNvPr id="2" name="Text 0"/>
+          <p:cNvSpPr/>
+          <p:nvPr/>
+        </p:nvSpPr>
+        <p:spPr>
+          <a:xfrm>
+            <a:off x="507950" y="406301"/>
+            <a:ext cx="8290661" cy="371475"/>
+          </a:xfrm>
+          <a:prstGeom prst="rect">
+            <a:avLst/>
+          </a:prstGeom>
+          <a:noFill/>
+          <a:ln/>
+        </p:spPr>
+        <p:txBody>
+          <a:bodyPr wrap="square" lIns="0" tIns="0" rIns="0" bIns="0" rtlCol="0" anchor="t"/>
+          <a:lstStyle/>
+          <a:p>
+            <a:pPr algn="l" indent="0" marL="0">
+              <a:spcBef>
+                <a:spcPts val="3200"/>
+              </a:spcBef>
+              <a:spcAft>
+                <a:spcPts val="1600"/>
+              </a:spcAft>
+              <a:buNone/>
+            </a:pPr>
+            <a:r>
+              <a:rPr lang="en-US" sz="2600" b="1" dirty="0">
+                <a:solidFill>
+                  <a:srgbClr val="1C2833"/>
+                </a:solidFill>
+                <a:latin typeface="Arial" pitchFamily="34" charset="0"/>
+                <a:ea typeface="Arial" pitchFamily="34" charset="-122"/>
+                <a:cs typeface="Arial" pitchFamily="34" charset="-120"/>
+              </a:rPr>
+              <a:t>Key Takeaways</a:t>
+            </a:r>
+            <a:endParaRPr lang="en-US" sz="2600" dirty="0"/>
+          </a:p>
+        </p:txBody>
+      </p:sp>
+      <p:sp>
+        <p:nvSpPr>
+          <p:cNvPr id="3" name="Text 1"/>
+          <p:cNvSpPr/>
+          <p:nvPr/>
+        </p:nvSpPr>
+        <p:spPr>
+          <a:xfrm>
+            <a:off x="507950" y="980926"/>
+            <a:ext cx="8128099" cy="2364879"/>
+          </a:xfrm>
+          <a:prstGeom prst="rect">
+            <a:avLst/>
+          </a:prstGeom>
+          <a:noFill/>
+          <a:ln/>
+        </p:spPr>
+        <p:txBody>
+          <a:bodyPr wrap="square" lIns="152400" tIns="0" rIns="0" bIns="0" rtlCol="0" anchor="t"/>
+          <a:lstStyle/>
+          <a:p>
+            <a:pPr algn="l" marL="152400" indent="-152400">
+              <a:lnSpc>
+                <a:spcPts val="2660"/>
+              </a:lnSpc>
+              <a:buSzPct val="100000"/>
+              <a:buChar char="•"/>
+            </a:pPr>
+            <a:r>
+              <a:rPr lang="en-US" sz="1400" dirty="0">
+                <a:solidFill>
+                  <a:srgbClr val="2C3E50"/>
+                </a:solidFill>
+                <a:latin typeface="Arial" pitchFamily="34" charset="0"/>
+                <a:ea typeface="Arial" pitchFamily="34" charset="-122"/>
+                <a:cs typeface="Arial" pitchFamily="34" charset="-120"/>
+              </a:rPr>
+              <a:t>4-10x productivity increase — not a typo</a:t>
+            </a:r>
+            <a:endParaRPr lang="en-US" sz="1400" dirty="0"/>
+          </a:p>
+          <a:p>
+            <a:pPr algn="l" marL="152400" indent="-152400">
+              <a:lnSpc>
+                <a:spcPts val="2660"/>
+              </a:lnSpc>
+              <a:buSzPct val="100000"/>
+              <a:buChar char="•"/>
+            </a:pPr>
+            <a:r>
+              <a:rPr lang="en-US" sz="1400" dirty="0">
+                <a:solidFill>
+                  <a:srgbClr val="2C3E50"/>
+                </a:solidFill>
+                <a:latin typeface="Arial" pitchFamily="34" charset="0"/>
+                <a:ea typeface="Arial" pitchFamily="34" charset="-122"/>
+                <a:cs typeface="Arial" pitchFamily="34" charset="-120"/>
+              </a:rPr>
+              <a:t>Quality goes UP — rigorous automated review &gt; manual coding</a:t>
+            </a:r>
+            <a:endParaRPr lang="en-US" sz="1400" dirty="0"/>
+          </a:p>
+          <a:p>
+            <a:pPr algn="l" marL="152400" indent="-152400">
+              <a:lnSpc>
+                <a:spcPts val="2660"/>
+              </a:lnSpc>
+              <a:buSzPct val="100000"/>
+              <a:buChar char="•"/>
+            </a:pPr>
+            <a:r>
+              <a:rPr lang="en-US" sz="1400" dirty="0">
+                <a:solidFill>
+                  <a:srgbClr val="2C3E50"/>
+                </a:solidFill>
+                <a:latin typeface="Arial" pitchFamily="34" charset="0"/>
+                <a:ea typeface="Arial" pitchFamily="34" charset="-122"/>
+                <a:cs typeface="Arial" pitchFamily="34" charset="-120"/>
+              </a:rPr>
+              <a:t>Claude Code = orchestrator, not code generator</a:t>
+            </a:r>
+            <a:endParaRPr lang="en-US" sz="1400" dirty="0"/>
+          </a:p>
+          <a:p>
+            <a:pPr algn="l" marL="152400" indent="-152400">
+              <a:lnSpc>
+                <a:spcPts val="2660"/>
+              </a:lnSpc>
+              <a:buSzPct val="100000"/>
+              <a:buChar char="•"/>
+            </a:pPr>
+            <a:r>
+              <a:rPr lang="en-US" sz="1400" dirty="0">
+                <a:solidFill>
+                  <a:srgbClr val="2C3E50"/>
+                </a:solidFill>
+                <a:latin typeface="Arial" pitchFamily="34" charset="0"/>
+                <a:ea typeface="Arial" pitchFamily="34" charset="-122"/>
+                <a:cs typeface="Arial" pitchFamily="34" charset="-120"/>
+              </a:rPr>
+              <a:t>Automated review loops save human time</a:t>
+            </a:r>
+            <a:endParaRPr lang="en-US" sz="1400" dirty="0"/>
+          </a:p>
+          <a:p>
+            <a:pPr algn="l" marL="152400" indent="-152400">
+              <a:lnSpc>
+                <a:spcPts val="2660"/>
+              </a:lnSpc>
+              <a:buSzPct val="100000"/>
+              <a:buChar char="•"/>
+            </a:pPr>
+            <a:r>
+              <a:rPr lang="en-US" sz="1400" dirty="0">
+                <a:solidFill>
+                  <a:srgbClr val="2C3E50"/>
+                </a:solidFill>
+                <a:latin typeface="Arial" pitchFamily="34" charset="0"/>
+                <a:ea typeface="Arial" pitchFamily="34" charset="-122"/>
+                <a:cs typeface="Arial" pitchFamily="34" charset="-120"/>
+              </a:rPr>
+              <a:t>Invest in skills (domain knowledge), not more agents</a:t>
+            </a:r>
+            <a:endParaRPr lang="en-US" sz="1400" dirty="0"/>
+          </a:p>
+          <a:p>
+            <a:pPr algn="l" marL="152400" indent="-152400">
+              <a:lnSpc>
+                <a:spcPts val="2660"/>
+              </a:lnSpc>
+              <a:buSzPct val="100000"/>
+              <a:buChar char="•"/>
+            </a:pPr>
+            <a:r>
+              <a:rPr lang="en-US" sz="1400" dirty="0">
+                <a:solidFill>
+                  <a:srgbClr val="2C3E50"/>
+                </a:solidFill>
+                <a:latin typeface="Arial" pitchFamily="34" charset="0"/>
+                <a:ea typeface="Arial" pitchFamily="34" charset="-122"/>
+                <a:cs typeface="Arial" pitchFamily="34" charset="-120"/>
+              </a:rPr>
+              <a:t>Budget 10% for tooling evolution</a:t>
+            </a:r>
+            <a:endParaRPr lang="en-US" sz="1400" dirty="0"/>
+          </a:p>
+          <a:p>
+            <a:pPr algn="l" marL="152400" indent="-152400">
+              <a:lnSpc>
+                <a:spcPts val="2660"/>
+              </a:lnSpc>
+              <a:buSzPct val="100000"/>
+              <a:buChar char="•"/>
+            </a:pPr>
+            <a:r>
+              <a:rPr lang="en-US" sz="1400" dirty="0">
+                <a:solidFill>
+                  <a:srgbClr val="2C3E50"/>
+                </a:solidFill>
+                <a:latin typeface="Arial" pitchFamily="34" charset="0"/>
+                <a:ea typeface="Arial" pitchFamily="34" charset="-122"/>
+                <a:cs typeface="Arial" pitchFamily="34" charset="-120"/>
+              </a:rPr>
+              <a:t>More constraints = more productivity</a:t>
+            </a:r>
+            <a:endParaRPr lang="en-US" sz="1400" dirty="0"/>
+          </a:p>
+        </p:txBody>
+      </p:sp>
+    </p:spTree>
+  </p:cSld>
+  <p:clrMapOvr>
+    <a:masterClrMapping/>
+  </p:clrMapOvr>
+</p:sld>
+</file>
+
+<file path=ppt/slides/slide28.xml><?xml version="1.0" encoding="utf-8"?>
+<p:sld xmlns:a="http://schemas.openxmlformats.org/drawingml/2006/main" xmlns:r="http://schemas.openxmlformats.org/officeDocument/2006/relationships" xmlns:p="http://schemas.openxmlformats.org/presentationml/2006/main">
+  <p:cSld name="Slide 28">
     <p:bg>
       <p:bgPr>
         <a:blipFill dpi="0" rotWithShape="1">
